--- a/decks/model-registry/model-registry.pptx
+++ b/decks/model-registry/model-registry.pptx
@@ -1210,6 +1210,13 @@
 <file path=ppt/slides/slide1.xml><?xml version="1.0" encoding="utf-8"?>
 <p:sld xmlns:a="http://schemas.openxmlformats.org/drawingml/2006/main" xmlns:r="http://schemas.openxmlformats.org/officeDocument/2006/relationships" xmlns:p="http://schemas.openxmlformats.org/presentationml/2006/main">
   <p:cSld name="Slide 1">
+    <p:bg>
+      <p:bgPr>
+        <a:solidFill>
+          <a:srgbClr val="EFE9DD"/>
+        </a:solidFill>
+      </p:bgPr>
+    </p:bg>
     <p:spTree>
       <p:nvGrpSpPr>
         <p:cNvPr id="1" name=""/>
@@ -1224,30 +1231,565 @@
           <a:chExt cx="0" cy="0"/>
         </a:xfrm>
       </p:grpSpPr>
-      <p:pic>
-        <p:nvPicPr>
-          <p:cNvPr id="2" name="Image 0" descr="/tmp/slide-1787840560286-7ok99eayiqj.png">    </p:cNvPr>
-          <p:cNvPicPr>
-            <a:picLocks noChangeAspect="1"/>
-          </p:cNvPicPr>
-          <p:nvPr/>
-        </p:nvPicPr>
-        <p:blipFill>
-          <a:blip r:embed="rId1"/>
-          <a:stretch>
-            <a:fillRect/>
-          </a:stretch>
-        </p:blipFill>
-        <p:spPr>
-          <a:xfrm>
-            <a:off x="0" y="0"/>
-            <a:ext cx="12188952" cy="6858000"/>
-          </a:xfrm>
-          <a:prstGeom prst="rect">
-            <a:avLst/>
-          </a:prstGeom>
-        </p:spPr>
-      </p:pic>
+      <p:sp>
+        <p:nvSpPr>
+          <p:cNvPr id="2" name="Text 0"/>
+          <p:cNvSpPr/>
+          <p:nvPr/>
+        </p:nvSpPr>
+        <p:spPr>
+          <a:xfrm>
+            <a:off x="541599" y="440134"/>
+            <a:ext cx="5607680" cy="440333"/>
+          </a:xfrm>
+          <a:prstGeom prst="rect">
+            <a:avLst/>
+          </a:prstGeom>
+          <a:noFill/>
+          <a:ln/>
+        </p:spPr>
+        <p:txBody>
+          <a:bodyPr wrap="square" lIns="0" tIns="0" rIns="0" bIns="0" rtlCol="0" anchor="t"/>
+          <a:lstStyle/>
+          <a:p>
+            <a:pPr algn="l" indent="0" marL="0">
+              <a:lnSpc>
+                <a:spcPts val="3466"/>
+              </a:lnSpc>
+              <a:buNone/>
+            </a:pPr>
+            <a:r>
+              <a:rPr lang="en-US" sz="2666" b="1" dirty="0">
+                <a:solidFill>
+                  <a:srgbClr val="33302A"/>
+                </a:solidFill>
+                <a:latin typeface="SourceSerif4" pitchFamily="34" charset="0"/>
+                <a:ea typeface="SourceSerif4" pitchFamily="34" charset="-122"/>
+                <a:cs typeface="SourceSerif4" pitchFamily="34" charset="-120"/>
+              </a:rPr>
+              <a:t>Model Registry — operating guide</a:t>
+            </a:r>
+            <a:endParaRPr lang="en-US" sz="2666" dirty="0"/>
+          </a:p>
+        </p:txBody>
+      </p:sp>
+      <p:sp>
+        <p:nvSpPr>
+          <p:cNvPr id="3" name="Text 1"/>
+          <p:cNvSpPr/>
+          <p:nvPr/>
+        </p:nvSpPr>
+        <p:spPr>
+          <a:xfrm>
+            <a:off x="10186623" y="567134"/>
+            <a:ext cx="1489945" cy="270073"/>
+          </a:xfrm>
+          <a:prstGeom prst="rect">
+            <a:avLst/>
+          </a:prstGeom>
+          <a:noFill/>
+          <a:ln/>
+        </p:spPr>
+        <p:txBody>
+          <a:bodyPr wrap="square" lIns="0" tIns="0" rIns="0" bIns="0" rtlCol="0" anchor="t"/>
+          <a:lstStyle/>
+          <a:p>
+            <a:pPr algn="l" indent="0" marL="0">
+              <a:lnSpc>
+                <a:spcPts val="2126"/>
+              </a:lnSpc>
+              <a:buNone/>
+            </a:pPr>
+            <a:r>
+              <a:rPr lang="en-US" sz="1466" dirty="0">
+                <a:solidFill>
+                  <a:srgbClr val="7A7468"/>
+                </a:solidFill>
+                <a:latin typeface="IBMPlexMono" pitchFamily="34" charset="0"/>
+                <a:ea typeface="IBMPlexMono" pitchFamily="34" charset="-122"/>
+                <a:cs typeface="IBMPlexMono" pitchFamily="34" charset="-120"/>
+              </a:rPr>
+              <a:t>Fig. 01 / 05</a:t>
+            </a:r>
+            <a:endParaRPr lang="en-US" sz="1466" dirty="0"/>
+          </a:p>
+        </p:txBody>
+      </p:sp>
+      <p:sp>
+        <p:nvSpPr>
+          <p:cNvPr id="4" name="Text 2"/>
+          <p:cNvSpPr/>
+          <p:nvPr/>
+        </p:nvSpPr>
+        <p:spPr>
+          <a:xfrm>
+            <a:off x="541599" y="1083667"/>
+            <a:ext cx="11105754" cy="12700"/>
+          </a:xfrm>
+          <a:prstGeom prst="rect">
+            <a:avLst/>
+          </a:prstGeom>
+          <a:solidFill>
+            <a:srgbClr val="9A9180"/>
+          </a:solidFill>
+          <a:ln/>
+        </p:spPr>
+        <p:txBody>
+          <a:bodyPr wrap="square" rtlCol="0" anchor="ctr"/>
+          <a:lstStyle/>
+          <a:p>
+            <a:pPr indent="0" marL="0">
+              <a:buNone/>
+            </a:pPr>
+            <a:endParaRPr lang="en-US" dirty="0"/>
+          </a:p>
+        </p:txBody>
+      </p:sp>
+      <p:sp>
+        <p:nvSpPr>
+          <p:cNvPr id="5" name="Text 3"/>
+          <p:cNvSpPr/>
+          <p:nvPr/>
+        </p:nvSpPr>
+        <p:spPr>
+          <a:xfrm>
+            <a:off x="541599" y="2641600"/>
+            <a:ext cx="8633706" cy="932656"/>
+          </a:xfrm>
+          <a:prstGeom prst="rect">
+            <a:avLst/>
+          </a:prstGeom>
+          <a:noFill/>
+          <a:ln/>
+        </p:spPr>
+        <p:txBody>
+          <a:bodyPr wrap="square" lIns="0" tIns="0" rIns="0" bIns="0" rtlCol="0" anchor="t"/>
+          <a:lstStyle/>
+          <a:p>
+            <a:pPr algn="l" indent="0" marL="0">
+              <a:lnSpc>
+                <a:spcPts val="3673"/>
+              </a:lnSpc>
+              <a:buNone/>
+            </a:pPr>
+            <a:r>
+              <a:rPr lang="en-US" sz="2533" dirty="0">
+                <a:solidFill>
+                  <a:srgbClr val="33302A"/>
+                </a:solidFill>
+                <a:latin typeface="SourceSerif4" pitchFamily="34" charset="0"/>
+                <a:ea typeface="SourceSerif4" pitchFamily="34" charset="-122"/>
+                <a:cs typeface="SourceSerif4" pitchFamily="34" charset="-120"/>
+              </a:rPr>
+              <a:t>The registry is the record of what is allowed to run —</a:t>
+            </a:r>
+            <a:endParaRPr lang="en-US" sz="2533" dirty="0"/>
+          </a:p>
+          <a:p>
+            <a:pPr algn="l" indent="0" marL="0">
+              <a:lnSpc>
+                <a:spcPts val="3673"/>
+              </a:lnSpc>
+              <a:buNone/>
+            </a:pPr>
+            <a:r>
+              <a:rPr lang="en-US" sz="2533" dirty="0">
+                <a:solidFill>
+                  <a:srgbClr val="33302A"/>
+                </a:solidFill>
+                <a:latin typeface="SourceSerif4" pitchFamily="34" charset="0"/>
+                <a:ea typeface="SourceSerif4" pitchFamily="34" charset="-122"/>
+                <a:cs typeface="SourceSerif4" pitchFamily="34" charset="-120"/>
+              </a:rPr>
+              <a:t>and of who said so.</a:t>
+            </a:r>
+            <a:endParaRPr lang="en-US" sz="2533" dirty="0"/>
+          </a:p>
+        </p:txBody>
+      </p:sp>
+      <p:sp>
+        <p:nvSpPr>
+          <p:cNvPr id="6" name="Text 4"/>
+          <p:cNvSpPr/>
+          <p:nvPr/>
+        </p:nvSpPr>
+        <p:spPr>
+          <a:xfrm>
+            <a:off x="541599" y="4882753"/>
+            <a:ext cx="11105754" cy="1027113"/>
+          </a:xfrm>
+          <a:prstGeom prst="rect">
+            <a:avLst/>
+          </a:prstGeom>
+          <a:solidFill>
+            <a:srgbClr val="F6F2E8"/>
+          </a:solidFill>
+          <a:ln w="12698">
+            <a:solidFill>
+              <a:srgbClr val="C9C0AC"/>
+            </a:solidFill>
+          </a:ln>
+        </p:spPr>
+        <p:txBody>
+          <a:bodyPr wrap="square" rtlCol="0" anchor="ctr"/>
+          <a:lstStyle/>
+          <a:p>
+            <a:pPr indent="0" marL="0">
+              <a:buNone/>
+            </a:pPr>
+            <a:endParaRPr lang="en-US" dirty="0"/>
+          </a:p>
+        </p:txBody>
+      </p:sp>
+      <p:sp>
+        <p:nvSpPr>
+          <p:cNvPr id="7" name="Shape 5"/>
+          <p:cNvSpPr/>
+          <p:nvPr/>
+        </p:nvSpPr>
+        <p:spPr>
+          <a:xfrm>
+            <a:off x="4204435" y="4895453"/>
+            <a:ext cx="0" cy="1001712"/>
+          </a:xfrm>
+          <a:prstGeom prst="line">
+            <a:avLst/>
+          </a:prstGeom>
+          <a:noFill/>
+          <a:ln w="12698">
+            <a:solidFill>
+              <a:srgbClr val="C9C0AC"/>
+            </a:solidFill>
+            <a:prstDash val="solid"/>
+          </a:ln>
+        </p:spPr>
+      </p:sp>
+      <p:sp>
+        <p:nvSpPr>
+          <p:cNvPr id="8" name="Text 6"/>
+          <p:cNvSpPr/>
+          <p:nvPr/>
+        </p:nvSpPr>
+        <p:spPr>
+          <a:xfrm>
+            <a:off x="791171" y="5081587"/>
+            <a:ext cx="3233441" cy="236934"/>
+          </a:xfrm>
+          <a:prstGeom prst="rect">
+            <a:avLst/>
+          </a:prstGeom>
+          <a:noFill/>
+          <a:ln/>
+        </p:spPr>
+        <p:txBody>
+          <a:bodyPr wrap="square" lIns="0" tIns="0" rIns="0" bIns="0" rtlCol="0" anchor="t"/>
+          <a:lstStyle/>
+          <a:p>
+            <a:pPr algn="l" indent="0" marL="0">
+              <a:lnSpc>
+                <a:spcPts val="1866"/>
+              </a:lnSpc>
+              <a:spcAft>
+                <a:spcPts val="667"/>
+              </a:spcAft>
+              <a:buNone/>
+            </a:pPr>
+            <a:r>
+              <a:rPr lang="en-US" sz="1333" b="1" dirty="0">
+                <a:solidFill>
+                  <a:srgbClr val="7A7468"/>
+                </a:solidFill>
+                <a:latin typeface="SourceSerif4" pitchFamily="34" charset="0"/>
+                <a:ea typeface="SourceSerif4" pitchFamily="34" charset="-122"/>
+                <a:cs typeface="SourceSerif4" pitchFamily="34" charset="-120"/>
+              </a:rPr>
+              <a:t>PREPARED BY</a:t>
+            </a:r>
+            <a:endParaRPr lang="en-US" sz="1333" dirty="0"/>
+          </a:p>
+        </p:txBody>
+      </p:sp>
+      <p:sp>
+        <p:nvSpPr>
+          <p:cNvPr id="9" name="Text 7"/>
+          <p:cNvSpPr/>
+          <p:nvPr/>
+        </p:nvSpPr>
+        <p:spPr>
+          <a:xfrm>
+            <a:off x="791171" y="5403056"/>
+            <a:ext cx="3233441" cy="307975"/>
+          </a:xfrm>
+          <a:prstGeom prst="rect">
+            <a:avLst/>
+          </a:prstGeom>
+          <a:noFill/>
+          <a:ln/>
+        </p:spPr>
+        <p:txBody>
+          <a:bodyPr wrap="square" lIns="0" tIns="0" rIns="0" bIns="0" rtlCol="0" anchor="t"/>
+          <a:lstStyle/>
+          <a:p>
+            <a:pPr algn="l" indent="0" marL="0">
+              <a:lnSpc>
+                <a:spcPts val="2426"/>
+              </a:lnSpc>
+              <a:buNone/>
+            </a:pPr>
+            <a:r>
+              <a:rPr lang="en-US" sz="1733" dirty="0">
+                <a:solidFill>
+                  <a:srgbClr val="33302A"/>
+                </a:solidFill>
+                <a:latin typeface="IBMPlexMono" pitchFamily="34" charset="0"/>
+                <a:ea typeface="IBMPlexMono" pitchFamily="34" charset="-122"/>
+                <a:cs typeface="IBMPlexMono" pitchFamily="34" charset="-120"/>
+              </a:rPr>
+              <a:t>PRESENTER · TEAM</a:t>
+            </a:r>
+            <a:endParaRPr lang="en-US" sz="1733" dirty="0"/>
+          </a:p>
+        </p:txBody>
+      </p:sp>
+      <p:sp>
+        <p:nvSpPr>
+          <p:cNvPr id="10" name="Shape 8"/>
+          <p:cNvSpPr/>
+          <p:nvPr/>
+        </p:nvSpPr>
+        <p:spPr>
+          <a:xfrm>
+            <a:off x="6863626" y="4895453"/>
+            <a:ext cx="0" cy="1001712"/>
+          </a:xfrm>
+          <a:prstGeom prst="line">
+            <a:avLst/>
+          </a:prstGeom>
+          <a:noFill/>
+          <a:ln w="12698">
+            <a:solidFill>
+              <a:srgbClr val="C9C0AC"/>
+            </a:solidFill>
+            <a:prstDash val="solid"/>
+          </a:ln>
+        </p:spPr>
+      </p:sp>
+      <p:sp>
+        <p:nvSpPr>
+          <p:cNvPr id="11" name="Text 9"/>
+          <p:cNvSpPr/>
+          <p:nvPr/>
+        </p:nvSpPr>
+        <p:spPr>
+          <a:xfrm>
+            <a:off x="4447658" y="5081587"/>
+            <a:ext cx="2216199" cy="236934"/>
+          </a:xfrm>
+          <a:prstGeom prst="rect">
+            <a:avLst/>
+          </a:prstGeom>
+          <a:noFill/>
+          <a:ln/>
+        </p:spPr>
+        <p:txBody>
+          <a:bodyPr wrap="square" lIns="0" tIns="0" rIns="0" bIns="0" rtlCol="0" anchor="t"/>
+          <a:lstStyle/>
+          <a:p>
+            <a:pPr algn="l" indent="0" marL="0">
+              <a:lnSpc>
+                <a:spcPts val="1866"/>
+              </a:lnSpc>
+              <a:spcAft>
+                <a:spcPts val="667"/>
+              </a:spcAft>
+              <a:buNone/>
+            </a:pPr>
+            <a:r>
+              <a:rPr lang="en-US" sz="1333" b="1" dirty="0">
+                <a:solidFill>
+                  <a:srgbClr val="7A7468"/>
+                </a:solidFill>
+                <a:latin typeface="SourceSerif4" pitchFamily="34" charset="0"/>
+                <a:ea typeface="SourceSerif4" pitchFamily="34" charset="-122"/>
+                <a:cs typeface="SourceSerif4" pitchFamily="34" charset="-120"/>
+              </a:rPr>
+              <a:t>DATE</a:t>
+            </a:r>
+            <a:endParaRPr lang="en-US" sz="1333" dirty="0"/>
+          </a:p>
+        </p:txBody>
+      </p:sp>
+      <p:sp>
+        <p:nvSpPr>
+          <p:cNvPr id="12" name="Text 10"/>
+          <p:cNvSpPr/>
+          <p:nvPr/>
+        </p:nvSpPr>
+        <p:spPr>
+          <a:xfrm>
+            <a:off x="4447658" y="5403056"/>
+            <a:ext cx="2216199" cy="307975"/>
+          </a:xfrm>
+          <a:prstGeom prst="rect">
+            <a:avLst/>
+          </a:prstGeom>
+          <a:noFill/>
+          <a:ln/>
+        </p:spPr>
+        <p:txBody>
+          <a:bodyPr wrap="square" lIns="0" tIns="0" rIns="0" bIns="0" rtlCol="0" anchor="t"/>
+          <a:lstStyle/>
+          <a:p>
+            <a:pPr algn="l" indent="0" marL="0">
+              <a:lnSpc>
+                <a:spcPts val="2426"/>
+              </a:lnSpc>
+              <a:buNone/>
+            </a:pPr>
+            <a:r>
+              <a:rPr lang="en-US" sz="1733" dirty="0">
+                <a:solidFill>
+                  <a:srgbClr val="33302A"/>
+                </a:solidFill>
+                <a:latin typeface="IBMPlexMono" pitchFamily="34" charset="0"/>
+                <a:ea typeface="IBMPlexMono" pitchFamily="34" charset="-122"/>
+                <a:cs typeface="IBMPlexMono" pitchFamily="34" charset="-120"/>
+              </a:rPr>
+              <a:t>2026.08</a:t>
+            </a:r>
+            <a:endParaRPr lang="en-US" sz="1733" dirty="0"/>
+          </a:p>
+        </p:txBody>
+      </p:sp>
+      <p:sp>
+        <p:nvSpPr>
+          <p:cNvPr id="13" name="Text 11"/>
+          <p:cNvSpPr/>
+          <p:nvPr/>
+        </p:nvSpPr>
+        <p:spPr>
+          <a:xfrm>
+            <a:off x="7106849" y="5081587"/>
+            <a:ext cx="4376548" cy="236934"/>
+          </a:xfrm>
+          <a:prstGeom prst="rect">
+            <a:avLst/>
+          </a:prstGeom>
+          <a:noFill/>
+          <a:ln/>
+        </p:spPr>
+        <p:txBody>
+          <a:bodyPr wrap="square" lIns="0" tIns="0" rIns="0" bIns="0" rtlCol="0" anchor="t"/>
+          <a:lstStyle/>
+          <a:p>
+            <a:pPr algn="l" indent="0" marL="0">
+              <a:lnSpc>
+                <a:spcPts val="1866"/>
+              </a:lnSpc>
+              <a:spcAft>
+                <a:spcPts val="667"/>
+              </a:spcAft>
+              <a:buNone/>
+            </a:pPr>
+            <a:r>
+              <a:rPr lang="en-US" sz="1333" b="1" dirty="0">
+                <a:solidFill>
+                  <a:srgbClr val="7A7468"/>
+                </a:solidFill>
+                <a:latin typeface="SourceSerif4" pitchFamily="34" charset="0"/>
+                <a:ea typeface="SourceSerif4" pitchFamily="34" charset="-122"/>
+                <a:cs typeface="SourceSerif4" pitchFamily="34" charset="-120"/>
+              </a:rPr>
+              <a:t>APPLIES TO</a:t>
+            </a:r>
+            <a:endParaRPr lang="en-US" sz="1333" dirty="0"/>
+          </a:p>
+        </p:txBody>
+      </p:sp>
+      <p:sp>
+        <p:nvSpPr>
+          <p:cNvPr id="14" name="Text 12"/>
+          <p:cNvSpPr/>
+          <p:nvPr/>
+        </p:nvSpPr>
+        <p:spPr>
+          <a:xfrm>
+            <a:off x="7106849" y="5403056"/>
+            <a:ext cx="4376548" cy="307975"/>
+          </a:xfrm>
+          <a:prstGeom prst="rect">
+            <a:avLst/>
+          </a:prstGeom>
+          <a:noFill/>
+          <a:ln/>
+        </p:spPr>
+        <p:txBody>
+          <a:bodyPr wrap="square" lIns="0" tIns="0" rIns="0" bIns="0" rtlCol="0" anchor="t"/>
+          <a:lstStyle/>
+          <a:p>
+            <a:pPr algn="l" indent="0" marL="0">
+              <a:lnSpc>
+                <a:spcPts val="2426"/>
+              </a:lnSpc>
+              <a:buNone/>
+            </a:pPr>
+            <a:r>
+              <a:rPr lang="en-US" sz="1733" dirty="0">
+                <a:solidFill>
+                  <a:srgbClr val="33302A"/>
+                </a:solidFill>
+                <a:latin typeface="IBMPlexMono" pitchFamily="34" charset="0"/>
+                <a:ea typeface="IBMPlexMono" pitchFamily="34" charset="-122"/>
+                <a:cs typeface="IBMPlexMono" pitchFamily="34" charset="-120"/>
+              </a:rPr>
+              <a:t>ALL REGISTERED MODELS</a:t>
+            </a:r>
+            <a:endParaRPr lang="en-US" sz="1733" dirty="0"/>
+          </a:p>
+        </p:txBody>
+      </p:sp>
+      <p:sp>
+        <p:nvSpPr>
+          <p:cNvPr id="15" name="Text 13"/>
+          <p:cNvSpPr/>
+          <p:nvPr/>
+        </p:nvSpPr>
+        <p:spPr>
+          <a:xfrm>
+            <a:off x="541599" y="6113066"/>
+            <a:ext cx="11327869" cy="236934"/>
+          </a:xfrm>
+          <a:prstGeom prst="rect">
+            <a:avLst/>
+          </a:prstGeom>
+          <a:noFill/>
+          <a:ln/>
+        </p:spPr>
+        <p:txBody>
+          <a:bodyPr wrap="square" lIns="0" tIns="0" rIns="0" bIns="0" rtlCol="0" anchor="t"/>
+          <a:lstStyle/>
+          <a:p>
+            <a:pPr algn="l" indent="0" marL="0">
+              <a:lnSpc>
+                <a:spcPts val="1866"/>
+              </a:lnSpc>
+              <a:buNone/>
+            </a:pPr>
+            <a:r>
+              <a:rPr lang="en-US" sz="1333" dirty="0">
+                <a:solidFill>
+                  <a:srgbClr val="7A7468"/>
+                </a:solidFill>
+                <a:latin typeface="IBMPlexMono" pitchFamily="34" charset="0"/>
+                <a:ea typeface="IBMPlexMono" pitchFamily="34" charset="-122"/>
+                <a:cs typeface="IBMPlexMono" pitchFamily="34" charset="-120"/>
+              </a:rPr>
+              <a:t>MODEL REGISTRY — OPERATING GUIDE · SHEET 01/05 · NO CHART, NO EXTERNAL DATA</a:t>
+            </a:r>
+            <a:endParaRPr lang="en-US" sz="1333" dirty="0"/>
+          </a:p>
+        </p:txBody>
+      </p:sp>
     </p:spTree>
   </p:cSld>
   <p:clrMapOvr>
@@ -1259,6 +1801,13 @@
 <file path=ppt/slides/slide2.xml><?xml version="1.0" encoding="utf-8"?>
 <p:sld xmlns:a="http://schemas.openxmlformats.org/drawingml/2006/main" xmlns:r="http://schemas.openxmlformats.org/officeDocument/2006/relationships" xmlns:p="http://schemas.openxmlformats.org/presentationml/2006/main">
   <p:cSld name="Slide 2">
+    <p:bg>
+      <p:bgPr>
+        <a:solidFill>
+          <a:srgbClr val="EFE9DD"/>
+        </a:solidFill>
+      </p:bgPr>
+    </p:bg>
     <p:spTree>
       <p:nvGrpSpPr>
         <p:cNvPr id="1" name=""/>
@@ -1273,30 +1822,1138 @@
           <a:chExt cx="0" cy="0"/>
         </a:xfrm>
       </p:grpSpPr>
-      <p:pic>
-        <p:nvPicPr>
-          <p:cNvPr id="2" name="Image 0" descr="/tmp/slide-1787840560579-xcr8h7zehu.png">    </p:cNvPr>
-          <p:cNvPicPr>
-            <a:picLocks noChangeAspect="1"/>
-          </p:cNvPicPr>
-          <p:nvPr/>
-        </p:nvPicPr>
-        <p:blipFill>
-          <a:blip r:embed="rId1"/>
-          <a:stretch>
-            <a:fillRect/>
-          </a:stretch>
-        </p:blipFill>
-        <p:spPr>
-          <a:xfrm>
-            <a:off x="0" y="0"/>
-            <a:ext cx="12188952" cy="6858000"/>
-          </a:xfrm>
-          <a:prstGeom prst="rect">
-            <a:avLst/>
-          </a:prstGeom>
-        </p:spPr>
-      </p:pic>
+      <p:sp>
+        <p:nvSpPr>
+          <p:cNvPr id="2" name="Text 0"/>
+          <p:cNvSpPr/>
+          <p:nvPr/>
+        </p:nvSpPr>
+        <p:spPr>
+          <a:xfrm>
+            <a:off x="541599" y="440134"/>
+            <a:ext cx="5504074" cy="440333"/>
+          </a:xfrm>
+          <a:prstGeom prst="rect">
+            <a:avLst/>
+          </a:prstGeom>
+          <a:noFill/>
+          <a:ln/>
+        </p:spPr>
+        <p:txBody>
+          <a:bodyPr wrap="square" lIns="0" tIns="0" rIns="0" bIns="0" rtlCol="0" anchor="t"/>
+          <a:lstStyle/>
+          <a:p>
+            <a:pPr algn="l" indent="0" marL="0">
+              <a:lnSpc>
+                <a:spcPts val="3466"/>
+              </a:lnSpc>
+              <a:buNone/>
+            </a:pPr>
+            <a:r>
+              <a:rPr lang="en-US" sz="2666" b="1" dirty="0">
+                <a:solidFill>
+                  <a:srgbClr val="33302A"/>
+                </a:solidFill>
+                <a:latin typeface="SourceSerif4" pitchFamily="34" charset="0"/>
+                <a:ea typeface="SourceSerif4" pitchFamily="34" charset="-122"/>
+                <a:cs typeface="SourceSerif4" pitchFamily="34" charset="-120"/>
+              </a:rPr>
+              <a:t>What the registry is the record of</a:t>
+            </a:r>
+            <a:endParaRPr lang="en-US" sz="2666" dirty="0"/>
+          </a:p>
+        </p:txBody>
+      </p:sp>
+      <p:sp>
+        <p:nvSpPr>
+          <p:cNvPr id="3" name="Text 1"/>
+          <p:cNvSpPr/>
+          <p:nvPr/>
+        </p:nvSpPr>
+        <p:spPr>
+          <a:xfrm>
+            <a:off x="10186623" y="567134"/>
+            <a:ext cx="1489945" cy="270073"/>
+          </a:xfrm>
+          <a:prstGeom prst="rect">
+            <a:avLst/>
+          </a:prstGeom>
+          <a:noFill/>
+          <a:ln/>
+        </p:spPr>
+        <p:txBody>
+          <a:bodyPr wrap="square" lIns="0" tIns="0" rIns="0" bIns="0" rtlCol="0" anchor="t"/>
+          <a:lstStyle/>
+          <a:p>
+            <a:pPr algn="l" indent="0" marL="0">
+              <a:lnSpc>
+                <a:spcPts val="2126"/>
+              </a:lnSpc>
+              <a:buNone/>
+            </a:pPr>
+            <a:r>
+              <a:rPr lang="en-US" sz="1466" dirty="0">
+                <a:solidFill>
+                  <a:srgbClr val="7A7468"/>
+                </a:solidFill>
+                <a:latin typeface="IBMPlexMono" pitchFamily="34" charset="0"/>
+                <a:ea typeface="IBMPlexMono" pitchFamily="34" charset="-122"/>
+                <a:cs typeface="IBMPlexMono" pitchFamily="34" charset="-120"/>
+              </a:rPr>
+              <a:t>Fig. 02 / 05</a:t>
+            </a:r>
+            <a:endParaRPr lang="en-US" sz="1466" dirty="0"/>
+          </a:p>
+        </p:txBody>
+      </p:sp>
+      <p:sp>
+        <p:nvSpPr>
+          <p:cNvPr id="4" name="Text 2"/>
+          <p:cNvSpPr/>
+          <p:nvPr/>
+        </p:nvSpPr>
+        <p:spPr>
+          <a:xfrm>
+            <a:off x="541599" y="1083667"/>
+            <a:ext cx="11105754" cy="12700"/>
+          </a:xfrm>
+          <a:prstGeom prst="rect">
+            <a:avLst/>
+          </a:prstGeom>
+          <a:solidFill>
+            <a:srgbClr val="9A9180"/>
+          </a:solidFill>
+          <a:ln/>
+        </p:spPr>
+        <p:txBody>
+          <a:bodyPr wrap="square" rtlCol="0" anchor="ctr"/>
+          <a:lstStyle/>
+          <a:p>
+            <a:pPr indent="0" marL="0">
+              <a:buNone/>
+            </a:pPr>
+            <a:endParaRPr lang="en-US" dirty="0"/>
+          </a:p>
+        </p:txBody>
+      </p:sp>
+      <p:sp>
+        <p:nvSpPr>
+          <p:cNvPr id="5" name="Text 3"/>
+          <p:cNvSpPr/>
+          <p:nvPr/>
+        </p:nvSpPr>
+        <p:spPr>
+          <a:xfrm>
+            <a:off x="541599" y="1333302"/>
+            <a:ext cx="11105754" cy="4029670"/>
+          </a:xfrm>
+          <a:prstGeom prst="rect">
+            <a:avLst/>
+          </a:prstGeom>
+          <a:solidFill>
+            <a:srgbClr val="F6F2E8"/>
+          </a:solidFill>
+          <a:ln w="12698">
+            <a:solidFill>
+              <a:srgbClr val="C9C0AC"/>
+            </a:solidFill>
+          </a:ln>
+        </p:spPr>
+        <p:txBody>
+          <a:bodyPr wrap="square" rtlCol="0" anchor="ctr"/>
+          <a:lstStyle/>
+          <a:p>
+            <a:pPr indent="0" marL="0">
+              <a:buNone/>
+            </a:pPr>
+            <a:endParaRPr lang="en-US" dirty="0"/>
+          </a:p>
+        </p:txBody>
+      </p:sp>
+      <p:sp>
+        <p:nvSpPr>
+          <p:cNvPr id="6" name="Text 4"/>
+          <p:cNvSpPr/>
+          <p:nvPr/>
+        </p:nvSpPr>
+        <p:spPr>
+          <a:xfrm>
+            <a:off x="554296" y="1346002"/>
+            <a:ext cx="11080360" cy="507603"/>
+          </a:xfrm>
+          <a:prstGeom prst="rect">
+            <a:avLst/>
+          </a:prstGeom>
+          <a:solidFill>
+            <a:srgbClr val="33302A"/>
+          </a:solidFill>
+          <a:ln/>
+        </p:spPr>
+        <p:txBody>
+          <a:bodyPr wrap="square" rtlCol="0" anchor="ctr"/>
+          <a:lstStyle/>
+          <a:p>
+            <a:pPr indent="0" marL="0">
+              <a:buNone/>
+            </a:pPr>
+            <a:endParaRPr lang="en-US" dirty="0"/>
+          </a:p>
+        </p:txBody>
+      </p:sp>
+      <p:sp>
+        <p:nvSpPr>
+          <p:cNvPr id="7" name="Text 5"/>
+          <p:cNvSpPr/>
+          <p:nvPr/>
+        </p:nvSpPr>
+        <p:spPr>
+          <a:xfrm>
+            <a:off x="1788268" y="1481336"/>
+            <a:ext cx="1890002" cy="236934"/>
+          </a:xfrm>
+          <a:prstGeom prst="rect">
+            <a:avLst/>
+          </a:prstGeom>
+          <a:noFill/>
+          <a:ln/>
+        </p:spPr>
+        <p:txBody>
+          <a:bodyPr wrap="square" lIns="0" tIns="0" rIns="0" bIns="0" rtlCol="0" anchor="t"/>
+          <a:lstStyle/>
+          <a:p>
+            <a:pPr algn="l" indent="0" marL="0">
+              <a:lnSpc>
+                <a:spcPts val="1866"/>
+              </a:lnSpc>
+              <a:buNone/>
+            </a:pPr>
+            <a:r>
+              <a:rPr lang="en-US" sz="1333" b="1" dirty="0">
+                <a:solidFill>
+                  <a:srgbClr val="EFE9DD"/>
+                </a:solidFill>
+                <a:latin typeface="SourceSerif4" pitchFamily="34" charset="0"/>
+                <a:ea typeface="SourceSerif4" pitchFamily="34" charset="-122"/>
+                <a:cs typeface="SourceSerif4" pitchFamily="34" charset="-120"/>
+              </a:rPr>
+              <a:t>FIELD</a:t>
+            </a:r>
+            <a:endParaRPr lang="en-US" sz="1333" dirty="0"/>
+          </a:p>
+        </p:txBody>
+      </p:sp>
+      <p:sp>
+        <p:nvSpPr>
+          <p:cNvPr id="8" name="Text 6"/>
+          <p:cNvSpPr/>
+          <p:nvPr/>
+        </p:nvSpPr>
+        <p:spPr>
+          <a:xfrm>
+            <a:off x="4114962" y="1481336"/>
+            <a:ext cx="3811369" cy="236934"/>
+          </a:xfrm>
+          <a:prstGeom prst="rect">
+            <a:avLst/>
+          </a:prstGeom>
+          <a:noFill/>
+          <a:ln/>
+        </p:spPr>
+        <p:txBody>
+          <a:bodyPr wrap="square" lIns="0" tIns="0" rIns="0" bIns="0" rtlCol="0" anchor="t"/>
+          <a:lstStyle/>
+          <a:p>
+            <a:pPr algn="l" indent="0" marL="0">
+              <a:lnSpc>
+                <a:spcPts val="1866"/>
+              </a:lnSpc>
+              <a:buNone/>
+            </a:pPr>
+            <a:r>
+              <a:rPr lang="en-US" sz="1333" b="1" dirty="0">
+                <a:solidFill>
+                  <a:srgbClr val="EFE9DD"/>
+                </a:solidFill>
+                <a:latin typeface="SourceSerif4" pitchFamily="34" charset="0"/>
+                <a:ea typeface="SourceSerif4" pitchFamily="34" charset="-122"/>
+                <a:cs typeface="SourceSerif4" pitchFamily="34" charset="-120"/>
+              </a:rPr>
+              <a:t>WHAT IT ANSWERS</a:t>
+            </a:r>
+            <a:endParaRPr lang="en-US" sz="1333" dirty="0"/>
+          </a:p>
+        </p:txBody>
+      </p:sp>
+      <p:sp>
+        <p:nvSpPr>
+          <p:cNvPr id="9" name="Text 7"/>
+          <p:cNvSpPr/>
+          <p:nvPr/>
+        </p:nvSpPr>
+        <p:spPr>
+          <a:xfrm>
+            <a:off x="8325348" y="1481336"/>
+            <a:ext cx="3133275" cy="236934"/>
+          </a:xfrm>
+          <a:prstGeom prst="rect">
+            <a:avLst/>
+          </a:prstGeom>
+          <a:noFill/>
+          <a:ln/>
+        </p:spPr>
+        <p:txBody>
+          <a:bodyPr wrap="square" lIns="0" tIns="0" rIns="0" bIns="0" rtlCol="0" anchor="t"/>
+          <a:lstStyle/>
+          <a:p>
+            <a:pPr algn="l" indent="0" marL="0">
+              <a:lnSpc>
+                <a:spcPts val="1866"/>
+              </a:lnSpc>
+              <a:buNone/>
+            </a:pPr>
+            <a:r>
+              <a:rPr lang="en-US" sz="1333" b="1" dirty="0">
+                <a:solidFill>
+                  <a:srgbClr val="EFE9DD"/>
+                </a:solidFill>
+                <a:latin typeface="SourceSerif4" pitchFamily="34" charset="0"/>
+                <a:ea typeface="SourceSerif4" pitchFamily="34" charset="-122"/>
+                <a:cs typeface="SourceSerif4" pitchFamily="34" charset="-120"/>
+              </a:rPr>
+              <a:t>WHO WRITES IT</a:t>
+            </a:r>
+            <a:endParaRPr lang="en-US" sz="1333" dirty="0"/>
+          </a:p>
+        </p:txBody>
+      </p:sp>
+      <p:sp>
+        <p:nvSpPr>
+          <p:cNvPr id="10" name="Text 8"/>
+          <p:cNvSpPr/>
+          <p:nvPr/>
+        </p:nvSpPr>
+        <p:spPr>
+          <a:xfrm>
+            <a:off x="791171" y="2155428"/>
+            <a:ext cx="533814" cy="260747"/>
+          </a:xfrm>
+          <a:prstGeom prst="rect">
+            <a:avLst/>
+          </a:prstGeom>
+          <a:noFill/>
+          <a:ln/>
+        </p:spPr>
+        <p:txBody>
+          <a:bodyPr wrap="square" lIns="0" tIns="0" rIns="0" bIns="0" rtlCol="0" anchor="t"/>
+          <a:lstStyle/>
+          <a:p>
+            <a:pPr algn="l" indent="0" marL="0">
+              <a:lnSpc>
+                <a:spcPts val="2053"/>
+              </a:lnSpc>
+              <a:buNone/>
+            </a:pPr>
+            <a:r>
+              <a:rPr lang="en-US" sz="1466" dirty="0">
+                <a:solidFill>
+                  <a:srgbClr val="5A5448"/>
+                </a:solidFill>
+                <a:latin typeface="IBMPlexMono" pitchFamily="34" charset="0"/>
+                <a:ea typeface="IBMPlexMono" pitchFamily="34" charset="-122"/>
+                <a:cs typeface="IBMPlexMono" pitchFamily="34" charset="-120"/>
+              </a:rPr>
+              <a:t>A1</a:t>
+            </a:r>
+            <a:endParaRPr lang="en-US" sz="1466" dirty="0"/>
+          </a:p>
+        </p:txBody>
+      </p:sp>
+      <p:sp>
+        <p:nvSpPr>
+          <p:cNvPr id="11" name="Text 9"/>
+          <p:cNvSpPr/>
+          <p:nvPr/>
+        </p:nvSpPr>
+        <p:spPr>
+          <a:xfrm>
+            <a:off x="1788268" y="2114352"/>
+            <a:ext cx="1890002" cy="342900"/>
+          </a:xfrm>
+          <a:prstGeom prst="rect">
+            <a:avLst/>
+          </a:prstGeom>
+          <a:noFill/>
+          <a:ln/>
+        </p:spPr>
+        <p:txBody>
+          <a:bodyPr wrap="square" lIns="0" tIns="0" rIns="0" bIns="0" rtlCol="0" anchor="t"/>
+          <a:lstStyle/>
+          <a:p>
+            <a:pPr algn="l" indent="0" marL="0">
+              <a:lnSpc>
+                <a:spcPts val="2700"/>
+              </a:lnSpc>
+              <a:buNone/>
+            </a:pPr>
+            <a:r>
+              <a:rPr lang="en-US" sz="2000" b="1" dirty="0">
+                <a:solidFill>
+                  <a:srgbClr val="33302A"/>
+                </a:solidFill>
+                <a:latin typeface="SourceSerif4" pitchFamily="34" charset="0"/>
+                <a:ea typeface="SourceSerif4" pitchFamily="34" charset="-122"/>
+                <a:cs typeface="SourceSerif4" pitchFamily="34" charset="-120"/>
+              </a:rPr>
+              <a:t>Version</a:t>
+            </a:r>
+            <a:endParaRPr lang="en-US" sz="2000" dirty="0"/>
+          </a:p>
+        </p:txBody>
+      </p:sp>
+      <p:sp>
+        <p:nvSpPr>
+          <p:cNvPr id="12" name="Text 10"/>
+          <p:cNvSpPr/>
+          <p:nvPr/>
+        </p:nvSpPr>
+        <p:spPr>
+          <a:xfrm>
+            <a:off x="4114962" y="2113955"/>
+            <a:ext cx="3811369" cy="343694"/>
+          </a:xfrm>
+          <a:prstGeom prst="rect">
+            <a:avLst/>
+          </a:prstGeom>
+          <a:noFill/>
+          <a:ln/>
+        </p:spPr>
+        <p:txBody>
+          <a:bodyPr wrap="square" lIns="0" tIns="0" rIns="0" bIns="0" rtlCol="0" anchor="t"/>
+          <a:lstStyle/>
+          <a:p>
+            <a:pPr algn="l" indent="0" marL="0">
+              <a:lnSpc>
+                <a:spcPts val="2706"/>
+              </a:lnSpc>
+              <a:buNone/>
+            </a:pPr>
+            <a:r>
+              <a:rPr lang="en-US" sz="1866" dirty="0">
+                <a:solidFill>
+                  <a:srgbClr val="33302A"/>
+                </a:solidFill>
+                <a:latin typeface="SourceSerif4" pitchFamily="34" charset="0"/>
+                <a:ea typeface="SourceSerif4" pitchFamily="34" charset="-122"/>
+                <a:cs typeface="SourceSerif4" pitchFamily="34" charset="-120"/>
+              </a:rPr>
+              <a:t>Which artifact is this, exactly?</a:t>
+            </a:r>
+            <a:endParaRPr lang="en-US" sz="1866" dirty="0"/>
+          </a:p>
+        </p:txBody>
+      </p:sp>
+      <p:sp>
+        <p:nvSpPr>
+          <p:cNvPr id="13" name="Text 11"/>
+          <p:cNvSpPr/>
+          <p:nvPr/>
+        </p:nvSpPr>
+        <p:spPr>
+          <a:xfrm>
+            <a:off x="8325348" y="2131814"/>
+            <a:ext cx="3133275" cy="307975"/>
+          </a:xfrm>
+          <a:prstGeom prst="rect">
+            <a:avLst/>
+          </a:prstGeom>
+          <a:noFill/>
+          <a:ln/>
+        </p:spPr>
+        <p:txBody>
+          <a:bodyPr wrap="square" lIns="0" tIns="0" rIns="0" bIns="0" rtlCol="0" anchor="t"/>
+          <a:lstStyle/>
+          <a:p>
+            <a:pPr algn="l" indent="0" marL="0">
+              <a:lnSpc>
+                <a:spcPts val="2426"/>
+              </a:lnSpc>
+              <a:buNone/>
+            </a:pPr>
+            <a:r>
+              <a:rPr lang="en-US" sz="1733" dirty="0">
+                <a:solidFill>
+                  <a:srgbClr val="7A7468"/>
+                </a:solidFill>
+                <a:latin typeface="IBMPlexMono" pitchFamily="34" charset="0"/>
+                <a:ea typeface="IBMPlexMono" pitchFamily="34" charset="-122"/>
+                <a:cs typeface="IBMPlexMono" pitchFamily="34" charset="-120"/>
+              </a:rPr>
+              <a:t>CI pipeline</a:t>
+            </a:r>
+            <a:endParaRPr lang="en-US" sz="1733" dirty="0"/>
+          </a:p>
+        </p:txBody>
+      </p:sp>
+      <p:sp>
+        <p:nvSpPr>
+          <p:cNvPr id="14" name="Shape 12"/>
+          <p:cNvSpPr/>
+          <p:nvPr/>
+        </p:nvSpPr>
+        <p:spPr>
+          <a:xfrm>
+            <a:off x="554296" y="2724547"/>
+            <a:ext cx="11080360" cy="0"/>
+          </a:xfrm>
+          <a:prstGeom prst="line">
+            <a:avLst/>
+          </a:prstGeom>
+          <a:noFill/>
+          <a:ln w="12698">
+            <a:solidFill>
+              <a:srgbClr val="C9C0AC"/>
+            </a:solidFill>
+            <a:prstDash val="solid"/>
+          </a:ln>
+        </p:spPr>
+      </p:sp>
+      <p:sp>
+        <p:nvSpPr>
+          <p:cNvPr id="15" name="Text 13"/>
+          <p:cNvSpPr/>
+          <p:nvPr/>
+        </p:nvSpPr>
+        <p:spPr>
+          <a:xfrm>
+            <a:off x="791171" y="3032720"/>
+            <a:ext cx="533814" cy="260747"/>
+          </a:xfrm>
+          <a:prstGeom prst="rect">
+            <a:avLst/>
+          </a:prstGeom>
+          <a:noFill/>
+          <a:ln/>
+        </p:spPr>
+        <p:txBody>
+          <a:bodyPr wrap="square" lIns="0" tIns="0" rIns="0" bIns="0" rtlCol="0" anchor="t"/>
+          <a:lstStyle/>
+          <a:p>
+            <a:pPr algn="l" indent="0" marL="0">
+              <a:lnSpc>
+                <a:spcPts val="2053"/>
+              </a:lnSpc>
+              <a:buNone/>
+            </a:pPr>
+            <a:r>
+              <a:rPr lang="en-US" sz="1466" dirty="0">
+                <a:solidFill>
+                  <a:srgbClr val="5A5448"/>
+                </a:solidFill>
+                <a:latin typeface="IBMPlexMono" pitchFamily="34" charset="0"/>
+                <a:ea typeface="IBMPlexMono" pitchFamily="34" charset="-122"/>
+                <a:cs typeface="IBMPlexMono" pitchFamily="34" charset="-120"/>
+              </a:rPr>
+              <a:t>A2</a:t>
+            </a:r>
+            <a:endParaRPr lang="en-US" sz="1466" dirty="0"/>
+          </a:p>
+        </p:txBody>
+      </p:sp>
+      <p:sp>
+        <p:nvSpPr>
+          <p:cNvPr id="16" name="Text 14"/>
+          <p:cNvSpPr/>
+          <p:nvPr/>
+        </p:nvSpPr>
+        <p:spPr>
+          <a:xfrm>
+            <a:off x="1788268" y="2991644"/>
+            <a:ext cx="1890002" cy="342900"/>
+          </a:xfrm>
+          <a:prstGeom prst="rect">
+            <a:avLst/>
+          </a:prstGeom>
+          <a:noFill/>
+          <a:ln/>
+        </p:spPr>
+        <p:txBody>
+          <a:bodyPr wrap="square" lIns="0" tIns="0" rIns="0" bIns="0" rtlCol="0" anchor="t"/>
+          <a:lstStyle/>
+          <a:p>
+            <a:pPr algn="l" indent="0" marL="0">
+              <a:lnSpc>
+                <a:spcPts val="2700"/>
+              </a:lnSpc>
+              <a:buNone/>
+            </a:pPr>
+            <a:r>
+              <a:rPr lang="en-US" sz="2000" b="1" dirty="0">
+                <a:solidFill>
+                  <a:srgbClr val="33302A"/>
+                </a:solidFill>
+                <a:latin typeface="SourceSerif4" pitchFamily="34" charset="0"/>
+                <a:ea typeface="SourceSerif4" pitchFamily="34" charset="-122"/>
+                <a:cs typeface="SourceSerif4" pitchFamily="34" charset="-120"/>
+              </a:rPr>
+              <a:t>Lineage</a:t>
+            </a:r>
+            <a:endParaRPr lang="en-US" sz="2000" dirty="0"/>
+          </a:p>
+        </p:txBody>
+      </p:sp>
+      <p:sp>
+        <p:nvSpPr>
+          <p:cNvPr id="17" name="Text 15"/>
+          <p:cNvSpPr/>
+          <p:nvPr/>
+        </p:nvSpPr>
+        <p:spPr>
+          <a:xfrm>
+            <a:off x="4114962" y="2991247"/>
+            <a:ext cx="3811369" cy="343694"/>
+          </a:xfrm>
+          <a:prstGeom prst="rect">
+            <a:avLst/>
+          </a:prstGeom>
+          <a:noFill/>
+          <a:ln/>
+        </p:spPr>
+        <p:txBody>
+          <a:bodyPr wrap="square" lIns="0" tIns="0" rIns="0" bIns="0" rtlCol="0" anchor="t"/>
+          <a:lstStyle/>
+          <a:p>
+            <a:pPr algn="l" indent="0" marL="0">
+              <a:lnSpc>
+                <a:spcPts val="2706"/>
+              </a:lnSpc>
+              <a:buNone/>
+            </a:pPr>
+            <a:r>
+              <a:rPr lang="en-US" sz="1866" dirty="0">
+                <a:solidFill>
+                  <a:srgbClr val="33302A"/>
+                </a:solidFill>
+                <a:latin typeface="SourceSerif4" pitchFamily="34" charset="0"/>
+                <a:ea typeface="SourceSerif4" pitchFamily="34" charset="-122"/>
+                <a:cs typeface="SourceSerif4" pitchFamily="34" charset="-120"/>
+              </a:rPr>
+              <a:t>What data and code produced it?</a:t>
+            </a:r>
+            <a:endParaRPr lang="en-US" sz="1866" dirty="0"/>
+          </a:p>
+        </p:txBody>
+      </p:sp>
+      <p:sp>
+        <p:nvSpPr>
+          <p:cNvPr id="18" name="Text 16"/>
+          <p:cNvSpPr/>
+          <p:nvPr/>
+        </p:nvSpPr>
+        <p:spPr>
+          <a:xfrm>
+            <a:off x="8325348" y="3009106"/>
+            <a:ext cx="3133275" cy="307975"/>
+          </a:xfrm>
+          <a:prstGeom prst="rect">
+            <a:avLst/>
+          </a:prstGeom>
+          <a:noFill/>
+          <a:ln/>
+        </p:spPr>
+        <p:txBody>
+          <a:bodyPr wrap="square" lIns="0" tIns="0" rIns="0" bIns="0" rtlCol="0" anchor="t"/>
+          <a:lstStyle/>
+          <a:p>
+            <a:pPr algn="l" indent="0" marL="0">
+              <a:lnSpc>
+                <a:spcPts val="2426"/>
+              </a:lnSpc>
+              <a:buNone/>
+            </a:pPr>
+            <a:r>
+              <a:rPr lang="en-US" sz="1733" dirty="0">
+                <a:solidFill>
+                  <a:srgbClr val="7A7468"/>
+                </a:solidFill>
+                <a:latin typeface="IBMPlexMono" pitchFamily="34" charset="0"/>
+                <a:ea typeface="IBMPlexMono" pitchFamily="34" charset="-122"/>
+                <a:cs typeface="IBMPlexMono" pitchFamily="34" charset="-120"/>
+              </a:rPr>
+              <a:t>Training job</a:t>
+            </a:r>
+            <a:endParaRPr lang="en-US" sz="1733" dirty="0"/>
+          </a:p>
+        </p:txBody>
+      </p:sp>
+      <p:sp>
+        <p:nvSpPr>
+          <p:cNvPr id="19" name="Shape 17"/>
+          <p:cNvSpPr/>
+          <p:nvPr/>
+        </p:nvSpPr>
+        <p:spPr>
+          <a:xfrm>
+            <a:off x="554296" y="3601839"/>
+            <a:ext cx="11080360" cy="0"/>
+          </a:xfrm>
+          <a:prstGeom prst="line">
+            <a:avLst/>
+          </a:prstGeom>
+          <a:noFill/>
+          <a:ln w="12698">
+            <a:solidFill>
+              <a:srgbClr val="C9C0AC"/>
+            </a:solidFill>
+            <a:prstDash val="solid"/>
+          </a:ln>
+        </p:spPr>
+      </p:sp>
+      <p:sp>
+        <p:nvSpPr>
+          <p:cNvPr id="20" name="Text 18"/>
+          <p:cNvSpPr/>
+          <p:nvPr/>
+        </p:nvSpPr>
+        <p:spPr>
+          <a:xfrm>
+            <a:off x="791171" y="3910012"/>
+            <a:ext cx="533814" cy="260747"/>
+          </a:xfrm>
+          <a:prstGeom prst="rect">
+            <a:avLst/>
+          </a:prstGeom>
+          <a:noFill/>
+          <a:ln/>
+        </p:spPr>
+        <p:txBody>
+          <a:bodyPr wrap="square" lIns="0" tIns="0" rIns="0" bIns="0" rtlCol="0" anchor="t"/>
+          <a:lstStyle/>
+          <a:p>
+            <a:pPr algn="l" indent="0" marL="0">
+              <a:lnSpc>
+                <a:spcPts val="2053"/>
+              </a:lnSpc>
+              <a:buNone/>
+            </a:pPr>
+            <a:r>
+              <a:rPr lang="en-US" sz="1466" dirty="0">
+                <a:solidFill>
+                  <a:srgbClr val="5A5448"/>
+                </a:solidFill>
+                <a:latin typeface="IBMPlexMono" pitchFamily="34" charset="0"/>
+                <a:ea typeface="IBMPlexMono" pitchFamily="34" charset="-122"/>
+                <a:cs typeface="IBMPlexMono" pitchFamily="34" charset="-120"/>
+              </a:rPr>
+              <a:t>A3</a:t>
+            </a:r>
+            <a:endParaRPr lang="en-US" sz="1466" dirty="0"/>
+          </a:p>
+        </p:txBody>
+      </p:sp>
+      <p:sp>
+        <p:nvSpPr>
+          <p:cNvPr id="21" name="Text 19"/>
+          <p:cNvSpPr/>
+          <p:nvPr/>
+        </p:nvSpPr>
+        <p:spPr>
+          <a:xfrm>
+            <a:off x="1788268" y="3868936"/>
+            <a:ext cx="1890002" cy="342900"/>
+          </a:xfrm>
+          <a:prstGeom prst="rect">
+            <a:avLst/>
+          </a:prstGeom>
+          <a:noFill/>
+          <a:ln/>
+        </p:spPr>
+        <p:txBody>
+          <a:bodyPr wrap="square" lIns="0" tIns="0" rIns="0" bIns="0" rtlCol="0" anchor="t"/>
+          <a:lstStyle/>
+          <a:p>
+            <a:pPr algn="l" indent="0" marL="0">
+              <a:lnSpc>
+                <a:spcPts val="2700"/>
+              </a:lnSpc>
+              <a:buNone/>
+            </a:pPr>
+            <a:r>
+              <a:rPr lang="en-US" sz="2000" b="1" dirty="0">
+                <a:solidFill>
+                  <a:srgbClr val="33302A"/>
+                </a:solidFill>
+                <a:latin typeface="SourceSerif4" pitchFamily="34" charset="0"/>
+                <a:ea typeface="SourceSerif4" pitchFamily="34" charset="-122"/>
+                <a:cs typeface="SourceSerif4" pitchFamily="34" charset="-120"/>
+              </a:rPr>
+              <a:t>Owner</a:t>
+            </a:r>
+            <a:endParaRPr lang="en-US" sz="2000" dirty="0"/>
+          </a:p>
+        </p:txBody>
+      </p:sp>
+      <p:sp>
+        <p:nvSpPr>
+          <p:cNvPr id="22" name="Text 20"/>
+          <p:cNvSpPr/>
+          <p:nvPr/>
+        </p:nvSpPr>
+        <p:spPr>
+          <a:xfrm>
+            <a:off x="4114962" y="3868539"/>
+            <a:ext cx="3811369" cy="343694"/>
+          </a:xfrm>
+          <a:prstGeom prst="rect">
+            <a:avLst/>
+          </a:prstGeom>
+          <a:noFill/>
+          <a:ln/>
+        </p:spPr>
+        <p:txBody>
+          <a:bodyPr wrap="square" lIns="0" tIns="0" rIns="0" bIns="0" rtlCol="0" anchor="t"/>
+          <a:lstStyle/>
+          <a:p>
+            <a:pPr algn="l" indent="0" marL="0">
+              <a:lnSpc>
+                <a:spcPts val="2706"/>
+              </a:lnSpc>
+              <a:buNone/>
+            </a:pPr>
+            <a:r>
+              <a:rPr lang="en-US" sz="1866" dirty="0">
+                <a:solidFill>
+                  <a:srgbClr val="33302A"/>
+                </a:solidFill>
+                <a:latin typeface="SourceSerif4" pitchFamily="34" charset="0"/>
+                <a:ea typeface="SourceSerif4" pitchFamily="34" charset="-122"/>
+                <a:cs typeface="SourceSerif4" pitchFamily="34" charset="-120"/>
+              </a:rPr>
+              <a:t>Who owns it in production?</a:t>
+            </a:r>
+            <a:endParaRPr lang="en-US" sz="1866" dirty="0"/>
+          </a:p>
+        </p:txBody>
+      </p:sp>
+      <p:sp>
+        <p:nvSpPr>
+          <p:cNvPr id="23" name="Text 21"/>
+          <p:cNvSpPr/>
+          <p:nvPr/>
+        </p:nvSpPr>
+        <p:spPr>
+          <a:xfrm>
+            <a:off x="8325348" y="3886398"/>
+            <a:ext cx="3133275" cy="307975"/>
+          </a:xfrm>
+          <a:prstGeom prst="rect">
+            <a:avLst/>
+          </a:prstGeom>
+          <a:noFill/>
+          <a:ln/>
+        </p:spPr>
+        <p:txBody>
+          <a:bodyPr wrap="square" lIns="0" tIns="0" rIns="0" bIns="0" rtlCol="0" anchor="t"/>
+          <a:lstStyle/>
+          <a:p>
+            <a:pPr algn="l" indent="0" marL="0">
+              <a:lnSpc>
+                <a:spcPts val="2426"/>
+              </a:lnSpc>
+              <a:buNone/>
+            </a:pPr>
+            <a:r>
+              <a:rPr lang="en-US" sz="1733" dirty="0">
+                <a:solidFill>
+                  <a:srgbClr val="7A7468"/>
+                </a:solidFill>
+                <a:latin typeface="IBMPlexMono" pitchFamily="34" charset="0"/>
+                <a:ea typeface="IBMPlexMono" pitchFamily="34" charset="-122"/>
+                <a:cs typeface="IBMPlexMono" pitchFamily="34" charset="-120"/>
+              </a:rPr>
+              <a:t>Registering team</a:t>
+            </a:r>
+            <a:endParaRPr lang="en-US" sz="1733" dirty="0"/>
+          </a:p>
+        </p:txBody>
+      </p:sp>
+      <p:sp>
+        <p:nvSpPr>
+          <p:cNvPr id="24" name="Shape 22"/>
+          <p:cNvSpPr/>
+          <p:nvPr/>
+        </p:nvSpPr>
+        <p:spPr>
+          <a:xfrm>
+            <a:off x="554296" y="4479131"/>
+            <a:ext cx="11080360" cy="0"/>
+          </a:xfrm>
+          <a:prstGeom prst="line">
+            <a:avLst/>
+          </a:prstGeom>
+          <a:noFill/>
+          <a:ln w="12698">
+            <a:solidFill>
+              <a:srgbClr val="C9C0AC"/>
+            </a:solidFill>
+            <a:prstDash val="solid"/>
+          </a:ln>
+        </p:spPr>
+      </p:sp>
+      <p:sp>
+        <p:nvSpPr>
+          <p:cNvPr id="25" name="Text 23"/>
+          <p:cNvSpPr/>
+          <p:nvPr/>
+        </p:nvSpPr>
+        <p:spPr>
+          <a:xfrm>
+            <a:off x="791171" y="4787305"/>
+            <a:ext cx="533814" cy="260747"/>
+          </a:xfrm>
+          <a:prstGeom prst="rect">
+            <a:avLst/>
+          </a:prstGeom>
+          <a:noFill/>
+          <a:ln/>
+        </p:spPr>
+        <p:txBody>
+          <a:bodyPr wrap="square" lIns="0" tIns="0" rIns="0" bIns="0" rtlCol="0" anchor="t"/>
+          <a:lstStyle/>
+          <a:p>
+            <a:pPr algn="l" indent="0" marL="0">
+              <a:lnSpc>
+                <a:spcPts val="2053"/>
+              </a:lnSpc>
+              <a:buNone/>
+            </a:pPr>
+            <a:r>
+              <a:rPr lang="en-US" sz="1466" dirty="0">
+                <a:solidFill>
+                  <a:srgbClr val="5A5448"/>
+                </a:solidFill>
+                <a:latin typeface="IBMPlexMono" pitchFamily="34" charset="0"/>
+                <a:ea typeface="IBMPlexMono" pitchFamily="34" charset="-122"/>
+                <a:cs typeface="IBMPlexMono" pitchFamily="34" charset="-120"/>
+              </a:rPr>
+              <a:t>A4</a:t>
+            </a:r>
+            <a:endParaRPr lang="en-US" sz="1466" dirty="0"/>
+          </a:p>
+        </p:txBody>
+      </p:sp>
+      <p:sp>
+        <p:nvSpPr>
+          <p:cNvPr id="26" name="Text 24"/>
+          <p:cNvSpPr/>
+          <p:nvPr/>
+        </p:nvSpPr>
+        <p:spPr>
+          <a:xfrm>
+            <a:off x="1788268" y="4746228"/>
+            <a:ext cx="1890002" cy="342900"/>
+          </a:xfrm>
+          <a:prstGeom prst="rect">
+            <a:avLst/>
+          </a:prstGeom>
+          <a:noFill/>
+          <a:ln/>
+        </p:spPr>
+        <p:txBody>
+          <a:bodyPr wrap="square" lIns="0" tIns="0" rIns="0" bIns="0" rtlCol="0" anchor="t"/>
+          <a:lstStyle/>
+          <a:p>
+            <a:pPr algn="l" indent="0" marL="0">
+              <a:lnSpc>
+                <a:spcPts val="2700"/>
+              </a:lnSpc>
+              <a:buNone/>
+            </a:pPr>
+            <a:r>
+              <a:rPr lang="en-US" sz="2000" b="1" dirty="0">
+                <a:solidFill>
+                  <a:srgbClr val="33302A"/>
+                </a:solidFill>
+                <a:latin typeface="SourceSerif4" pitchFamily="34" charset="0"/>
+                <a:ea typeface="SourceSerif4" pitchFamily="34" charset="-122"/>
+                <a:cs typeface="SourceSerif4" pitchFamily="34" charset="-120"/>
+              </a:rPr>
+              <a:t>Stage</a:t>
+            </a:r>
+            <a:endParaRPr lang="en-US" sz="2000" dirty="0"/>
+          </a:p>
+        </p:txBody>
+      </p:sp>
+      <p:sp>
+        <p:nvSpPr>
+          <p:cNvPr id="27" name="Text 25"/>
+          <p:cNvSpPr/>
+          <p:nvPr/>
+        </p:nvSpPr>
+        <p:spPr>
+          <a:xfrm>
+            <a:off x="4114962" y="4745831"/>
+            <a:ext cx="3811369" cy="343694"/>
+          </a:xfrm>
+          <a:prstGeom prst="rect">
+            <a:avLst/>
+          </a:prstGeom>
+          <a:noFill/>
+          <a:ln/>
+        </p:spPr>
+        <p:txBody>
+          <a:bodyPr wrap="square" lIns="0" tIns="0" rIns="0" bIns="0" rtlCol="0" anchor="t"/>
+          <a:lstStyle/>
+          <a:p>
+            <a:pPr algn="l" indent="0" marL="0">
+              <a:lnSpc>
+                <a:spcPts val="2706"/>
+              </a:lnSpc>
+              <a:buNone/>
+            </a:pPr>
+            <a:r>
+              <a:rPr lang="en-US" sz="1866" dirty="0">
+                <a:solidFill>
+                  <a:srgbClr val="33302A"/>
+                </a:solidFill>
+                <a:latin typeface="SourceSerif4" pitchFamily="34" charset="0"/>
+                <a:ea typeface="SourceSerif4" pitchFamily="34" charset="-122"/>
+                <a:cs typeface="SourceSerif4" pitchFamily="34" charset="-120"/>
+              </a:rPr>
+              <a:t>Where is it allowed to run?</a:t>
+            </a:r>
+            <a:endParaRPr lang="en-US" sz="1866" dirty="0"/>
+          </a:p>
+        </p:txBody>
+      </p:sp>
+      <p:sp>
+        <p:nvSpPr>
+          <p:cNvPr id="28" name="Text 26"/>
+          <p:cNvSpPr/>
+          <p:nvPr/>
+        </p:nvSpPr>
+        <p:spPr>
+          <a:xfrm>
+            <a:off x="8325348" y="4763691"/>
+            <a:ext cx="3133275" cy="307975"/>
+          </a:xfrm>
+          <a:prstGeom prst="rect">
+            <a:avLst/>
+          </a:prstGeom>
+          <a:noFill/>
+          <a:ln/>
+        </p:spPr>
+        <p:txBody>
+          <a:bodyPr wrap="square" lIns="0" tIns="0" rIns="0" bIns="0" rtlCol="0" anchor="t"/>
+          <a:lstStyle/>
+          <a:p>
+            <a:pPr algn="l" indent="0" marL="0">
+              <a:lnSpc>
+                <a:spcPts val="2426"/>
+              </a:lnSpc>
+              <a:buNone/>
+            </a:pPr>
+            <a:r>
+              <a:rPr lang="en-US" sz="1733" dirty="0">
+                <a:solidFill>
+                  <a:srgbClr val="7A7468"/>
+                </a:solidFill>
+                <a:latin typeface="IBMPlexMono" pitchFamily="34" charset="0"/>
+                <a:ea typeface="IBMPlexMono" pitchFamily="34" charset="-122"/>
+                <a:cs typeface="IBMPlexMono" pitchFamily="34" charset="-120"/>
+              </a:rPr>
+              <a:t>Promotion workflow</a:t>
+            </a:r>
+            <a:endParaRPr lang="en-US" sz="1733" dirty="0"/>
+          </a:p>
+        </p:txBody>
+      </p:sp>
+      <p:sp>
+        <p:nvSpPr>
+          <p:cNvPr id="29" name="Text 27"/>
+          <p:cNvSpPr/>
+          <p:nvPr/>
+        </p:nvSpPr>
+        <p:spPr>
+          <a:xfrm>
+            <a:off x="541599" y="5566172"/>
+            <a:ext cx="11327869" cy="343694"/>
+          </a:xfrm>
+          <a:prstGeom prst="rect">
+            <a:avLst/>
+          </a:prstGeom>
+          <a:noFill/>
+          <a:ln/>
+        </p:spPr>
+        <p:txBody>
+          <a:bodyPr wrap="square" lIns="0" tIns="0" rIns="0" bIns="0" rtlCol="0" anchor="t"/>
+          <a:lstStyle/>
+          <a:p>
+            <a:pPr algn="l" indent="0" marL="0">
+              <a:lnSpc>
+                <a:spcPts val="2706"/>
+              </a:lnSpc>
+              <a:spcBef>
+                <a:spcPts val="1600"/>
+              </a:spcBef>
+              <a:buNone/>
+            </a:pPr>
+            <a:r>
+              <a:rPr lang="en-US" sz="1866" dirty="0">
+                <a:solidFill>
+                  <a:srgbClr val="7A7468"/>
+                </a:solidFill>
+                <a:latin typeface="SourceSerif4" pitchFamily="34" charset="0"/>
+                <a:ea typeface="SourceSerif4" pitchFamily="34" charset="-122"/>
+                <a:cs typeface="SourceSerif4" pitchFamily="34" charset="-120"/>
+              </a:rPr>
+              <a:t>A field nobody writes is a field nobody can trust.</a:t>
+            </a:r>
+            <a:endParaRPr lang="en-US" sz="1866" dirty="0"/>
+          </a:p>
+        </p:txBody>
+      </p:sp>
+      <p:sp>
+        <p:nvSpPr>
+          <p:cNvPr id="30" name="Text 28"/>
+          <p:cNvSpPr/>
+          <p:nvPr/>
+        </p:nvSpPr>
+        <p:spPr>
+          <a:xfrm>
+            <a:off x="541599" y="6113066"/>
+            <a:ext cx="11327869" cy="236934"/>
+          </a:xfrm>
+          <a:prstGeom prst="rect">
+            <a:avLst/>
+          </a:prstGeom>
+          <a:noFill/>
+          <a:ln/>
+        </p:spPr>
+        <p:txBody>
+          <a:bodyPr wrap="square" lIns="0" tIns="0" rIns="0" bIns="0" rtlCol="0" anchor="t"/>
+          <a:lstStyle/>
+          <a:p>
+            <a:pPr algn="l" indent="0" marL="0">
+              <a:lnSpc>
+                <a:spcPts val="1866"/>
+              </a:lnSpc>
+              <a:buNone/>
+            </a:pPr>
+            <a:r>
+              <a:rPr lang="en-US" sz="1333" dirty="0">
+                <a:solidFill>
+                  <a:srgbClr val="7A7468"/>
+                </a:solidFill>
+                <a:latin typeface="IBMPlexMono" pitchFamily="34" charset="0"/>
+                <a:ea typeface="IBMPlexMono" pitchFamily="34" charset="-122"/>
+                <a:cs typeface="IBMPlexMono" pitchFamily="34" charset="-120"/>
+              </a:rPr>
+              <a:t>MODEL REGISTRY — OPERATING GUIDE · SHEET 02/05 · NO CHART, NO EXTERNAL DATA</a:t>
+            </a:r>
+            <a:endParaRPr lang="en-US" sz="1333" dirty="0"/>
+          </a:p>
+        </p:txBody>
+      </p:sp>
     </p:spTree>
   </p:cSld>
   <p:clrMapOvr>
@@ -1308,6 +2965,13 @@
 <file path=ppt/slides/slide3.xml><?xml version="1.0" encoding="utf-8"?>
 <p:sld xmlns:a="http://schemas.openxmlformats.org/drawingml/2006/main" xmlns:r="http://schemas.openxmlformats.org/officeDocument/2006/relationships" xmlns:p="http://schemas.openxmlformats.org/presentationml/2006/main">
   <p:cSld name="Slide 3">
+    <p:bg>
+      <p:bgPr>
+        <a:solidFill>
+          <a:srgbClr val="EFE9DD"/>
+        </a:solidFill>
+      </p:bgPr>
+    </p:bg>
     <p:spTree>
       <p:nvGrpSpPr>
         <p:cNvPr id="1" name=""/>
@@ -1322,30 +2986,1158 @@
           <a:chExt cx="0" cy="0"/>
         </a:xfrm>
       </p:grpSpPr>
-      <p:pic>
-        <p:nvPicPr>
-          <p:cNvPr id="2" name="Image 0" descr="/tmp/slide-1787840560886-aes4jim6cjj.png">    </p:cNvPr>
-          <p:cNvPicPr>
-            <a:picLocks noChangeAspect="1"/>
-          </p:cNvPicPr>
-          <p:nvPr/>
-        </p:nvPicPr>
-        <p:blipFill>
-          <a:blip r:embed="rId1"/>
-          <a:stretch>
-            <a:fillRect/>
-          </a:stretch>
-        </p:blipFill>
-        <p:spPr>
-          <a:xfrm>
-            <a:off x="0" y="0"/>
-            <a:ext cx="12188952" cy="6858000"/>
-          </a:xfrm>
-          <a:prstGeom prst="rect">
-            <a:avLst/>
-          </a:prstGeom>
-        </p:spPr>
-      </p:pic>
+      <p:sp>
+        <p:nvSpPr>
+          <p:cNvPr id="2" name="Text 0"/>
+          <p:cNvSpPr/>
+          <p:nvPr/>
+        </p:nvSpPr>
+        <p:spPr>
+          <a:xfrm>
+            <a:off x="541599" y="440134"/>
+            <a:ext cx="6799150" cy="440333"/>
+          </a:xfrm>
+          <a:prstGeom prst="rect">
+            <a:avLst/>
+          </a:prstGeom>
+          <a:noFill/>
+          <a:ln/>
+        </p:spPr>
+        <p:txBody>
+          <a:bodyPr wrap="square" lIns="0" tIns="0" rIns="0" bIns="0" rtlCol="0" anchor="t"/>
+          <a:lstStyle/>
+          <a:p>
+            <a:pPr algn="l" indent="0" marL="0">
+              <a:lnSpc>
+                <a:spcPts val="3466"/>
+              </a:lnSpc>
+              <a:buNone/>
+            </a:pPr>
+            <a:r>
+              <a:rPr lang="en-US" sz="2666" b="1" dirty="0">
+                <a:solidFill>
+                  <a:srgbClr val="33302A"/>
+                </a:solidFill>
+                <a:latin typeface="SourceSerif4" pitchFamily="34" charset="0"/>
+                <a:ea typeface="SourceSerif4" pitchFamily="34" charset="-122"/>
+                <a:cs typeface="SourceSerif4" pitchFamily="34" charset="-120"/>
+              </a:rPr>
+              <a:t>How a model moves through the registry</a:t>
+            </a:r>
+            <a:endParaRPr lang="en-US" sz="2666" dirty="0"/>
+          </a:p>
+        </p:txBody>
+      </p:sp>
+      <p:sp>
+        <p:nvSpPr>
+          <p:cNvPr id="3" name="Text 1"/>
+          <p:cNvSpPr/>
+          <p:nvPr/>
+        </p:nvSpPr>
+        <p:spPr>
+          <a:xfrm>
+            <a:off x="10186623" y="567134"/>
+            <a:ext cx="1489945" cy="270073"/>
+          </a:xfrm>
+          <a:prstGeom prst="rect">
+            <a:avLst/>
+          </a:prstGeom>
+          <a:noFill/>
+          <a:ln/>
+        </p:spPr>
+        <p:txBody>
+          <a:bodyPr wrap="square" lIns="0" tIns="0" rIns="0" bIns="0" rtlCol="0" anchor="t"/>
+          <a:lstStyle/>
+          <a:p>
+            <a:pPr algn="l" indent="0" marL="0">
+              <a:lnSpc>
+                <a:spcPts val="2126"/>
+              </a:lnSpc>
+              <a:buNone/>
+            </a:pPr>
+            <a:r>
+              <a:rPr lang="en-US" sz="1466" dirty="0">
+                <a:solidFill>
+                  <a:srgbClr val="7A7468"/>
+                </a:solidFill>
+                <a:latin typeface="IBMPlexMono" pitchFamily="34" charset="0"/>
+                <a:ea typeface="IBMPlexMono" pitchFamily="34" charset="-122"/>
+                <a:cs typeface="IBMPlexMono" pitchFamily="34" charset="-120"/>
+              </a:rPr>
+              <a:t>Fig. 03 / 05</a:t>
+            </a:r>
+            <a:endParaRPr lang="en-US" sz="1466" dirty="0"/>
+          </a:p>
+        </p:txBody>
+      </p:sp>
+      <p:sp>
+        <p:nvSpPr>
+          <p:cNvPr id="4" name="Text 2"/>
+          <p:cNvSpPr/>
+          <p:nvPr/>
+        </p:nvSpPr>
+        <p:spPr>
+          <a:xfrm>
+            <a:off x="541599" y="1083667"/>
+            <a:ext cx="11105754" cy="12700"/>
+          </a:xfrm>
+          <a:prstGeom prst="rect">
+            <a:avLst/>
+          </a:prstGeom>
+          <a:solidFill>
+            <a:srgbClr val="9A9180"/>
+          </a:solidFill>
+          <a:ln/>
+        </p:spPr>
+        <p:txBody>
+          <a:bodyPr wrap="square" rtlCol="0" anchor="ctr"/>
+          <a:lstStyle/>
+          <a:p>
+            <a:pPr indent="0" marL="0">
+              <a:buNone/>
+            </a:pPr>
+            <a:endParaRPr lang="en-US" dirty="0"/>
+          </a:p>
+        </p:txBody>
+      </p:sp>
+      <p:sp>
+        <p:nvSpPr>
+          <p:cNvPr id="5" name="Text 3"/>
+          <p:cNvSpPr/>
+          <p:nvPr/>
+        </p:nvSpPr>
+        <p:spPr>
+          <a:xfrm>
+            <a:off x="541599" y="1333302"/>
+            <a:ext cx="4189167" cy="236934"/>
+          </a:xfrm>
+          <a:prstGeom prst="rect">
+            <a:avLst/>
+          </a:prstGeom>
+          <a:noFill/>
+          <a:ln/>
+        </p:spPr>
+        <p:txBody>
+          <a:bodyPr wrap="square" lIns="0" tIns="0" rIns="0" bIns="0" rtlCol="0" anchor="t"/>
+          <a:lstStyle/>
+          <a:p>
+            <a:pPr algn="l" indent="0" marL="0">
+              <a:lnSpc>
+                <a:spcPts val="1866"/>
+              </a:lnSpc>
+              <a:buNone/>
+            </a:pPr>
+            <a:r>
+              <a:rPr lang="en-US" sz="1333" b="1" dirty="0">
+                <a:solidFill>
+                  <a:srgbClr val="7A7468"/>
+                </a:solidFill>
+                <a:latin typeface="SourceSerif4" pitchFamily="34" charset="0"/>
+                <a:ea typeface="SourceSerif4" pitchFamily="34" charset="-122"/>
+                <a:cs typeface="SourceSerif4" pitchFamily="34" charset="-120"/>
+              </a:rPr>
+              <a:t>STAGE · ENTRY REQUIREMENT · WHO SIGNS</a:t>
+            </a:r>
+            <a:endParaRPr lang="en-US" sz="1333" dirty="0"/>
+          </a:p>
+        </p:txBody>
+      </p:sp>
+      <p:sp>
+        <p:nvSpPr>
+          <p:cNvPr id="6" name="Text 4"/>
+          <p:cNvSpPr/>
+          <p:nvPr/>
+        </p:nvSpPr>
+        <p:spPr>
+          <a:xfrm>
+            <a:off x="9765644" y="1333302"/>
+            <a:ext cx="1919343" cy="236934"/>
+          </a:xfrm>
+          <a:prstGeom prst="rect">
+            <a:avLst/>
+          </a:prstGeom>
+          <a:noFill/>
+          <a:ln/>
+        </p:spPr>
+        <p:txBody>
+          <a:bodyPr wrap="square" lIns="0" tIns="0" rIns="0" bIns="0" rtlCol="0" anchor="t"/>
+          <a:lstStyle/>
+          <a:p>
+            <a:pPr algn="l" indent="0" marL="0">
+              <a:lnSpc>
+                <a:spcPts val="1866"/>
+              </a:lnSpc>
+              <a:buNone/>
+            </a:pPr>
+            <a:r>
+              <a:rPr lang="en-US" sz="1333" b="1" dirty="0">
+                <a:solidFill>
+                  <a:srgbClr val="7A7468"/>
+                </a:solidFill>
+                <a:latin typeface="SourceSerif4" pitchFamily="34" charset="0"/>
+                <a:ea typeface="SourceSerif4" pitchFamily="34" charset="-122"/>
+                <a:cs typeface="SourceSerif4" pitchFamily="34" charset="-120"/>
+              </a:rPr>
+              <a:t>NO STEP IS SKIPPED</a:t>
+            </a:r>
+            <a:endParaRPr lang="en-US" sz="1333" dirty="0"/>
+          </a:p>
+        </p:txBody>
+      </p:sp>
+      <p:sp>
+        <p:nvSpPr>
+          <p:cNvPr id="7" name="Text 5"/>
+          <p:cNvSpPr/>
+          <p:nvPr/>
+        </p:nvSpPr>
+        <p:spPr>
+          <a:xfrm>
+            <a:off x="541599" y="1705570"/>
+            <a:ext cx="11105754" cy="3657402"/>
+          </a:xfrm>
+          <a:prstGeom prst="rect">
+            <a:avLst/>
+          </a:prstGeom>
+          <a:solidFill>
+            <a:srgbClr val="F6F2E8"/>
+          </a:solidFill>
+          <a:ln w="12698">
+            <a:solidFill>
+              <a:srgbClr val="C9C0AC"/>
+            </a:solidFill>
+          </a:ln>
+        </p:spPr>
+        <p:txBody>
+          <a:bodyPr wrap="square" rtlCol="0" anchor="ctr"/>
+          <a:lstStyle/>
+          <a:p>
+            <a:pPr indent="0" marL="0">
+              <a:buNone/>
+            </a:pPr>
+            <a:endParaRPr lang="en-US" dirty="0"/>
+          </a:p>
+        </p:txBody>
+      </p:sp>
+      <p:sp>
+        <p:nvSpPr>
+          <p:cNvPr id="8" name="Shape 6"/>
+          <p:cNvSpPr/>
+          <p:nvPr/>
+        </p:nvSpPr>
+        <p:spPr>
+          <a:xfrm>
+            <a:off x="630477" y="1718270"/>
+            <a:ext cx="0" cy="898525"/>
+          </a:xfrm>
+          <a:prstGeom prst="line">
+            <a:avLst/>
+          </a:prstGeom>
+          <a:noFill/>
+          <a:ln w="152381">
+            <a:solidFill>
+              <a:srgbClr val="FFFFFF"/>
+            </a:solidFill>
+            <a:prstDash val="solid"/>
+          </a:ln>
+        </p:spPr>
+      </p:sp>
+      <p:sp>
+        <p:nvSpPr>
+          <p:cNvPr id="9" name="Text 7"/>
+          <p:cNvSpPr/>
+          <p:nvPr/>
+        </p:nvSpPr>
+        <p:spPr>
+          <a:xfrm>
+            <a:off x="943533" y="2037159"/>
+            <a:ext cx="519852" cy="260747"/>
+          </a:xfrm>
+          <a:prstGeom prst="rect">
+            <a:avLst/>
+          </a:prstGeom>
+          <a:noFill/>
+          <a:ln/>
+        </p:spPr>
+        <p:txBody>
+          <a:bodyPr wrap="square" lIns="0" tIns="0" rIns="0" bIns="0" rtlCol="0" anchor="t"/>
+          <a:lstStyle/>
+          <a:p>
+            <a:pPr algn="l" indent="0" marL="0">
+              <a:lnSpc>
+                <a:spcPts val="2053"/>
+              </a:lnSpc>
+              <a:buNone/>
+            </a:pPr>
+            <a:r>
+              <a:rPr lang="en-US" sz="1466" dirty="0">
+                <a:solidFill>
+                  <a:srgbClr val="5A5448"/>
+                </a:solidFill>
+                <a:latin typeface="IBMPlexMono" pitchFamily="34" charset="0"/>
+                <a:ea typeface="IBMPlexMono" pitchFamily="34" charset="-122"/>
+                <a:cs typeface="IBMPlexMono" pitchFamily="34" charset="-120"/>
+              </a:rPr>
+              <a:t>01</a:t>
+            </a:r>
+            <a:endParaRPr lang="en-US" sz="1466" dirty="0"/>
+          </a:p>
+        </p:txBody>
+      </p:sp>
+      <p:sp>
+        <p:nvSpPr>
+          <p:cNvPr id="10" name="Text 8"/>
+          <p:cNvSpPr/>
+          <p:nvPr/>
+        </p:nvSpPr>
+        <p:spPr>
+          <a:xfrm>
+            <a:off x="1926942" y="2001441"/>
+            <a:ext cx="1968920" cy="331986"/>
+          </a:xfrm>
+          <a:prstGeom prst="rect">
+            <a:avLst/>
+          </a:prstGeom>
+          <a:noFill/>
+          <a:ln/>
+        </p:spPr>
+        <p:txBody>
+          <a:bodyPr wrap="square" lIns="0" tIns="0" rIns="0" bIns="0" rtlCol="0" anchor="t"/>
+          <a:lstStyle/>
+          <a:p>
+            <a:pPr algn="l" indent="0" marL="0">
+              <a:lnSpc>
+                <a:spcPts val="2613"/>
+              </a:lnSpc>
+              <a:buNone/>
+            </a:pPr>
+            <a:r>
+              <a:rPr lang="en-US" sz="1866" dirty="0">
+                <a:solidFill>
+                  <a:srgbClr val="33302A"/>
+                </a:solidFill>
+                <a:latin typeface="IBMPlexMono" pitchFamily="34" charset="0"/>
+                <a:ea typeface="IBMPlexMono" pitchFamily="34" charset="-122"/>
+                <a:cs typeface="IBMPlexMono" pitchFamily="34" charset="-120"/>
+              </a:rPr>
+              <a:t>REGISTERED</a:t>
+            </a:r>
+            <a:endParaRPr lang="en-US" sz="1866" dirty="0"/>
+          </a:p>
+        </p:txBody>
+      </p:sp>
+      <p:sp>
+        <p:nvSpPr>
+          <p:cNvPr id="11" name="Text 9"/>
+          <p:cNvSpPr/>
+          <p:nvPr/>
+        </p:nvSpPr>
+        <p:spPr>
+          <a:xfrm>
+            <a:off x="4331006" y="1823839"/>
+            <a:ext cx="4644062" cy="687388"/>
+          </a:xfrm>
+          <a:prstGeom prst="rect">
+            <a:avLst/>
+          </a:prstGeom>
+          <a:noFill/>
+          <a:ln/>
+        </p:spPr>
+        <p:txBody>
+          <a:bodyPr wrap="square" lIns="0" tIns="0" rIns="0" bIns="0" rtlCol="0" anchor="t"/>
+          <a:lstStyle/>
+          <a:p>
+            <a:pPr algn="l" indent="0" marL="0">
+              <a:lnSpc>
+                <a:spcPts val="2706"/>
+              </a:lnSpc>
+              <a:buNone/>
+            </a:pPr>
+            <a:r>
+              <a:rPr lang="en-US" sz="1866" dirty="0">
+                <a:solidFill>
+                  <a:srgbClr val="33302A"/>
+                </a:solidFill>
+                <a:latin typeface="SourceSerif4" pitchFamily="34" charset="0"/>
+                <a:ea typeface="SourceSerif4" pitchFamily="34" charset="-122"/>
+                <a:cs typeface="SourceSerif4" pitchFamily="34" charset="-120"/>
+              </a:rPr>
+              <a:t>An artifact exists with a version and lineage.</a:t>
+            </a:r>
+            <a:endParaRPr lang="en-US" sz="1866" dirty="0"/>
+          </a:p>
+        </p:txBody>
+      </p:sp>
+      <p:sp>
+        <p:nvSpPr>
+          <p:cNvPr id="12" name="Text 10"/>
+          <p:cNvSpPr/>
+          <p:nvPr/>
+        </p:nvSpPr>
+        <p:spPr>
+          <a:xfrm>
+            <a:off x="9357758" y="2013545"/>
+            <a:ext cx="2080418" cy="307975"/>
+          </a:xfrm>
+          <a:prstGeom prst="rect">
+            <a:avLst/>
+          </a:prstGeom>
+          <a:noFill/>
+          <a:ln/>
+        </p:spPr>
+        <p:txBody>
+          <a:bodyPr wrap="square" lIns="0" tIns="0" rIns="0" bIns="0" rtlCol="0" anchor="t"/>
+          <a:lstStyle/>
+          <a:p>
+            <a:pPr algn="l" indent="0" marL="0">
+              <a:lnSpc>
+                <a:spcPts val="2426"/>
+              </a:lnSpc>
+              <a:buNone/>
+            </a:pPr>
+            <a:r>
+              <a:rPr lang="en-US" sz="1733" dirty="0">
+                <a:solidFill>
+                  <a:srgbClr val="7A7468"/>
+                </a:solidFill>
+                <a:latin typeface="IBMPlexMono" pitchFamily="34" charset="0"/>
+                <a:ea typeface="IBMPlexMono" pitchFamily="34" charset="-122"/>
+                <a:cs typeface="IBMPlexMono" pitchFamily="34" charset="-120"/>
+              </a:rPr>
+              <a:t>Automatic</a:t>
+            </a:r>
+            <a:endParaRPr lang="en-US" sz="1733" dirty="0"/>
+          </a:p>
+        </p:txBody>
+      </p:sp>
+      <p:sp>
+        <p:nvSpPr>
+          <p:cNvPr id="13" name="Shape 11"/>
+          <p:cNvSpPr/>
+          <p:nvPr/>
+        </p:nvSpPr>
+        <p:spPr>
+          <a:xfrm>
+            <a:off x="554296" y="2623145"/>
+            <a:ext cx="11080360" cy="0"/>
+          </a:xfrm>
+          <a:prstGeom prst="line">
+            <a:avLst/>
+          </a:prstGeom>
+          <a:noFill/>
+          <a:ln w="12698">
+            <a:solidFill>
+              <a:srgbClr val="C9C0AC"/>
+            </a:solidFill>
+            <a:prstDash val="solid"/>
+          </a:ln>
+        </p:spPr>
+      </p:sp>
+      <p:sp>
+        <p:nvSpPr>
+          <p:cNvPr id="14" name="Shape 12"/>
+          <p:cNvSpPr/>
+          <p:nvPr/>
+        </p:nvSpPr>
+        <p:spPr>
+          <a:xfrm>
+            <a:off x="630477" y="2616795"/>
+            <a:ext cx="0" cy="911225"/>
+          </a:xfrm>
+          <a:prstGeom prst="line">
+            <a:avLst/>
+          </a:prstGeom>
+          <a:noFill/>
+          <a:ln w="152381">
+            <a:solidFill>
+              <a:srgbClr val="FFFFFF"/>
+            </a:solidFill>
+            <a:prstDash val="solid"/>
+          </a:ln>
+        </p:spPr>
+      </p:sp>
+      <p:sp>
+        <p:nvSpPr>
+          <p:cNvPr id="15" name="Text 13"/>
+          <p:cNvSpPr/>
+          <p:nvPr/>
+        </p:nvSpPr>
+        <p:spPr>
+          <a:xfrm>
+            <a:off x="943533" y="2948384"/>
+            <a:ext cx="519852" cy="260747"/>
+          </a:xfrm>
+          <a:prstGeom prst="rect">
+            <a:avLst/>
+          </a:prstGeom>
+          <a:noFill/>
+          <a:ln/>
+        </p:spPr>
+        <p:txBody>
+          <a:bodyPr wrap="square" lIns="0" tIns="0" rIns="0" bIns="0" rtlCol="0" anchor="t"/>
+          <a:lstStyle/>
+          <a:p>
+            <a:pPr algn="l" indent="0" marL="0">
+              <a:lnSpc>
+                <a:spcPts val="2053"/>
+              </a:lnSpc>
+              <a:buNone/>
+            </a:pPr>
+            <a:r>
+              <a:rPr lang="en-US" sz="1466" dirty="0">
+                <a:solidFill>
+                  <a:srgbClr val="5A5448"/>
+                </a:solidFill>
+                <a:latin typeface="IBMPlexMono" pitchFamily="34" charset="0"/>
+                <a:ea typeface="IBMPlexMono" pitchFamily="34" charset="-122"/>
+                <a:cs typeface="IBMPlexMono" pitchFamily="34" charset="-120"/>
+              </a:rPr>
+              <a:t>02</a:t>
+            </a:r>
+            <a:endParaRPr lang="en-US" sz="1466" dirty="0"/>
+          </a:p>
+        </p:txBody>
+      </p:sp>
+      <p:sp>
+        <p:nvSpPr>
+          <p:cNvPr id="16" name="Text 14"/>
+          <p:cNvSpPr/>
+          <p:nvPr/>
+        </p:nvSpPr>
+        <p:spPr>
+          <a:xfrm>
+            <a:off x="1926942" y="2912666"/>
+            <a:ext cx="1968920" cy="331986"/>
+          </a:xfrm>
+          <a:prstGeom prst="rect">
+            <a:avLst/>
+          </a:prstGeom>
+          <a:noFill/>
+          <a:ln/>
+        </p:spPr>
+        <p:txBody>
+          <a:bodyPr wrap="square" lIns="0" tIns="0" rIns="0" bIns="0" rtlCol="0" anchor="t"/>
+          <a:lstStyle/>
+          <a:p>
+            <a:pPr algn="l" indent="0" marL="0">
+              <a:lnSpc>
+                <a:spcPts val="2613"/>
+              </a:lnSpc>
+              <a:buNone/>
+            </a:pPr>
+            <a:r>
+              <a:rPr lang="en-US" sz="1866" dirty="0">
+                <a:solidFill>
+                  <a:srgbClr val="33302A"/>
+                </a:solidFill>
+                <a:latin typeface="IBMPlexMono" pitchFamily="34" charset="0"/>
+                <a:ea typeface="IBMPlexMono" pitchFamily="34" charset="-122"/>
+                <a:cs typeface="IBMPlexMono" pitchFamily="34" charset="-120"/>
+              </a:rPr>
+              <a:t>STAGING</a:t>
+            </a:r>
+            <a:endParaRPr lang="en-US" sz="1866" dirty="0"/>
+          </a:p>
+        </p:txBody>
+      </p:sp>
+      <p:sp>
+        <p:nvSpPr>
+          <p:cNvPr id="17" name="Text 15"/>
+          <p:cNvSpPr/>
+          <p:nvPr/>
+        </p:nvSpPr>
+        <p:spPr>
+          <a:xfrm>
+            <a:off x="4331006" y="2735064"/>
+            <a:ext cx="4644062" cy="687388"/>
+          </a:xfrm>
+          <a:prstGeom prst="rect">
+            <a:avLst/>
+          </a:prstGeom>
+          <a:noFill/>
+          <a:ln/>
+        </p:spPr>
+        <p:txBody>
+          <a:bodyPr wrap="square" lIns="0" tIns="0" rIns="0" bIns="0" rtlCol="0" anchor="t"/>
+          <a:lstStyle/>
+          <a:p>
+            <a:pPr algn="l" indent="0" marL="0">
+              <a:lnSpc>
+                <a:spcPts val="2706"/>
+              </a:lnSpc>
+              <a:buNone/>
+            </a:pPr>
+            <a:r>
+              <a:rPr lang="en-US" sz="1866" dirty="0">
+                <a:solidFill>
+                  <a:srgbClr val="33302A"/>
+                </a:solidFill>
+                <a:latin typeface="SourceSerif4" pitchFamily="34" charset="0"/>
+                <a:ea typeface="SourceSerif4" pitchFamily="34" charset="-122"/>
+                <a:cs typeface="SourceSerif4" pitchFamily="34" charset="-120"/>
+              </a:rPr>
+              <a:t>An evaluation report is attached and reviewed.</a:t>
+            </a:r>
+            <a:endParaRPr lang="en-US" sz="1866" dirty="0"/>
+          </a:p>
+        </p:txBody>
+      </p:sp>
+      <p:sp>
+        <p:nvSpPr>
+          <p:cNvPr id="18" name="Text 16"/>
+          <p:cNvSpPr/>
+          <p:nvPr/>
+        </p:nvSpPr>
+        <p:spPr>
+          <a:xfrm>
+            <a:off x="9357758" y="2924770"/>
+            <a:ext cx="2080418" cy="307975"/>
+          </a:xfrm>
+          <a:prstGeom prst="rect">
+            <a:avLst/>
+          </a:prstGeom>
+          <a:noFill/>
+          <a:ln/>
+        </p:spPr>
+        <p:txBody>
+          <a:bodyPr wrap="square" lIns="0" tIns="0" rIns="0" bIns="0" rtlCol="0" anchor="t"/>
+          <a:lstStyle/>
+          <a:p>
+            <a:pPr algn="l" indent="0" marL="0">
+              <a:lnSpc>
+                <a:spcPts val="2426"/>
+              </a:lnSpc>
+              <a:buNone/>
+            </a:pPr>
+            <a:r>
+              <a:rPr lang="en-US" sz="1733" dirty="0">
+                <a:solidFill>
+                  <a:srgbClr val="7A7468"/>
+                </a:solidFill>
+                <a:latin typeface="IBMPlexMono" pitchFamily="34" charset="0"/>
+                <a:ea typeface="IBMPlexMono" pitchFamily="34" charset="-122"/>
+                <a:cs typeface="IBMPlexMono" pitchFamily="34" charset="-120"/>
+              </a:rPr>
+              <a:t>Model owner</a:t>
+            </a:r>
+            <a:endParaRPr lang="en-US" sz="1733" dirty="0"/>
+          </a:p>
+        </p:txBody>
+      </p:sp>
+      <p:sp>
+        <p:nvSpPr>
+          <p:cNvPr id="19" name="Shape 17"/>
+          <p:cNvSpPr/>
+          <p:nvPr/>
+        </p:nvSpPr>
+        <p:spPr>
+          <a:xfrm>
+            <a:off x="554296" y="3534370"/>
+            <a:ext cx="11080360" cy="0"/>
+          </a:xfrm>
+          <a:prstGeom prst="line">
+            <a:avLst/>
+          </a:prstGeom>
+          <a:noFill/>
+          <a:ln w="12698">
+            <a:solidFill>
+              <a:srgbClr val="C9C0AC"/>
+            </a:solidFill>
+            <a:prstDash val="solid"/>
+          </a:ln>
+        </p:spPr>
+      </p:sp>
+      <p:sp>
+        <p:nvSpPr>
+          <p:cNvPr id="20" name="Shape 18"/>
+          <p:cNvSpPr/>
+          <p:nvPr/>
+        </p:nvSpPr>
+        <p:spPr>
+          <a:xfrm>
+            <a:off x="630477" y="3528020"/>
+            <a:ext cx="0" cy="911225"/>
+          </a:xfrm>
+          <a:prstGeom prst="line">
+            <a:avLst/>
+          </a:prstGeom>
+          <a:noFill/>
+          <a:ln w="152381">
+            <a:solidFill>
+              <a:srgbClr val="33302A"/>
+            </a:solidFill>
+            <a:prstDash val="solid"/>
+          </a:ln>
+        </p:spPr>
+      </p:sp>
+      <p:sp>
+        <p:nvSpPr>
+          <p:cNvPr id="21" name="Text 19"/>
+          <p:cNvSpPr/>
+          <p:nvPr/>
+        </p:nvSpPr>
+        <p:spPr>
+          <a:xfrm>
+            <a:off x="943533" y="3859609"/>
+            <a:ext cx="519852" cy="260747"/>
+          </a:xfrm>
+          <a:prstGeom prst="rect">
+            <a:avLst/>
+          </a:prstGeom>
+          <a:noFill/>
+          <a:ln/>
+        </p:spPr>
+        <p:txBody>
+          <a:bodyPr wrap="square" lIns="0" tIns="0" rIns="0" bIns="0" rtlCol="0" anchor="t"/>
+          <a:lstStyle/>
+          <a:p>
+            <a:pPr algn="l" indent="0" marL="0">
+              <a:lnSpc>
+                <a:spcPts val="2053"/>
+              </a:lnSpc>
+              <a:buNone/>
+            </a:pPr>
+            <a:r>
+              <a:rPr lang="en-US" sz="1466" dirty="0">
+                <a:solidFill>
+                  <a:srgbClr val="5A5448"/>
+                </a:solidFill>
+                <a:latin typeface="IBMPlexMono" pitchFamily="34" charset="0"/>
+                <a:ea typeface="IBMPlexMono" pitchFamily="34" charset="-122"/>
+                <a:cs typeface="IBMPlexMono" pitchFamily="34" charset="-120"/>
+              </a:rPr>
+              <a:t>03</a:t>
+            </a:r>
+            <a:endParaRPr lang="en-US" sz="1466" dirty="0"/>
+          </a:p>
+        </p:txBody>
+      </p:sp>
+      <p:sp>
+        <p:nvSpPr>
+          <p:cNvPr id="22" name="Text 20"/>
+          <p:cNvSpPr/>
+          <p:nvPr/>
+        </p:nvSpPr>
+        <p:spPr>
+          <a:xfrm>
+            <a:off x="1926942" y="3823891"/>
+            <a:ext cx="1968920" cy="331986"/>
+          </a:xfrm>
+          <a:prstGeom prst="rect">
+            <a:avLst/>
+          </a:prstGeom>
+          <a:noFill/>
+          <a:ln/>
+        </p:spPr>
+        <p:txBody>
+          <a:bodyPr wrap="square" lIns="0" tIns="0" rIns="0" bIns="0" rtlCol="0" anchor="t"/>
+          <a:lstStyle/>
+          <a:p>
+            <a:pPr algn="l" indent="0" marL="0">
+              <a:lnSpc>
+                <a:spcPts val="2613"/>
+              </a:lnSpc>
+              <a:buNone/>
+            </a:pPr>
+            <a:r>
+              <a:rPr lang="en-US" sz="1866" dirty="0">
+                <a:solidFill>
+                  <a:srgbClr val="33302A"/>
+                </a:solidFill>
+                <a:latin typeface="IBMPlexMono" pitchFamily="34" charset="0"/>
+                <a:ea typeface="IBMPlexMono" pitchFamily="34" charset="-122"/>
+                <a:cs typeface="IBMPlexMono" pitchFamily="34" charset="-120"/>
+              </a:rPr>
+              <a:t>PRODUCTION</a:t>
+            </a:r>
+            <a:endParaRPr lang="en-US" sz="1866" dirty="0"/>
+          </a:p>
+        </p:txBody>
+      </p:sp>
+      <p:sp>
+        <p:nvSpPr>
+          <p:cNvPr id="23" name="Text 21"/>
+          <p:cNvSpPr/>
+          <p:nvPr/>
+        </p:nvSpPr>
+        <p:spPr>
+          <a:xfrm>
+            <a:off x="4331006" y="3646289"/>
+            <a:ext cx="4644062" cy="687388"/>
+          </a:xfrm>
+          <a:prstGeom prst="rect">
+            <a:avLst/>
+          </a:prstGeom>
+          <a:noFill/>
+          <a:ln/>
+        </p:spPr>
+        <p:txBody>
+          <a:bodyPr wrap="square" lIns="0" tIns="0" rIns="0" bIns="0" rtlCol="0" anchor="t"/>
+          <a:lstStyle/>
+          <a:p>
+            <a:pPr algn="l" indent="0" marL="0">
+              <a:lnSpc>
+                <a:spcPts val="2706"/>
+              </a:lnSpc>
+              <a:buNone/>
+            </a:pPr>
+            <a:r>
+              <a:rPr lang="en-US" sz="1866" dirty="0">
+                <a:solidFill>
+                  <a:srgbClr val="33302A"/>
+                </a:solidFill>
+                <a:latin typeface="SourceSerif4" pitchFamily="34" charset="0"/>
+                <a:ea typeface="SourceSerif4" pitchFamily="34" charset="-122"/>
+                <a:cs typeface="SourceSerif4" pitchFamily="34" charset="-120"/>
+              </a:rPr>
+              <a:t>A rollback target is named and on-call is told.</a:t>
+            </a:r>
+            <a:endParaRPr lang="en-US" sz="1866" dirty="0"/>
+          </a:p>
+        </p:txBody>
+      </p:sp>
+      <p:sp>
+        <p:nvSpPr>
+          <p:cNvPr id="24" name="Text 22"/>
+          <p:cNvSpPr/>
+          <p:nvPr/>
+        </p:nvSpPr>
+        <p:spPr>
+          <a:xfrm>
+            <a:off x="9357758" y="3835995"/>
+            <a:ext cx="2080418" cy="307975"/>
+          </a:xfrm>
+          <a:prstGeom prst="rect">
+            <a:avLst/>
+          </a:prstGeom>
+          <a:noFill/>
+          <a:ln/>
+        </p:spPr>
+        <p:txBody>
+          <a:bodyPr wrap="square" lIns="0" tIns="0" rIns="0" bIns="0" rtlCol="0" anchor="t"/>
+          <a:lstStyle/>
+          <a:p>
+            <a:pPr algn="l" indent="0" marL="0">
+              <a:lnSpc>
+                <a:spcPts val="2426"/>
+              </a:lnSpc>
+              <a:buNone/>
+            </a:pPr>
+            <a:r>
+              <a:rPr lang="en-US" sz="1733" dirty="0">
+                <a:solidFill>
+                  <a:srgbClr val="7A7468"/>
+                </a:solidFill>
+                <a:latin typeface="IBMPlexMono" pitchFamily="34" charset="0"/>
+                <a:ea typeface="IBMPlexMono" pitchFamily="34" charset="-122"/>
+                <a:cs typeface="IBMPlexMono" pitchFamily="34" charset="-120"/>
+              </a:rPr>
+              <a:t>Owner + service</a:t>
+            </a:r>
+            <a:endParaRPr lang="en-US" sz="1733" dirty="0"/>
+          </a:p>
+        </p:txBody>
+      </p:sp>
+      <p:sp>
+        <p:nvSpPr>
+          <p:cNvPr id="25" name="Shape 23"/>
+          <p:cNvSpPr/>
+          <p:nvPr/>
+        </p:nvSpPr>
+        <p:spPr>
+          <a:xfrm>
+            <a:off x="554296" y="4445595"/>
+            <a:ext cx="11080360" cy="0"/>
+          </a:xfrm>
+          <a:prstGeom prst="line">
+            <a:avLst/>
+          </a:prstGeom>
+          <a:noFill/>
+          <a:ln w="12698">
+            <a:solidFill>
+              <a:srgbClr val="C9C0AC"/>
+            </a:solidFill>
+            <a:prstDash val="solid"/>
+          </a:ln>
+        </p:spPr>
+      </p:sp>
+      <p:sp>
+        <p:nvSpPr>
+          <p:cNvPr id="26" name="Shape 24"/>
+          <p:cNvSpPr/>
+          <p:nvPr/>
+        </p:nvSpPr>
+        <p:spPr>
+          <a:xfrm>
+            <a:off x="630477" y="4439245"/>
+            <a:ext cx="0" cy="911225"/>
+          </a:xfrm>
+          <a:prstGeom prst="line">
+            <a:avLst/>
+          </a:prstGeom>
+          <a:noFill/>
+          <a:ln w="152381">
+            <a:solidFill>
+              <a:srgbClr val="FFFFFF"/>
+            </a:solidFill>
+            <a:prstDash val="solid"/>
+          </a:ln>
+        </p:spPr>
+      </p:sp>
+      <p:sp>
+        <p:nvSpPr>
+          <p:cNvPr id="27" name="Text 25"/>
+          <p:cNvSpPr/>
+          <p:nvPr/>
+        </p:nvSpPr>
+        <p:spPr>
+          <a:xfrm>
+            <a:off x="943533" y="4770834"/>
+            <a:ext cx="519852" cy="260747"/>
+          </a:xfrm>
+          <a:prstGeom prst="rect">
+            <a:avLst/>
+          </a:prstGeom>
+          <a:noFill/>
+          <a:ln/>
+        </p:spPr>
+        <p:txBody>
+          <a:bodyPr wrap="square" lIns="0" tIns="0" rIns="0" bIns="0" rtlCol="0" anchor="t"/>
+          <a:lstStyle/>
+          <a:p>
+            <a:pPr algn="l" indent="0" marL="0">
+              <a:lnSpc>
+                <a:spcPts val="2053"/>
+              </a:lnSpc>
+              <a:buNone/>
+            </a:pPr>
+            <a:r>
+              <a:rPr lang="en-US" sz="1466" dirty="0">
+                <a:solidFill>
+                  <a:srgbClr val="5A5448"/>
+                </a:solidFill>
+                <a:latin typeface="IBMPlexMono" pitchFamily="34" charset="0"/>
+                <a:ea typeface="IBMPlexMono" pitchFamily="34" charset="-122"/>
+                <a:cs typeface="IBMPlexMono" pitchFamily="34" charset="-120"/>
+              </a:rPr>
+              <a:t>04</a:t>
+            </a:r>
+            <a:endParaRPr lang="en-US" sz="1466" dirty="0"/>
+          </a:p>
+        </p:txBody>
+      </p:sp>
+      <p:sp>
+        <p:nvSpPr>
+          <p:cNvPr id="28" name="Text 26"/>
+          <p:cNvSpPr/>
+          <p:nvPr/>
+        </p:nvSpPr>
+        <p:spPr>
+          <a:xfrm>
+            <a:off x="1926942" y="4735116"/>
+            <a:ext cx="1968920" cy="331986"/>
+          </a:xfrm>
+          <a:prstGeom prst="rect">
+            <a:avLst/>
+          </a:prstGeom>
+          <a:noFill/>
+          <a:ln/>
+        </p:spPr>
+        <p:txBody>
+          <a:bodyPr wrap="square" lIns="0" tIns="0" rIns="0" bIns="0" rtlCol="0" anchor="t"/>
+          <a:lstStyle/>
+          <a:p>
+            <a:pPr algn="l" indent="0" marL="0">
+              <a:lnSpc>
+                <a:spcPts val="2613"/>
+              </a:lnSpc>
+              <a:buNone/>
+            </a:pPr>
+            <a:r>
+              <a:rPr lang="en-US" sz="1866" dirty="0">
+                <a:solidFill>
+                  <a:srgbClr val="33302A"/>
+                </a:solidFill>
+                <a:latin typeface="IBMPlexMono" pitchFamily="34" charset="0"/>
+                <a:ea typeface="IBMPlexMono" pitchFamily="34" charset="-122"/>
+                <a:cs typeface="IBMPlexMono" pitchFamily="34" charset="-120"/>
+              </a:rPr>
+              <a:t>ARCHIVED</a:t>
+            </a:r>
+            <a:endParaRPr lang="en-US" sz="1866" dirty="0"/>
+          </a:p>
+        </p:txBody>
+      </p:sp>
+      <p:sp>
+        <p:nvSpPr>
+          <p:cNvPr id="29" name="Text 27"/>
+          <p:cNvSpPr/>
+          <p:nvPr/>
+        </p:nvSpPr>
+        <p:spPr>
+          <a:xfrm>
+            <a:off x="4331006" y="4557514"/>
+            <a:ext cx="4644062" cy="687388"/>
+          </a:xfrm>
+          <a:prstGeom prst="rect">
+            <a:avLst/>
+          </a:prstGeom>
+          <a:noFill/>
+          <a:ln/>
+        </p:spPr>
+        <p:txBody>
+          <a:bodyPr wrap="square" lIns="0" tIns="0" rIns="0" bIns="0" rtlCol="0" anchor="t"/>
+          <a:lstStyle/>
+          <a:p>
+            <a:pPr algn="l" indent="0" marL="0">
+              <a:lnSpc>
+                <a:spcPts val="2706"/>
+              </a:lnSpc>
+              <a:buNone/>
+            </a:pPr>
+            <a:r>
+              <a:rPr lang="en-US" sz="1866" dirty="0">
+                <a:solidFill>
+                  <a:srgbClr val="33302A"/>
+                </a:solidFill>
+                <a:latin typeface="SourceSerif4" pitchFamily="34" charset="0"/>
+                <a:ea typeface="SourceSerif4" pitchFamily="34" charset="-122"/>
+                <a:cs typeface="SourceSerif4" pitchFamily="34" charset="-120"/>
+              </a:rPr>
+              <a:t>Superseded or withdrawn, with the reason recorded.</a:t>
+            </a:r>
+            <a:endParaRPr lang="en-US" sz="1866" dirty="0"/>
+          </a:p>
+        </p:txBody>
+      </p:sp>
+      <p:sp>
+        <p:nvSpPr>
+          <p:cNvPr id="30" name="Text 28"/>
+          <p:cNvSpPr/>
+          <p:nvPr/>
+        </p:nvSpPr>
+        <p:spPr>
+          <a:xfrm>
+            <a:off x="9357758" y="4747220"/>
+            <a:ext cx="2080418" cy="307975"/>
+          </a:xfrm>
+          <a:prstGeom prst="rect">
+            <a:avLst/>
+          </a:prstGeom>
+          <a:noFill/>
+          <a:ln/>
+        </p:spPr>
+        <p:txBody>
+          <a:bodyPr wrap="square" lIns="0" tIns="0" rIns="0" bIns="0" rtlCol="0" anchor="t"/>
+          <a:lstStyle/>
+          <a:p>
+            <a:pPr algn="l" indent="0" marL="0">
+              <a:lnSpc>
+                <a:spcPts val="2426"/>
+              </a:lnSpc>
+              <a:buNone/>
+            </a:pPr>
+            <a:r>
+              <a:rPr lang="en-US" sz="1733" dirty="0">
+                <a:solidFill>
+                  <a:srgbClr val="7A7468"/>
+                </a:solidFill>
+                <a:latin typeface="IBMPlexMono" pitchFamily="34" charset="0"/>
+                <a:ea typeface="IBMPlexMono" pitchFamily="34" charset="-122"/>
+                <a:cs typeface="IBMPlexMono" pitchFamily="34" charset="-120"/>
+              </a:rPr>
+              <a:t>Model owner</a:t>
+            </a:r>
+            <a:endParaRPr lang="en-US" sz="1733" dirty="0"/>
+          </a:p>
+        </p:txBody>
+      </p:sp>
+      <p:sp>
+        <p:nvSpPr>
+          <p:cNvPr id="31" name="Text 29"/>
+          <p:cNvSpPr/>
+          <p:nvPr/>
+        </p:nvSpPr>
+        <p:spPr>
+          <a:xfrm>
+            <a:off x="541599" y="5566172"/>
+            <a:ext cx="11327869" cy="343694"/>
+          </a:xfrm>
+          <a:prstGeom prst="rect">
+            <a:avLst/>
+          </a:prstGeom>
+          <a:noFill/>
+          <a:ln/>
+        </p:spPr>
+        <p:txBody>
+          <a:bodyPr wrap="square" lIns="0" tIns="0" rIns="0" bIns="0" rtlCol="0" anchor="t"/>
+          <a:lstStyle/>
+          <a:p>
+            <a:pPr algn="l" indent="0" marL="0">
+              <a:lnSpc>
+                <a:spcPts val="2706"/>
+              </a:lnSpc>
+              <a:spcBef>
+                <a:spcPts val="1600"/>
+              </a:spcBef>
+              <a:buNone/>
+            </a:pPr>
+            <a:r>
+              <a:rPr lang="en-US" sz="1866" dirty="0">
+                <a:solidFill>
+                  <a:srgbClr val="7A7468"/>
+                </a:solidFill>
+                <a:latin typeface="SourceSerif4" pitchFamily="34" charset="0"/>
+                <a:ea typeface="SourceSerif4" pitchFamily="34" charset="-122"/>
+                <a:cs typeface="SourceSerif4" pitchFamily="34" charset="-120"/>
+              </a:rPr>
+              <a:t>A stage is a permission, not a label — the ledger records who granted it.</a:t>
+            </a:r>
+            <a:endParaRPr lang="en-US" sz="1866" dirty="0"/>
+          </a:p>
+        </p:txBody>
+      </p:sp>
+      <p:sp>
+        <p:nvSpPr>
+          <p:cNvPr id="32" name="Text 30"/>
+          <p:cNvSpPr/>
+          <p:nvPr/>
+        </p:nvSpPr>
+        <p:spPr>
+          <a:xfrm>
+            <a:off x="541599" y="6113066"/>
+            <a:ext cx="11327869" cy="236934"/>
+          </a:xfrm>
+          <a:prstGeom prst="rect">
+            <a:avLst/>
+          </a:prstGeom>
+          <a:noFill/>
+          <a:ln/>
+        </p:spPr>
+        <p:txBody>
+          <a:bodyPr wrap="square" lIns="0" tIns="0" rIns="0" bIns="0" rtlCol="0" anchor="t"/>
+          <a:lstStyle/>
+          <a:p>
+            <a:pPr algn="l" indent="0" marL="0">
+              <a:lnSpc>
+                <a:spcPts val="1866"/>
+              </a:lnSpc>
+              <a:buNone/>
+            </a:pPr>
+            <a:r>
+              <a:rPr lang="en-US" sz="1333" dirty="0">
+                <a:solidFill>
+                  <a:srgbClr val="7A7468"/>
+                </a:solidFill>
+                <a:latin typeface="IBMPlexMono" pitchFamily="34" charset="0"/>
+                <a:ea typeface="IBMPlexMono" pitchFamily="34" charset="-122"/>
+                <a:cs typeface="IBMPlexMono" pitchFamily="34" charset="-120"/>
+              </a:rPr>
+              <a:t>MODEL REGISTRY — OPERATING GUIDE · SHEET 03/05 · NO CHART, NO EXTERNAL DATA</a:t>
+            </a:r>
+            <a:endParaRPr lang="en-US" sz="1333" dirty="0"/>
+          </a:p>
+        </p:txBody>
+      </p:sp>
     </p:spTree>
   </p:cSld>
   <p:clrMapOvr>
@@ -1357,6 +4149,13 @@
 <file path=ppt/slides/slide4.xml><?xml version="1.0" encoding="utf-8"?>
 <p:sld xmlns:a="http://schemas.openxmlformats.org/drawingml/2006/main" xmlns:r="http://schemas.openxmlformats.org/officeDocument/2006/relationships" xmlns:p="http://schemas.openxmlformats.org/presentationml/2006/main">
   <p:cSld name="Slide 4">
+    <p:bg>
+      <p:bgPr>
+        <a:solidFill>
+          <a:srgbClr val="EFE9DD"/>
+        </a:solidFill>
+      </p:bgPr>
+    </p:bg>
     <p:spTree>
       <p:nvGrpSpPr>
         <p:cNvPr id="1" name=""/>
@@ -1371,30 +4170,1093 @@
           <a:chExt cx="0" cy="0"/>
         </a:xfrm>
       </p:grpSpPr>
-      <p:pic>
-        <p:nvPicPr>
-          <p:cNvPr id="2" name="Image 0" descr="/tmp/slide-1787840561216-hk0r7qj3njd.png">    </p:cNvPr>
-          <p:cNvPicPr>
-            <a:picLocks noChangeAspect="1"/>
-          </p:cNvPicPr>
-          <p:nvPr/>
-        </p:nvPicPr>
-        <p:blipFill>
-          <a:blip r:embed="rId1"/>
-          <a:stretch>
-            <a:fillRect/>
-          </a:stretch>
-        </p:blipFill>
-        <p:spPr>
-          <a:xfrm>
-            <a:off x="0" y="0"/>
-            <a:ext cx="12188952" cy="6858000"/>
-          </a:xfrm>
-          <a:prstGeom prst="rect">
-            <a:avLst/>
-          </a:prstGeom>
-        </p:spPr>
-      </p:pic>
+      <p:sp>
+        <p:nvSpPr>
+          <p:cNvPr id="2" name="Text 0"/>
+          <p:cNvSpPr/>
+          <p:nvPr/>
+        </p:nvSpPr>
+        <p:spPr>
+          <a:xfrm>
+            <a:off x="541599" y="440134"/>
+            <a:ext cx="7174722" cy="440333"/>
+          </a:xfrm>
+          <a:prstGeom prst="rect">
+            <a:avLst/>
+          </a:prstGeom>
+          <a:noFill/>
+          <a:ln/>
+        </p:spPr>
+        <p:txBody>
+          <a:bodyPr wrap="square" lIns="0" tIns="0" rIns="0" bIns="0" rtlCol="0" anchor="t"/>
+          <a:lstStyle/>
+          <a:p>
+            <a:pPr algn="l" indent="0" marL="0">
+              <a:lnSpc>
+                <a:spcPts val="3466"/>
+              </a:lnSpc>
+              <a:buNone/>
+            </a:pPr>
+            <a:r>
+              <a:rPr lang="en-US" sz="2666" b="1" dirty="0">
+                <a:solidFill>
+                  <a:srgbClr val="33302A"/>
+                </a:solidFill>
+                <a:latin typeface="SourceSerif4" pitchFamily="34" charset="0"/>
+                <a:ea typeface="SourceSerif4" pitchFamily="34" charset="-122"/>
+                <a:cs typeface="SourceSerif4" pitchFamily="34" charset="-120"/>
+              </a:rPr>
+              <a:t>Four rules that keep the ledger trustworthy</a:t>
+            </a:r>
+            <a:endParaRPr lang="en-US" sz="2666" dirty="0"/>
+          </a:p>
+        </p:txBody>
+      </p:sp>
+      <p:sp>
+        <p:nvSpPr>
+          <p:cNvPr id="3" name="Text 1"/>
+          <p:cNvSpPr/>
+          <p:nvPr/>
+        </p:nvSpPr>
+        <p:spPr>
+          <a:xfrm>
+            <a:off x="10186623" y="567134"/>
+            <a:ext cx="1489945" cy="270073"/>
+          </a:xfrm>
+          <a:prstGeom prst="rect">
+            <a:avLst/>
+          </a:prstGeom>
+          <a:noFill/>
+          <a:ln/>
+        </p:spPr>
+        <p:txBody>
+          <a:bodyPr wrap="square" lIns="0" tIns="0" rIns="0" bIns="0" rtlCol="0" anchor="t"/>
+          <a:lstStyle/>
+          <a:p>
+            <a:pPr algn="l" indent="0" marL="0">
+              <a:lnSpc>
+                <a:spcPts val="2126"/>
+              </a:lnSpc>
+              <a:buNone/>
+            </a:pPr>
+            <a:r>
+              <a:rPr lang="en-US" sz="1466" dirty="0">
+                <a:solidFill>
+                  <a:srgbClr val="7A7468"/>
+                </a:solidFill>
+                <a:latin typeface="IBMPlexMono" pitchFamily="34" charset="0"/>
+                <a:ea typeface="IBMPlexMono" pitchFamily="34" charset="-122"/>
+                <a:cs typeface="IBMPlexMono" pitchFamily="34" charset="-120"/>
+              </a:rPr>
+              <a:t>Fig. 04 / 05</a:t>
+            </a:r>
+            <a:endParaRPr lang="en-US" sz="1466" dirty="0"/>
+          </a:p>
+        </p:txBody>
+      </p:sp>
+      <p:sp>
+        <p:nvSpPr>
+          <p:cNvPr id="4" name="Text 2"/>
+          <p:cNvSpPr/>
+          <p:nvPr/>
+        </p:nvSpPr>
+        <p:spPr>
+          <a:xfrm>
+            <a:off x="541599" y="1083667"/>
+            <a:ext cx="11105754" cy="12700"/>
+          </a:xfrm>
+          <a:prstGeom prst="rect">
+            <a:avLst/>
+          </a:prstGeom>
+          <a:solidFill>
+            <a:srgbClr val="9A9180"/>
+          </a:solidFill>
+          <a:ln/>
+        </p:spPr>
+        <p:txBody>
+          <a:bodyPr wrap="square" rtlCol="0" anchor="ctr"/>
+          <a:lstStyle/>
+          <a:p>
+            <a:pPr indent="0" marL="0">
+              <a:buNone/>
+            </a:pPr>
+            <a:endParaRPr lang="en-US" dirty="0"/>
+          </a:p>
+        </p:txBody>
+      </p:sp>
+      <p:sp>
+        <p:nvSpPr>
+          <p:cNvPr id="5" name="Text 3"/>
+          <p:cNvSpPr/>
+          <p:nvPr/>
+        </p:nvSpPr>
+        <p:spPr>
+          <a:xfrm>
+            <a:off x="541599" y="1333302"/>
+            <a:ext cx="11105754" cy="4576564"/>
+          </a:xfrm>
+          <a:prstGeom prst="rect">
+            <a:avLst/>
+          </a:prstGeom>
+          <a:solidFill>
+            <a:srgbClr val="F6F2E8"/>
+          </a:solidFill>
+          <a:ln w="12698">
+            <a:solidFill>
+              <a:srgbClr val="C9C0AC"/>
+            </a:solidFill>
+          </a:ln>
+        </p:spPr>
+        <p:txBody>
+          <a:bodyPr wrap="square" rtlCol="0" anchor="ctr"/>
+          <a:lstStyle/>
+          <a:p>
+            <a:pPr indent="0" marL="0">
+              <a:buNone/>
+            </a:pPr>
+            <a:endParaRPr lang="en-US" dirty="0"/>
+          </a:p>
+        </p:txBody>
+      </p:sp>
+      <p:sp>
+        <p:nvSpPr>
+          <p:cNvPr id="6" name="Text 4"/>
+          <p:cNvSpPr/>
+          <p:nvPr/>
+        </p:nvSpPr>
+        <p:spPr>
+          <a:xfrm>
+            <a:off x="554296" y="1346002"/>
+            <a:ext cx="11080360" cy="507603"/>
+          </a:xfrm>
+          <a:prstGeom prst="rect">
+            <a:avLst/>
+          </a:prstGeom>
+          <a:solidFill>
+            <a:srgbClr val="33302A"/>
+          </a:solidFill>
+          <a:ln/>
+        </p:spPr>
+        <p:txBody>
+          <a:bodyPr wrap="square" rtlCol="0" anchor="ctr"/>
+          <a:lstStyle/>
+          <a:p>
+            <a:pPr indent="0" marL="0">
+              <a:buNone/>
+            </a:pPr>
+            <a:endParaRPr lang="en-US" dirty="0"/>
+          </a:p>
+        </p:txBody>
+      </p:sp>
+      <p:sp>
+        <p:nvSpPr>
+          <p:cNvPr id="7" name="Text 5"/>
+          <p:cNvSpPr/>
+          <p:nvPr/>
+        </p:nvSpPr>
+        <p:spPr>
+          <a:xfrm>
+            <a:off x="1788268" y="1481336"/>
+            <a:ext cx="2003119" cy="236934"/>
+          </a:xfrm>
+          <a:prstGeom prst="rect">
+            <a:avLst/>
+          </a:prstGeom>
+          <a:noFill/>
+          <a:ln/>
+        </p:spPr>
+        <p:txBody>
+          <a:bodyPr wrap="square" lIns="0" tIns="0" rIns="0" bIns="0" rtlCol="0" anchor="t"/>
+          <a:lstStyle/>
+          <a:p>
+            <a:pPr algn="l" indent="0" marL="0">
+              <a:lnSpc>
+                <a:spcPts val="1866"/>
+              </a:lnSpc>
+              <a:buNone/>
+            </a:pPr>
+            <a:r>
+              <a:rPr lang="en-US" sz="1333" b="1" dirty="0">
+                <a:solidFill>
+                  <a:srgbClr val="EFE9DD"/>
+                </a:solidFill>
+                <a:latin typeface="SourceSerif4" pitchFamily="34" charset="0"/>
+                <a:ea typeface="SourceSerif4" pitchFamily="34" charset="-122"/>
+                <a:cs typeface="SourceSerif4" pitchFamily="34" charset="-120"/>
+              </a:rPr>
+              <a:t>RULE</a:t>
+            </a:r>
+            <a:endParaRPr lang="en-US" sz="1333" dirty="0"/>
+          </a:p>
+        </p:txBody>
+      </p:sp>
+      <p:sp>
+        <p:nvSpPr>
+          <p:cNvPr id="8" name="Text 6"/>
+          <p:cNvSpPr/>
+          <p:nvPr/>
+        </p:nvSpPr>
+        <p:spPr>
+          <a:xfrm>
+            <a:off x="4225860" y="1481336"/>
+            <a:ext cx="3246392" cy="236934"/>
+          </a:xfrm>
+          <a:prstGeom prst="rect">
+            <a:avLst/>
+          </a:prstGeom>
+          <a:noFill/>
+          <a:ln/>
+        </p:spPr>
+        <p:txBody>
+          <a:bodyPr wrap="square" lIns="0" tIns="0" rIns="0" bIns="0" rtlCol="0" anchor="t"/>
+          <a:lstStyle/>
+          <a:p>
+            <a:pPr algn="l" indent="0" marL="0">
+              <a:lnSpc>
+                <a:spcPts val="1866"/>
+              </a:lnSpc>
+              <a:buNone/>
+            </a:pPr>
+            <a:r>
+              <a:rPr lang="en-US" sz="1333" b="1" dirty="0">
+                <a:solidFill>
+                  <a:srgbClr val="EFE9DD"/>
+                </a:solidFill>
+                <a:latin typeface="SourceSerif4" pitchFamily="34" charset="0"/>
+                <a:ea typeface="SourceSerif4" pitchFamily="34" charset="-122"/>
+                <a:cs typeface="SourceSerif4" pitchFamily="34" charset="-120"/>
+              </a:rPr>
+              <a:t>WHAT IT SAYS</a:t>
+            </a:r>
+            <a:endParaRPr lang="en-US" sz="1333" dirty="0"/>
+          </a:p>
+        </p:txBody>
+      </p:sp>
+      <p:sp>
+        <p:nvSpPr>
+          <p:cNvPr id="9" name="Text 7"/>
+          <p:cNvSpPr/>
+          <p:nvPr/>
+        </p:nvSpPr>
+        <p:spPr>
+          <a:xfrm>
+            <a:off x="7882348" y="1481336"/>
+            <a:ext cx="3585337" cy="236934"/>
+          </a:xfrm>
+          <a:prstGeom prst="rect">
+            <a:avLst/>
+          </a:prstGeom>
+          <a:noFill/>
+          <a:ln/>
+        </p:spPr>
+        <p:txBody>
+          <a:bodyPr wrap="square" lIns="0" tIns="0" rIns="0" bIns="0" rtlCol="0" anchor="t"/>
+          <a:lstStyle/>
+          <a:p>
+            <a:pPr algn="l" indent="0" marL="0">
+              <a:lnSpc>
+                <a:spcPts val="1866"/>
+              </a:lnSpc>
+              <a:buNone/>
+            </a:pPr>
+            <a:r>
+              <a:rPr lang="en-US" sz="1333" b="1" dirty="0">
+                <a:solidFill>
+                  <a:srgbClr val="EFE9DD"/>
+                </a:solidFill>
+                <a:latin typeface="SourceSerif4" pitchFamily="34" charset="0"/>
+                <a:ea typeface="SourceSerif4" pitchFamily="34" charset="-122"/>
+                <a:cs typeface="SourceSerif4" pitchFamily="34" charset="-120"/>
+              </a:rPr>
+              <a:t>WHAT BREAKS WITHOUT IT</a:t>
+            </a:r>
+            <a:endParaRPr lang="en-US" sz="1333" dirty="0"/>
+          </a:p>
+        </p:txBody>
+      </p:sp>
+      <p:sp>
+        <p:nvSpPr>
+          <p:cNvPr id="10" name="Text 8"/>
+          <p:cNvSpPr/>
+          <p:nvPr/>
+        </p:nvSpPr>
+        <p:spPr>
+          <a:xfrm>
+            <a:off x="791171" y="2223889"/>
+            <a:ext cx="533814" cy="260747"/>
+          </a:xfrm>
+          <a:prstGeom prst="rect">
+            <a:avLst/>
+          </a:prstGeom>
+          <a:noFill/>
+          <a:ln/>
+        </p:spPr>
+        <p:txBody>
+          <a:bodyPr wrap="square" lIns="0" tIns="0" rIns="0" bIns="0" rtlCol="0" anchor="t"/>
+          <a:lstStyle/>
+          <a:p>
+            <a:pPr algn="l" indent="0" marL="0">
+              <a:lnSpc>
+                <a:spcPts val="2053"/>
+              </a:lnSpc>
+              <a:buNone/>
+            </a:pPr>
+            <a:r>
+              <a:rPr lang="en-US" sz="1466" dirty="0">
+                <a:solidFill>
+                  <a:srgbClr val="5A5448"/>
+                </a:solidFill>
+                <a:latin typeface="IBMPlexMono" pitchFamily="34" charset="0"/>
+                <a:ea typeface="IBMPlexMono" pitchFamily="34" charset="-122"/>
+                <a:cs typeface="IBMPlexMono" pitchFamily="34" charset="-120"/>
+              </a:rPr>
+              <a:t>R-01</a:t>
+            </a:r>
+            <a:endParaRPr lang="en-US" sz="1466" dirty="0"/>
+          </a:p>
+        </p:txBody>
+      </p:sp>
+      <p:sp>
+        <p:nvSpPr>
+          <p:cNvPr id="11" name="Text 9"/>
+          <p:cNvSpPr/>
+          <p:nvPr/>
+        </p:nvSpPr>
+        <p:spPr>
+          <a:xfrm>
+            <a:off x="1788268" y="2011363"/>
+            <a:ext cx="2003119" cy="685800"/>
+          </a:xfrm>
+          <a:prstGeom prst="rect">
+            <a:avLst/>
+          </a:prstGeom>
+          <a:noFill/>
+          <a:ln/>
+        </p:spPr>
+        <p:txBody>
+          <a:bodyPr wrap="square" lIns="0" tIns="0" rIns="0" bIns="0" rtlCol="0" anchor="t"/>
+          <a:lstStyle/>
+          <a:p>
+            <a:pPr algn="l" indent="0" marL="0">
+              <a:lnSpc>
+                <a:spcPts val="2700"/>
+              </a:lnSpc>
+              <a:buNone/>
+            </a:pPr>
+            <a:r>
+              <a:rPr lang="en-US" sz="2000" b="1" dirty="0">
+                <a:solidFill>
+                  <a:srgbClr val="33302A"/>
+                </a:solidFill>
+                <a:latin typeface="SourceSerif4" pitchFamily="34" charset="0"/>
+                <a:ea typeface="SourceSerif4" pitchFamily="34" charset="-122"/>
+                <a:cs typeface="SourceSerif4" pitchFamily="34" charset="-120"/>
+              </a:rPr>
+              <a:t>One name, one lineage</a:t>
+            </a:r>
+            <a:endParaRPr lang="en-US" sz="2000" dirty="0"/>
+          </a:p>
+        </p:txBody>
+      </p:sp>
+      <p:sp>
+        <p:nvSpPr>
+          <p:cNvPr id="12" name="Text 10"/>
+          <p:cNvSpPr/>
+          <p:nvPr/>
+        </p:nvSpPr>
+        <p:spPr>
+          <a:xfrm>
+            <a:off x="4225860" y="2010569"/>
+            <a:ext cx="3246392" cy="687388"/>
+          </a:xfrm>
+          <a:prstGeom prst="rect">
+            <a:avLst/>
+          </a:prstGeom>
+          <a:noFill/>
+          <a:ln/>
+        </p:spPr>
+        <p:txBody>
+          <a:bodyPr wrap="square" lIns="0" tIns="0" rIns="0" bIns="0" rtlCol="0" anchor="t"/>
+          <a:lstStyle/>
+          <a:p>
+            <a:pPr algn="l" indent="0" marL="0">
+              <a:lnSpc>
+                <a:spcPts val="2706"/>
+              </a:lnSpc>
+              <a:buNone/>
+            </a:pPr>
+            <a:r>
+              <a:rPr lang="en-US" sz="1866" dirty="0">
+                <a:solidFill>
+                  <a:srgbClr val="33302A"/>
+                </a:solidFill>
+                <a:latin typeface="SourceSerif4" pitchFamily="34" charset="0"/>
+                <a:ea typeface="SourceSerif4" pitchFamily="34" charset="-122"/>
+                <a:cs typeface="SourceSerif4" pitchFamily="34" charset="-120"/>
+              </a:rPr>
+              <a:t>A name never changes meaning.</a:t>
+            </a:r>
+            <a:endParaRPr lang="en-US" sz="1866" dirty="0"/>
+          </a:p>
+        </p:txBody>
+      </p:sp>
+      <p:sp>
+        <p:nvSpPr>
+          <p:cNvPr id="13" name="Text 11"/>
+          <p:cNvSpPr/>
+          <p:nvPr/>
+        </p:nvSpPr>
+        <p:spPr>
+          <a:xfrm>
+            <a:off x="7882348" y="2010569"/>
+            <a:ext cx="3585337" cy="687388"/>
+          </a:xfrm>
+          <a:prstGeom prst="rect">
+            <a:avLst/>
+          </a:prstGeom>
+          <a:noFill/>
+          <a:ln/>
+        </p:spPr>
+        <p:txBody>
+          <a:bodyPr wrap="square" lIns="0" tIns="0" rIns="0" bIns="0" rtlCol="0" anchor="t"/>
+          <a:lstStyle/>
+          <a:p>
+            <a:pPr algn="l" indent="0" marL="0">
+              <a:lnSpc>
+                <a:spcPts val="2706"/>
+              </a:lnSpc>
+              <a:buNone/>
+            </a:pPr>
+            <a:r>
+              <a:rPr lang="en-US" sz="1866" dirty="0">
+                <a:solidFill>
+                  <a:srgbClr val="7A7468"/>
+                </a:solidFill>
+                <a:latin typeface="SourceSerif4" pitchFamily="34" charset="0"/>
+                <a:ea typeface="SourceSerif4" pitchFamily="34" charset="-122"/>
+                <a:cs typeface="SourceSerif4" pitchFamily="34" charset="-120"/>
+              </a:rPr>
+              <a:t>Two teams ship different things under one name.</a:t>
+            </a:r>
+            <a:endParaRPr lang="en-US" sz="1866" dirty="0"/>
+          </a:p>
+        </p:txBody>
+      </p:sp>
+      <p:sp>
+        <p:nvSpPr>
+          <p:cNvPr id="14" name="Shape 12"/>
+          <p:cNvSpPr/>
+          <p:nvPr/>
+        </p:nvSpPr>
+        <p:spPr>
+          <a:xfrm>
+            <a:off x="554296" y="2861270"/>
+            <a:ext cx="11080360" cy="0"/>
+          </a:xfrm>
+          <a:prstGeom prst="line">
+            <a:avLst/>
+          </a:prstGeom>
+          <a:noFill/>
+          <a:ln w="12698">
+            <a:solidFill>
+              <a:srgbClr val="C9C0AC"/>
+            </a:solidFill>
+            <a:prstDash val="solid"/>
+          </a:ln>
+        </p:spPr>
+      </p:sp>
+      <p:sp>
+        <p:nvSpPr>
+          <p:cNvPr id="15" name="Text 13"/>
+          <p:cNvSpPr/>
+          <p:nvPr/>
+        </p:nvSpPr>
+        <p:spPr>
+          <a:xfrm>
+            <a:off x="791171" y="3237905"/>
+            <a:ext cx="533814" cy="260747"/>
+          </a:xfrm>
+          <a:prstGeom prst="rect">
+            <a:avLst/>
+          </a:prstGeom>
+          <a:noFill/>
+          <a:ln/>
+        </p:spPr>
+        <p:txBody>
+          <a:bodyPr wrap="square" lIns="0" tIns="0" rIns="0" bIns="0" rtlCol="0" anchor="t"/>
+          <a:lstStyle/>
+          <a:p>
+            <a:pPr algn="l" indent="0" marL="0">
+              <a:lnSpc>
+                <a:spcPts val="2053"/>
+              </a:lnSpc>
+              <a:buNone/>
+            </a:pPr>
+            <a:r>
+              <a:rPr lang="en-US" sz="1466" dirty="0">
+                <a:solidFill>
+                  <a:srgbClr val="5A5448"/>
+                </a:solidFill>
+                <a:latin typeface="IBMPlexMono" pitchFamily="34" charset="0"/>
+                <a:ea typeface="IBMPlexMono" pitchFamily="34" charset="-122"/>
+                <a:cs typeface="IBMPlexMono" pitchFamily="34" charset="-120"/>
+              </a:rPr>
+              <a:t>R-02</a:t>
+            </a:r>
+            <a:endParaRPr lang="en-US" sz="1466" dirty="0"/>
+          </a:p>
+        </p:txBody>
+      </p:sp>
+      <p:sp>
+        <p:nvSpPr>
+          <p:cNvPr id="16" name="Text 14"/>
+          <p:cNvSpPr/>
+          <p:nvPr/>
+        </p:nvSpPr>
+        <p:spPr>
+          <a:xfrm>
+            <a:off x="1788268" y="3025378"/>
+            <a:ext cx="2003119" cy="685800"/>
+          </a:xfrm>
+          <a:prstGeom prst="rect">
+            <a:avLst/>
+          </a:prstGeom>
+          <a:noFill/>
+          <a:ln/>
+        </p:spPr>
+        <p:txBody>
+          <a:bodyPr wrap="square" lIns="0" tIns="0" rIns="0" bIns="0" rtlCol="0" anchor="t"/>
+          <a:lstStyle/>
+          <a:p>
+            <a:pPr algn="l" indent="0" marL="0">
+              <a:lnSpc>
+                <a:spcPts val="2700"/>
+              </a:lnSpc>
+              <a:buNone/>
+            </a:pPr>
+            <a:r>
+              <a:rPr lang="en-US" sz="2000" b="1" dirty="0">
+                <a:solidFill>
+                  <a:srgbClr val="33302A"/>
+                </a:solidFill>
+                <a:latin typeface="SourceSerif4" pitchFamily="34" charset="0"/>
+                <a:ea typeface="SourceSerif4" pitchFamily="34" charset="-122"/>
+                <a:cs typeface="SourceSerif4" pitchFamily="34" charset="-120"/>
+              </a:rPr>
+              <a:t>Deprecate before delete</a:t>
+            </a:r>
+            <a:endParaRPr lang="en-US" sz="2000" dirty="0"/>
+          </a:p>
+        </p:txBody>
+      </p:sp>
+      <p:sp>
+        <p:nvSpPr>
+          <p:cNvPr id="17" name="Text 15"/>
+          <p:cNvSpPr/>
+          <p:nvPr/>
+        </p:nvSpPr>
+        <p:spPr>
+          <a:xfrm>
+            <a:off x="4225860" y="3024584"/>
+            <a:ext cx="3246392" cy="687388"/>
+          </a:xfrm>
+          <a:prstGeom prst="rect">
+            <a:avLst/>
+          </a:prstGeom>
+          <a:noFill/>
+          <a:ln/>
+        </p:spPr>
+        <p:txBody>
+          <a:bodyPr wrap="square" lIns="0" tIns="0" rIns="0" bIns="0" rtlCol="0" anchor="t"/>
+          <a:lstStyle/>
+          <a:p>
+            <a:pPr algn="l" indent="0" marL="0">
+              <a:lnSpc>
+                <a:spcPts val="2706"/>
+              </a:lnSpc>
+              <a:buNone/>
+            </a:pPr>
+            <a:r>
+              <a:rPr lang="en-US" sz="1866" dirty="0">
+                <a:solidFill>
+                  <a:srgbClr val="33302A"/>
+                </a:solidFill>
+                <a:latin typeface="SourceSerif4" pitchFamily="34" charset="0"/>
+                <a:ea typeface="SourceSerif4" pitchFamily="34" charset="-122"/>
+                <a:cs typeface="SourceSerif4" pitchFamily="34" charset="-120"/>
+              </a:rPr>
+              <a:t>Archived records stay readable.</a:t>
+            </a:r>
+            <a:endParaRPr lang="en-US" sz="1866" dirty="0"/>
+          </a:p>
+        </p:txBody>
+      </p:sp>
+      <p:sp>
+        <p:nvSpPr>
+          <p:cNvPr id="18" name="Text 16"/>
+          <p:cNvSpPr/>
+          <p:nvPr/>
+        </p:nvSpPr>
+        <p:spPr>
+          <a:xfrm>
+            <a:off x="7882348" y="3024584"/>
+            <a:ext cx="3585337" cy="687388"/>
+          </a:xfrm>
+          <a:prstGeom prst="rect">
+            <a:avLst/>
+          </a:prstGeom>
+          <a:noFill/>
+          <a:ln/>
+        </p:spPr>
+        <p:txBody>
+          <a:bodyPr wrap="square" lIns="0" tIns="0" rIns="0" bIns="0" rtlCol="0" anchor="t"/>
+          <a:lstStyle/>
+          <a:p>
+            <a:pPr algn="l" indent="0" marL="0">
+              <a:lnSpc>
+                <a:spcPts val="2706"/>
+              </a:lnSpc>
+              <a:buNone/>
+            </a:pPr>
+            <a:r>
+              <a:rPr lang="en-US" sz="1866" dirty="0">
+                <a:solidFill>
+                  <a:srgbClr val="7A7468"/>
+                </a:solidFill>
+                <a:latin typeface="SourceSerif4" pitchFamily="34" charset="0"/>
+                <a:ea typeface="SourceSerif4" pitchFamily="34" charset="-122"/>
+                <a:cs typeface="SourceSerif4" pitchFamily="34" charset="-120"/>
+              </a:rPr>
+              <a:t>An audit cannot reconstruct last quarter.</a:t>
+            </a:r>
+            <a:endParaRPr lang="en-US" sz="1866" dirty="0"/>
+          </a:p>
+        </p:txBody>
+      </p:sp>
+      <p:sp>
+        <p:nvSpPr>
+          <p:cNvPr id="19" name="Shape 17"/>
+          <p:cNvSpPr/>
+          <p:nvPr/>
+        </p:nvSpPr>
+        <p:spPr>
+          <a:xfrm>
+            <a:off x="554296" y="3875286"/>
+            <a:ext cx="11080360" cy="0"/>
+          </a:xfrm>
+          <a:prstGeom prst="line">
+            <a:avLst/>
+          </a:prstGeom>
+          <a:noFill/>
+          <a:ln w="12698">
+            <a:solidFill>
+              <a:srgbClr val="C9C0AC"/>
+            </a:solidFill>
+            <a:prstDash val="solid"/>
+          </a:ln>
+        </p:spPr>
+      </p:sp>
+      <p:sp>
+        <p:nvSpPr>
+          <p:cNvPr id="20" name="Text 18"/>
+          <p:cNvSpPr/>
+          <p:nvPr/>
+        </p:nvSpPr>
+        <p:spPr>
+          <a:xfrm>
+            <a:off x="791171" y="4251920"/>
+            <a:ext cx="533814" cy="260747"/>
+          </a:xfrm>
+          <a:prstGeom prst="rect">
+            <a:avLst/>
+          </a:prstGeom>
+          <a:noFill/>
+          <a:ln/>
+        </p:spPr>
+        <p:txBody>
+          <a:bodyPr wrap="square" lIns="0" tIns="0" rIns="0" bIns="0" rtlCol="0" anchor="t"/>
+          <a:lstStyle/>
+          <a:p>
+            <a:pPr algn="l" indent="0" marL="0">
+              <a:lnSpc>
+                <a:spcPts val="2053"/>
+              </a:lnSpc>
+              <a:buNone/>
+            </a:pPr>
+            <a:r>
+              <a:rPr lang="en-US" sz="1466" dirty="0">
+                <a:solidFill>
+                  <a:srgbClr val="5A5448"/>
+                </a:solidFill>
+                <a:latin typeface="IBMPlexMono" pitchFamily="34" charset="0"/>
+                <a:ea typeface="IBMPlexMono" pitchFamily="34" charset="-122"/>
+                <a:cs typeface="IBMPlexMono" pitchFamily="34" charset="-120"/>
+              </a:rPr>
+              <a:t>R-03</a:t>
+            </a:r>
+            <a:endParaRPr lang="en-US" sz="1466" dirty="0"/>
+          </a:p>
+        </p:txBody>
+      </p:sp>
+      <p:sp>
+        <p:nvSpPr>
+          <p:cNvPr id="21" name="Text 19"/>
+          <p:cNvSpPr/>
+          <p:nvPr/>
+        </p:nvSpPr>
+        <p:spPr>
+          <a:xfrm>
+            <a:off x="1788268" y="3867944"/>
+            <a:ext cx="2003119" cy="1028700"/>
+          </a:xfrm>
+          <a:prstGeom prst="rect">
+            <a:avLst/>
+          </a:prstGeom>
+          <a:noFill/>
+          <a:ln/>
+        </p:spPr>
+        <p:txBody>
+          <a:bodyPr wrap="square" lIns="0" tIns="0" rIns="0" bIns="0" rtlCol="0" anchor="t"/>
+          <a:lstStyle/>
+          <a:p>
+            <a:pPr algn="l" indent="0" marL="0">
+              <a:lnSpc>
+                <a:spcPts val="2700"/>
+              </a:lnSpc>
+              <a:buNone/>
+            </a:pPr>
+            <a:r>
+              <a:rPr lang="en-US" sz="2000" b="1" dirty="0">
+                <a:solidFill>
+                  <a:srgbClr val="33302A"/>
+                </a:solidFill>
+                <a:latin typeface="SourceSerif4" pitchFamily="34" charset="0"/>
+                <a:ea typeface="SourceSerif4" pitchFamily="34" charset="-122"/>
+                <a:cs typeface="SourceSerif4" pitchFamily="34" charset="-120"/>
+              </a:rPr>
+              <a:t>Production names its rollback</a:t>
+            </a:r>
+            <a:endParaRPr lang="en-US" sz="2000" dirty="0"/>
+          </a:p>
+        </p:txBody>
+      </p:sp>
+      <p:sp>
+        <p:nvSpPr>
+          <p:cNvPr id="22" name="Text 20"/>
+          <p:cNvSpPr/>
+          <p:nvPr/>
+        </p:nvSpPr>
+        <p:spPr>
+          <a:xfrm>
+            <a:off x="4225860" y="4038600"/>
+            <a:ext cx="3246392" cy="687388"/>
+          </a:xfrm>
+          <a:prstGeom prst="rect">
+            <a:avLst/>
+          </a:prstGeom>
+          <a:noFill/>
+          <a:ln/>
+        </p:spPr>
+        <p:txBody>
+          <a:bodyPr wrap="square" lIns="0" tIns="0" rIns="0" bIns="0" rtlCol="0" anchor="t"/>
+          <a:lstStyle/>
+          <a:p>
+            <a:pPr algn="l" indent="0" marL="0">
+              <a:lnSpc>
+                <a:spcPts val="2706"/>
+              </a:lnSpc>
+              <a:buNone/>
+            </a:pPr>
+            <a:r>
+              <a:rPr lang="en-US" sz="1866" dirty="0">
+                <a:solidFill>
+                  <a:srgbClr val="33302A"/>
+                </a:solidFill>
+                <a:latin typeface="SourceSerif4" pitchFamily="34" charset="0"/>
+                <a:ea typeface="SourceSerif4" pitchFamily="34" charset="-122"/>
+                <a:cs typeface="SourceSerif4" pitchFamily="34" charset="-120"/>
+              </a:rPr>
+              <a:t>The previous version stays promotable.</a:t>
+            </a:r>
+            <a:endParaRPr lang="en-US" sz="1866" dirty="0"/>
+          </a:p>
+        </p:txBody>
+      </p:sp>
+      <p:sp>
+        <p:nvSpPr>
+          <p:cNvPr id="23" name="Text 21"/>
+          <p:cNvSpPr/>
+          <p:nvPr/>
+        </p:nvSpPr>
+        <p:spPr>
+          <a:xfrm>
+            <a:off x="7882348" y="4210447"/>
+            <a:ext cx="3585337" cy="343694"/>
+          </a:xfrm>
+          <a:prstGeom prst="rect">
+            <a:avLst/>
+          </a:prstGeom>
+          <a:noFill/>
+          <a:ln/>
+        </p:spPr>
+        <p:txBody>
+          <a:bodyPr wrap="square" lIns="0" tIns="0" rIns="0" bIns="0" rtlCol="0" anchor="t"/>
+          <a:lstStyle/>
+          <a:p>
+            <a:pPr algn="l" indent="0" marL="0">
+              <a:lnSpc>
+                <a:spcPts val="2706"/>
+              </a:lnSpc>
+              <a:buNone/>
+            </a:pPr>
+            <a:r>
+              <a:rPr lang="en-US" sz="1866" dirty="0">
+                <a:solidFill>
+                  <a:srgbClr val="7A7468"/>
+                </a:solidFill>
+                <a:latin typeface="SourceSerif4" pitchFamily="34" charset="0"/>
+                <a:ea typeface="SourceSerif4" pitchFamily="34" charset="-122"/>
+                <a:cs typeface="SourceSerif4" pitchFamily="34" charset="-120"/>
+              </a:rPr>
+              <a:t>Rollback becomes a rebuild.</a:t>
+            </a:r>
+            <a:endParaRPr lang="en-US" sz="1866" dirty="0"/>
+          </a:p>
+        </p:txBody>
+      </p:sp>
+      <p:sp>
+        <p:nvSpPr>
+          <p:cNvPr id="24" name="Shape 22"/>
+          <p:cNvSpPr/>
+          <p:nvPr/>
+        </p:nvSpPr>
+        <p:spPr>
+          <a:xfrm>
+            <a:off x="554296" y="4889302"/>
+            <a:ext cx="11080360" cy="0"/>
+          </a:xfrm>
+          <a:prstGeom prst="line">
+            <a:avLst/>
+          </a:prstGeom>
+          <a:noFill/>
+          <a:ln w="12698">
+            <a:solidFill>
+              <a:srgbClr val="C9C0AC"/>
+            </a:solidFill>
+            <a:prstDash val="solid"/>
+          </a:ln>
+        </p:spPr>
+      </p:sp>
+      <p:sp>
+        <p:nvSpPr>
+          <p:cNvPr id="25" name="Text 23"/>
+          <p:cNvSpPr/>
+          <p:nvPr/>
+        </p:nvSpPr>
+        <p:spPr>
+          <a:xfrm>
+            <a:off x="791171" y="5265936"/>
+            <a:ext cx="533814" cy="260747"/>
+          </a:xfrm>
+          <a:prstGeom prst="rect">
+            <a:avLst/>
+          </a:prstGeom>
+          <a:noFill/>
+          <a:ln/>
+        </p:spPr>
+        <p:txBody>
+          <a:bodyPr wrap="square" lIns="0" tIns="0" rIns="0" bIns="0" rtlCol="0" anchor="t"/>
+          <a:lstStyle/>
+          <a:p>
+            <a:pPr algn="l" indent="0" marL="0">
+              <a:lnSpc>
+                <a:spcPts val="2053"/>
+              </a:lnSpc>
+              <a:buNone/>
+            </a:pPr>
+            <a:r>
+              <a:rPr lang="en-US" sz="1466" dirty="0">
+                <a:solidFill>
+                  <a:srgbClr val="5A5448"/>
+                </a:solidFill>
+                <a:latin typeface="IBMPlexMono" pitchFamily="34" charset="0"/>
+                <a:ea typeface="IBMPlexMono" pitchFamily="34" charset="-122"/>
+                <a:cs typeface="IBMPlexMono" pitchFamily="34" charset="-120"/>
+              </a:rPr>
+              <a:t>R-04</a:t>
+            </a:r>
+            <a:endParaRPr lang="en-US" sz="1466" dirty="0"/>
+          </a:p>
+        </p:txBody>
+      </p:sp>
+      <p:sp>
+        <p:nvSpPr>
+          <p:cNvPr id="26" name="Text 24"/>
+          <p:cNvSpPr/>
+          <p:nvPr/>
+        </p:nvSpPr>
+        <p:spPr>
+          <a:xfrm>
+            <a:off x="1788268" y="5053409"/>
+            <a:ext cx="2003119" cy="685800"/>
+          </a:xfrm>
+          <a:prstGeom prst="rect">
+            <a:avLst/>
+          </a:prstGeom>
+          <a:noFill/>
+          <a:ln/>
+        </p:spPr>
+        <p:txBody>
+          <a:bodyPr wrap="square" lIns="0" tIns="0" rIns="0" bIns="0" rtlCol="0" anchor="t"/>
+          <a:lstStyle/>
+          <a:p>
+            <a:pPr algn="l" indent="0" marL="0">
+              <a:lnSpc>
+                <a:spcPts val="2700"/>
+              </a:lnSpc>
+              <a:buNone/>
+            </a:pPr>
+            <a:r>
+              <a:rPr lang="en-US" sz="2000" b="1" dirty="0">
+                <a:solidFill>
+                  <a:srgbClr val="33302A"/>
+                </a:solidFill>
+                <a:latin typeface="SourceSerif4" pitchFamily="34" charset="0"/>
+                <a:ea typeface="SourceSerif4" pitchFamily="34" charset="-122"/>
+                <a:cs typeface="SourceSerif4" pitchFamily="34" charset="-120"/>
+              </a:rPr>
+              <a:t>Stage changes append</a:t>
+            </a:r>
+            <a:endParaRPr lang="en-US" sz="2000" dirty="0"/>
+          </a:p>
+        </p:txBody>
+      </p:sp>
+      <p:sp>
+        <p:nvSpPr>
+          <p:cNvPr id="27" name="Text 25"/>
+          <p:cNvSpPr/>
+          <p:nvPr/>
+        </p:nvSpPr>
+        <p:spPr>
+          <a:xfrm>
+            <a:off x="4225860" y="5052616"/>
+            <a:ext cx="3246392" cy="687388"/>
+          </a:xfrm>
+          <a:prstGeom prst="rect">
+            <a:avLst/>
+          </a:prstGeom>
+          <a:noFill/>
+          <a:ln/>
+        </p:spPr>
+        <p:txBody>
+          <a:bodyPr wrap="square" lIns="0" tIns="0" rIns="0" bIns="0" rtlCol="0" anchor="t"/>
+          <a:lstStyle/>
+          <a:p>
+            <a:pPr algn="l" indent="0" marL="0">
+              <a:lnSpc>
+                <a:spcPts val="2706"/>
+              </a:lnSpc>
+              <a:buNone/>
+            </a:pPr>
+            <a:r>
+              <a:rPr lang="en-US" sz="1866" dirty="0">
+                <a:solidFill>
+                  <a:srgbClr val="33302A"/>
+                </a:solidFill>
+                <a:latin typeface="SourceSerif4" pitchFamily="34" charset="0"/>
+                <a:ea typeface="SourceSerif4" pitchFamily="34" charset="-122"/>
+                <a:cs typeface="SourceSerif4" pitchFamily="34" charset="-120"/>
+              </a:rPr>
+              <a:t>The ledger is never edited in place.</a:t>
+            </a:r>
+            <a:endParaRPr lang="en-US" sz="1866" dirty="0"/>
+          </a:p>
+        </p:txBody>
+      </p:sp>
+      <p:sp>
+        <p:nvSpPr>
+          <p:cNvPr id="28" name="Text 26"/>
+          <p:cNvSpPr/>
+          <p:nvPr/>
+        </p:nvSpPr>
+        <p:spPr>
+          <a:xfrm>
+            <a:off x="7882348" y="5052616"/>
+            <a:ext cx="3585337" cy="687388"/>
+          </a:xfrm>
+          <a:prstGeom prst="rect">
+            <a:avLst/>
+          </a:prstGeom>
+          <a:noFill/>
+          <a:ln/>
+        </p:spPr>
+        <p:txBody>
+          <a:bodyPr wrap="square" lIns="0" tIns="0" rIns="0" bIns="0" rtlCol="0" anchor="t"/>
+          <a:lstStyle/>
+          <a:p>
+            <a:pPr algn="l" indent="0" marL="0">
+              <a:lnSpc>
+                <a:spcPts val="2706"/>
+              </a:lnSpc>
+              <a:buNone/>
+            </a:pPr>
+            <a:r>
+              <a:rPr lang="en-US" sz="1866" dirty="0">
+                <a:solidFill>
+                  <a:srgbClr val="7A7468"/>
+                </a:solidFill>
+                <a:latin typeface="SourceSerif4" pitchFamily="34" charset="0"/>
+                <a:ea typeface="SourceSerif4" pitchFamily="34" charset="-122"/>
+                <a:cs typeface="SourceSerif4" pitchFamily="34" charset="-120"/>
+              </a:rPr>
+              <a:t>Nobody can say who promoted what.</a:t>
+            </a:r>
+            <a:endParaRPr lang="en-US" sz="1866" dirty="0"/>
+          </a:p>
+        </p:txBody>
+      </p:sp>
+      <p:sp>
+        <p:nvSpPr>
+          <p:cNvPr id="29" name="Text 27"/>
+          <p:cNvSpPr/>
+          <p:nvPr/>
+        </p:nvSpPr>
+        <p:spPr>
+          <a:xfrm>
+            <a:off x="541599" y="6113066"/>
+            <a:ext cx="11327869" cy="236934"/>
+          </a:xfrm>
+          <a:prstGeom prst="rect">
+            <a:avLst/>
+          </a:prstGeom>
+          <a:noFill/>
+          <a:ln/>
+        </p:spPr>
+        <p:txBody>
+          <a:bodyPr wrap="square" lIns="0" tIns="0" rIns="0" bIns="0" rtlCol="0" anchor="t"/>
+          <a:lstStyle/>
+          <a:p>
+            <a:pPr algn="l" indent="0" marL="0">
+              <a:lnSpc>
+                <a:spcPts val="1866"/>
+              </a:lnSpc>
+              <a:buNone/>
+            </a:pPr>
+            <a:r>
+              <a:rPr lang="en-US" sz="1333" dirty="0">
+                <a:solidFill>
+                  <a:srgbClr val="7A7468"/>
+                </a:solidFill>
+                <a:latin typeface="IBMPlexMono" pitchFamily="34" charset="0"/>
+                <a:ea typeface="IBMPlexMono" pitchFamily="34" charset="-122"/>
+                <a:cs typeface="IBMPlexMono" pitchFamily="34" charset="-120"/>
+              </a:rPr>
+              <a:t>MODEL REGISTRY — OPERATING GUIDE · SHEET 04/05 · NO CHART, NO EXTERNAL DATA</a:t>
+            </a:r>
+            <a:endParaRPr lang="en-US" sz="1333" dirty="0"/>
+          </a:p>
+        </p:txBody>
+      </p:sp>
     </p:spTree>
   </p:cSld>
   <p:clrMapOvr>
@@ -1406,6 +5268,13 @@
 <file path=ppt/slides/slide5.xml><?xml version="1.0" encoding="utf-8"?>
 <p:sld xmlns:a="http://schemas.openxmlformats.org/drawingml/2006/main" xmlns:r="http://schemas.openxmlformats.org/officeDocument/2006/relationships" xmlns:p="http://schemas.openxmlformats.org/presentationml/2006/main">
   <p:cSld name="Slide 5">
+    <p:bg>
+      <p:bgPr>
+        <a:solidFill>
+          <a:srgbClr val="EFE9DD"/>
+        </a:solidFill>
+      </p:bgPr>
+    </p:bg>
     <p:spTree>
       <p:nvGrpSpPr>
         <p:cNvPr id="1" name=""/>
@@ -1420,30 +5289,578 @@
           <a:chExt cx="0" cy="0"/>
         </a:xfrm>
       </p:grpSpPr>
-      <p:pic>
-        <p:nvPicPr>
-          <p:cNvPr id="2" name="Image 0" descr="/tmp/slide-1787840561531-r1qsxxp4aqj.png">    </p:cNvPr>
-          <p:cNvPicPr>
-            <a:picLocks noChangeAspect="1"/>
-          </p:cNvPicPr>
-          <p:nvPr/>
-        </p:nvPicPr>
-        <p:blipFill>
-          <a:blip r:embed="rId1"/>
-          <a:stretch>
-            <a:fillRect/>
-          </a:stretch>
-        </p:blipFill>
-        <p:spPr>
-          <a:xfrm>
-            <a:off x="0" y="0"/>
-            <a:ext cx="12188952" cy="6858000"/>
-          </a:xfrm>
-          <a:prstGeom prst="rect">
-            <a:avLst/>
-          </a:prstGeom>
-        </p:spPr>
-      </p:pic>
+      <p:sp>
+        <p:nvSpPr>
+          <p:cNvPr id="2" name="Text 0"/>
+          <p:cNvSpPr/>
+          <p:nvPr/>
+        </p:nvSpPr>
+        <p:spPr>
+          <a:xfrm>
+            <a:off x="541599" y="440134"/>
+            <a:ext cx="4403259" cy="440333"/>
+          </a:xfrm>
+          <a:prstGeom prst="rect">
+            <a:avLst/>
+          </a:prstGeom>
+          <a:noFill/>
+          <a:ln/>
+        </p:spPr>
+        <p:txBody>
+          <a:bodyPr wrap="square" lIns="0" tIns="0" rIns="0" bIns="0" rtlCol="0" anchor="t"/>
+          <a:lstStyle/>
+          <a:p>
+            <a:pPr algn="l" indent="0" marL="0">
+              <a:lnSpc>
+                <a:spcPts val="3466"/>
+              </a:lnSpc>
+              <a:buNone/>
+            </a:pPr>
+            <a:r>
+              <a:rPr lang="en-US" sz="2666" b="1" dirty="0">
+                <a:solidFill>
+                  <a:srgbClr val="33302A"/>
+                </a:solidFill>
+                <a:latin typeface="SourceSerif4" pitchFamily="34" charset="0"/>
+                <a:ea typeface="SourceSerif4" pitchFamily="34" charset="-122"/>
+                <a:cs typeface="SourceSerif4" pitchFamily="34" charset="-120"/>
+              </a:rPr>
+              <a:t>What we still have to settle</a:t>
+            </a:r>
+            <a:endParaRPr lang="en-US" sz="2666" dirty="0"/>
+          </a:p>
+        </p:txBody>
+      </p:sp>
+      <p:sp>
+        <p:nvSpPr>
+          <p:cNvPr id="3" name="Text 1"/>
+          <p:cNvSpPr/>
+          <p:nvPr/>
+        </p:nvSpPr>
+        <p:spPr>
+          <a:xfrm>
+            <a:off x="10186623" y="567134"/>
+            <a:ext cx="1489945" cy="270073"/>
+          </a:xfrm>
+          <a:prstGeom prst="rect">
+            <a:avLst/>
+          </a:prstGeom>
+          <a:noFill/>
+          <a:ln/>
+        </p:spPr>
+        <p:txBody>
+          <a:bodyPr wrap="square" lIns="0" tIns="0" rIns="0" bIns="0" rtlCol="0" anchor="t"/>
+          <a:lstStyle/>
+          <a:p>
+            <a:pPr algn="l" indent="0" marL="0">
+              <a:lnSpc>
+                <a:spcPts val="2126"/>
+              </a:lnSpc>
+              <a:buNone/>
+            </a:pPr>
+            <a:r>
+              <a:rPr lang="en-US" sz="1466" dirty="0">
+                <a:solidFill>
+                  <a:srgbClr val="7A7468"/>
+                </a:solidFill>
+                <a:latin typeface="IBMPlexMono" pitchFamily="34" charset="0"/>
+                <a:ea typeface="IBMPlexMono" pitchFamily="34" charset="-122"/>
+                <a:cs typeface="IBMPlexMono" pitchFamily="34" charset="-120"/>
+              </a:rPr>
+              <a:t>Fig. 05 / 05</a:t>
+            </a:r>
+            <a:endParaRPr lang="en-US" sz="1466" dirty="0"/>
+          </a:p>
+        </p:txBody>
+      </p:sp>
+      <p:sp>
+        <p:nvSpPr>
+          <p:cNvPr id="4" name="Text 2"/>
+          <p:cNvSpPr/>
+          <p:nvPr/>
+        </p:nvSpPr>
+        <p:spPr>
+          <a:xfrm>
+            <a:off x="541599" y="1083667"/>
+            <a:ext cx="11105754" cy="12700"/>
+          </a:xfrm>
+          <a:prstGeom prst="rect">
+            <a:avLst/>
+          </a:prstGeom>
+          <a:solidFill>
+            <a:srgbClr val="9A9180"/>
+          </a:solidFill>
+          <a:ln/>
+        </p:spPr>
+        <p:txBody>
+          <a:bodyPr wrap="square" rtlCol="0" anchor="ctr"/>
+          <a:lstStyle/>
+          <a:p>
+            <a:pPr indent="0" marL="0">
+              <a:buNone/>
+            </a:pPr>
+            <a:endParaRPr lang="en-US" dirty="0"/>
+          </a:p>
+        </p:txBody>
+      </p:sp>
+      <p:sp>
+        <p:nvSpPr>
+          <p:cNvPr id="5" name="Text 3"/>
+          <p:cNvSpPr/>
+          <p:nvPr/>
+        </p:nvSpPr>
+        <p:spPr>
+          <a:xfrm>
+            <a:off x="541599" y="1333302"/>
+            <a:ext cx="11105754" cy="3971330"/>
+          </a:xfrm>
+          <a:prstGeom prst="rect">
+            <a:avLst/>
+          </a:prstGeom>
+          <a:solidFill>
+            <a:srgbClr val="F6F2E8"/>
+          </a:solidFill>
+          <a:ln w="12698">
+            <a:solidFill>
+              <a:srgbClr val="C9C0AC"/>
+            </a:solidFill>
+          </a:ln>
+        </p:spPr>
+        <p:txBody>
+          <a:bodyPr wrap="square" rtlCol="0" anchor="ctr"/>
+          <a:lstStyle/>
+          <a:p>
+            <a:pPr indent="0" marL="0">
+              <a:buNone/>
+            </a:pPr>
+            <a:endParaRPr lang="en-US" dirty="0"/>
+          </a:p>
+        </p:txBody>
+      </p:sp>
+      <p:sp>
+        <p:nvSpPr>
+          <p:cNvPr id="6" name="Text 4"/>
+          <p:cNvSpPr/>
+          <p:nvPr/>
+        </p:nvSpPr>
+        <p:spPr>
+          <a:xfrm>
+            <a:off x="791171" y="1869083"/>
+            <a:ext cx="533814" cy="260747"/>
+          </a:xfrm>
+          <a:prstGeom prst="rect">
+            <a:avLst/>
+          </a:prstGeom>
+          <a:noFill/>
+          <a:ln/>
+        </p:spPr>
+        <p:txBody>
+          <a:bodyPr wrap="square" lIns="0" tIns="0" rIns="0" bIns="0" rtlCol="0" anchor="t"/>
+          <a:lstStyle/>
+          <a:p>
+            <a:pPr algn="l" indent="0" marL="0">
+              <a:lnSpc>
+                <a:spcPts val="2053"/>
+              </a:lnSpc>
+              <a:buNone/>
+            </a:pPr>
+            <a:r>
+              <a:rPr lang="en-US" sz="1466" dirty="0">
+                <a:solidFill>
+                  <a:srgbClr val="5A5448"/>
+                </a:solidFill>
+                <a:latin typeface="IBMPlexMono" pitchFamily="34" charset="0"/>
+                <a:ea typeface="IBMPlexMono" pitchFamily="34" charset="-122"/>
+                <a:cs typeface="IBMPlexMono" pitchFamily="34" charset="-120"/>
+              </a:rPr>
+              <a:t>Q1</a:t>
+            </a:r>
+            <a:endParaRPr lang="en-US" sz="1466" dirty="0"/>
+          </a:p>
+        </p:txBody>
+      </p:sp>
+      <p:sp>
+        <p:nvSpPr>
+          <p:cNvPr id="7" name="Text 5"/>
+          <p:cNvSpPr/>
+          <p:nvPr/>
+        </p:nvSpPr>
+        <p:spPr>
+          <a:xfrm>
+            <a:off x="1788268" y="1797844"/>
+            <a:ext cx="9801703" cy="403027"/>
+          </a:xfrm>
+          <a:prstGeom prst="rect">
+            <a:avLst/>
+          </a:prstGeom>
+          <a:noFill/>
+          <a:ln/>
+        </p:spPr>
+        <p:txBody>
+          <a:bodyPr wrap="square" lIns="0" tIns="0" rIns="0" bIns="0" rtlCol="0" anchor="t"/>
+          <a:lstStyle/>
+          <a:p>
+            <a:pPr algn="l" indent="0" marL="0">
+              <a:lnSpc>
+                <a:spcPts val="3173"/>
+              </a:lnSpc>
+              <a:buNone/>
+            </a:pPr>
+            <a:r>
+              <a:rPr lang="en-US" sz="2266" dirty="0">
+                <a:solidFill>
+                  <a:srgbClr val="33302A"/>
+                </a:solidFill>
+                <a:latin typeface="SourceSerif4" pitchFamily="34" charset="0"/>
+                <a:ea typeface="SourceSerif4" pitchFamily="34" charset="-122"/>
+                <a:cs typeface="SourceSerif4" pitchFamily="34" charset="-120"/>
+              </a:rPr>
+              <a:t>Who signs a production promotion when the owner is away?</a:t>
+            </a:r>
+            <a:endParaRPr lang="en-US" sz="2266" dirty="0"/>
+          </a:p>
+        </p:txBody>
+      </p:sp>
+      <p:sp>
+        <p:nvSpPr>
+          <p:cNvPr id="8" name="Shape 6"/>
+          <p:cNvSpPr/>
+          <p:nvPr/>
+        </p:nvSpPr>
+        <p:spPr>
+          <a:xfrm>
+            <a:off x="554296" y="2659261"/>
+            <a:ext cx="11080360" cy="0"/>
+          </a:xfrm>
+          <a:prstGeom prst="line">
+            <a:avLst/>
+          </a:prstGeom>
+          <a:noFill/>
+          <a:ln w="12698">
+            <a:solidFill>
+              <a:srgbClr val="C9C0AC"/>
+            </a:solidFill>
+            <a:prstDash val="solid"/>
+          </a:ln>
+        </p:spPr>
+      </p:sp>
+      <p:sp>
+        <p:nvSpPr>
+          <p:cNvPr id="9" name="Text 7"/>
+          <p:cNvSpPr/>
+          <p:nvPr/>
+        </p:nvSpPr>
+        <p:spPr>
+          <a:xfrm>
+            <a:off x="791171" y="3188692"/>
+            <a:ext cx="533814" cy="260747"/>
+          </a:xfrm>
+          <a:prstGeom prst="rect">
+            <a:avLst/>
+          </a:prstGeom>
+          <a:noFill/>
+          <a:ln/>
+        </p:spPr>
+        <p:txBody>
+          <a:bodyPr wrap="square" lIns="0" tIns="0" rIns="0" bIns="0" rtlCol="0" anchor="t"/>
+          <a:lstStyle/>
+          <a:p>
+            <a:pPr algn="l" indent="0" marL="0">
+              <a:lnSpc>
+                <a:spcPts val="2053"/>
+              </a:lnSpc>
+              <a:buNone/>
+            </a:pPr>
+            <a:r>
+              <a:rPr lang="en-US" sz="1466" dirty="0">
+                <a:solidFill>
+                  <a:srgbClr val="5A5448"/>
+                </a:solidFill>
+                <a:latin typeface="IBMPlexMono" pitchFamily="34" charset="0"/>
+                <a:ea typeface="IBMPlexMono" pitchFamily="34" charset="-122"/>
+                <a:cs typeface="IBMPlexMono" pitchFamily="34" charset="-120"/>
+              </a:rPr>
+              <a:t>Q2</a:t>
+            </a:r>
+            <a:endParaRPr lang="en-US" sz="1466" dirty="0"/>
+          </a:p>
+        </p:txBody>
+      </p:sp>
+      <p:sp>
+        <p:nvSpPr>
+          <p:cNvPr id="10" name="Text 8"/>
+          <p:cNvSpPr/>
+          <p:nvPr/>
+        </p:nvSpPr>
+        <p:spPr>
+          <a:xfrm>
+            <a:off x="1788268" y="3117453"/>
+            <a:ext cx="9801703" cy="403027"/>
+          </a:xfrm>
+          <a:prstGeom prst="rect">
+            <a:avLst/>
+          </a:prstGeom>
+          <a:noFill/>
+          <a:ln/>
+        </p:spPr>
+        <p:txBody>
+          <a:bodyPr wrap="square" lIns="0" tIns="0" rIns="0" bIns="0" rtlCol="0" anchor="t"/>
+          <a:lstStyle/>
+          <a:p>
+            <a:pPr algn="l" indent="0" marL="0">
+              <a:lnSpc>
+                <a:spcPts val="3173"/>
+              </a:lnSpc>
+              <a:buNone/>
+            </a:pPr>
+            <a:r>
+              <a:rPr lang="en-US" sz="2266" dirty="0">
+                <a:solidFill>
+                  <a:srgbClr val="33302A"/>
+                </a:solidFill>
+                <a:latin typeface="SourceSerif4" pitchFamily="34" charset="0"/>
+                <a:ea typeface="SourceSerif4" pitchFamily="34" charset="-122"/>
+                <a:cs typeface="SourceSerif4" pitchFamily="34" charset="-120"/>
+              </a:rPr>
+              <a:t>How long does an archived model stay readable?</a:t>
+            </a:r>
+            <a:endParaRPr lang="en-US" sz="2266" dirty="0"/>
+          </a:p>
+        </p:txBody>
+      </p:sp>
+      <p:sp>
+        <p:nvSpPr>
+          <p:cNvPr id="11" name="Shape 9"/>
+          <p:cNvSpPr/>
+          <p:nvPr/>
+        </p:nvSpPr>
+        <p:spPr>
+          <a:xfrm>
+            <a:off x="554296" y="3978870"/>
+            <a:ext cx="11080360" cy="0"/>
+          </a:xfrm>
+          <a:prstGeom prst="line">
+            <a:avLst/>
+          </a:prstGeom>
+          <a:noFill/>
+          <a:ln w="12698">
+            <a:solidFill>
+              <a:srgbClr val="C9C0AC"/>
+            </a:solidFill>
+            <a:prstDash val="solid"/>
+          </a:ln>
+        </p:spPr>
+      </p:sp>
+      <p:sp>
+        <p:nvSpPr>
+          <p:cNvPr id="12" name="Text 10"/>
+          <p:cNvSpPr/>
+          <p:nvPr/>
+        </p:nvSpPr>
+        <p:spPr>
+          <a:xfrm>
+            <a:off x="791171" y="4508302"/>
+            <a:ext cx="533814" cy="260747"/>
+          </a:xfrm>
+          <a:prstGeom prst="rect">
+            <a:avLst/>
+          </a:prstGeom>
+          <a:noFill/>
+          <a:ln/>
+        </p:spPr>
+        <p:txBody>
+          <a:bodyPr wrap="square" lIns="0" tIns="0" rIns="0" bIns="0" rtlCol="0" anchor="t"/>
+          <a:lstStyle/>
+          <a:p>
+            <a:pPr algn="l" indent="0" marL="0">
+              <a:lnSpc>
+                <a:spcPts val="2053"/>
+              </a:lnSpc>
+              <a:buNone/>
+            </a:pPr>
+            <a:r>
+              <a:rPr lang="en-US" sz="1466" dirty="0">
+                <a:solidFill>
+                  <a:srgbClr val="5A5448"/>
+                </a:solidFill>
+                <a:latin typeface="IBMPlexMono" pitchFamily="34" charset="0"/>
+                <a:ea typeface="IBMPlexMono" pitchFamily="34" charset="-122"/>
+                <a:cs typeface="IBMPlexMono" pitchFamily="34" charset="-120"/>
+              </a:rPr>
+              <a:t>Q3</a:t>
+            </a:r>
+            <a:endParaRPr lang="en-US" sz="1466" dirty="0"/>
+          </a:p>
+        </p:txBody>
+      </p:sp>
+      <p:sp>
+        <p:nvSpPr>
+          <p:cNvPr id="13" name="Text 11"/>
+          <p:cNvSpPr/>
+          <p:nvPr/>
+        </p:nvSpPr>
+        <p:spPr>
+          <a:xfrm>
+            <a:off x="1788268" y="4437063"/>
+            <a:ext cx="9801703" cy="403027"/>
+          </a:xfrm>
+          <a:prstGeom prst="rect">
+            <a:avLst/>
+          </a:prstGeom>
+          <a:noFill/>
+          <a:ln/>
+        </p:spPr>
+        <p:txBody>
+          <a:bodyPr wrap="square" lIns="0" tIns="0" rIns="0" bIns="0" rtlCol="0" anchor="t"/>
+          <a:lstStyle/>
+          <a:p>
+            <a:pPr algn="l" indent="0" marL="0">
+              <a:lnSpc>
+                <a:spcPts val="3173"/>
+              </a:lnSpc>
+              <a:buNone/>
+            </a:pPr>
+            <a:r>
+              <a:rPr lang="en-US" sz="2266" dirty="0">
+                <a:solidFill>
+                  <a:srgbClr val="33302A"/>
+                </a:solidFill>
+                <a:latin typeface="SourceSerif4" pitchFamily="34" charset="0"/>
+                <a:ea typeface="SourceSerif4" pitchFamily="34" charset="-122"/>
+                <a:cs typeface="SourceSerif4" pitchFamily="34" charset="-120"/>
+              </a:rPr>
+              <a:t>What happens to a model whose owning team is dissolved?</a:t>
+            </a:r>
+            <a:endParaRPr lang="en-US" sz="2266" dirty="0"/>
+          </a:p>
+        </p:txBody>
+      </p:sp>
+      <p:sp>
+        <p:nvSpPr>
+          <p:cNvPr id="14" name="Text 12"/>
+          <p:cNvSpPr/>
+          <p:nvPr/>
+        </p:nvSpPr>
+        <p:spPr>
+          <a:xfrm>
+            <a:off x="541599" y="5541566"/>
+            <a:ext cx="1346879" cy="368300"/>
+          </a:xfrm>
+          <a:prstGeom prst="rect">
+            <a:avLst/>
+          </a:prstGeom>
+          <a:noFill/>
+          <a:ln/>
+        </p:spPr>
+        <p:txBody>
+          <a:bodyPr wrap="square" lIns="0" tIns="0" rIns="0" bIns="0" rtlCol="0" anchor="t"/>
+          <a:lstStyle/>
+          <a:p>
+            <a:pPr algn="l" indent="0" marL="0">
+              <a:lnSpc>
+                <a:spcPts val="2900"/>
+              </a:lnSpc>
+              <a:buNone/>
+            </a:pPr>
+            <a:r>
+              <a:rPr lang="en-US" sz="2000" b="1" dirty="0">
+                <a:solidFill>
+                  <a:srgbClr val="33302A"/>
+                </a:solidFill>
+                <a:latin typeface="SourceSerif4" pitchFamily="34" charset="0"/>
+                <a:ea typeface="SourceSerif4" pitchFamily="34" charset="-122"/>
+                <a:cs typeface="SourceSerif4" pitchFamily="34" charset="-120"/>
+              </a:rPr>
+              <a:t>Thank you</a:t>
+            </a:r>
+            <a:endParaRPr lang="en-US" sz="2000" dirty="0"/>
+          </a:p>
+        </p:txBody>
+      </p:sp>
+      <p:sp>
+        <p:nvSpPr>
+          <p:cNvPr id="15" name="Text 13"/>
+          <p:cNvSpPr/>
+          <p:nvPr/>
+        </p:nvSpPr>
+        <p:spPr>
+          <a:xfrm>
+            <a:off x="9699779" y="5617766"/>
+            <a:ext cx="1986525" cy="260747"/>
+          </a:xfrm>
+          <a:prstGeom prst="rect">
+            <a:avLst/>
+          </a:prstGeom>
+          <a:noFill/>
+          <a:ln/>
+        </p:spPr>
+        <p:txBody>
+          <a:bodyPr wrap="square" lIns="0" tIns="0" rIns="0" bIns="0" rtlCol="0" anchor="t"/>
+          <a:lstStyle/>
+          <a:p>
+            <a:pPr algn="l" indent="0" marL="0">
+              <a:lnSpc>
+                <a:spcPts val="2053"/>
+              </a:lnSpc>
+              <a:buNone/>
+            </a:pPr>
+            <a:r>
+              <a:rPr lang="en-US" sz="1466" dirty="0">
+                <a:solidFill>
+                  <a:srgbClr val="7A7468"/>
+                </a:solidFill>
+                <a:latin typeface="IBMPlexMono" pitchFamily="34" charset="0"/>
+                <a:ea typeface="IBMPlexMono" pitchFamily="34" charset="-122"/>
+                <a:cs typeface="IBMPlexMono" pitchFamily="34" charset="-120"/>
+              </a:rPr>
+              <a:t>PRESENTER · TEAM</a:t>
+            </a:r>
+            <a:endParaRPr lang="en-US" sz="1466" dirty="0"/>
+          </a:p>
+        </p:txBody>
+      </p:sp>
+      <p:sp>
+        <p:nvSpPr>
+          <p:cNvPr id="16" name="Text 14"/>
+          <p:cNvSpPr/>
+          <p:nvPr/>
+        </p:nvSpPr>
+        <p:spPr>
+          <a:xfrm>
+            <a:off x="541599" y="6113066"/>
+            <a:ext cx="11327869" cy="236934"/>
+          </a:xfrm>
+          <a:prstGeom prst="rect">
+            <a:avLst/>
+          </a:prstGeom>
+          <a:noFill/>
+          <a:ln/>
+        </p:spPr>
+        <p:txBody>
+          <a:bodyPr wrap="square" lIns="0" tIns="0" rIns="0" bIns="0" rtlCol="0" anchor="t"/>
+          <a:lstStyle/>
+          <a:p>
+            <a:pPr algn="l" indent="0" marL="0">
+              <a:lnSpc>
+                <a:spcPts val="1866"/>
+              </a:lnSpc>
+              <a:buNone/>
+            </a:pPr>
+            <a:r>
+              <a:rPr lang="en-US" sz="1333" dirty="0">
+                <a:solidFill>
+                  <a:srgbClr val="7A7468"/>
+                </a:solidFill>
+                <a:latin typeface="IBMPlexMono" pitchFamily="34" charset="0"/>
+                <a:ea typeface="IBMPlexMono" pitchFamily="34" charset="-122"/>
+                <a:cs typeface="IBMPlexMono" pitchFamily="34" charset="-120"/>
+              </a:rPr>
+              <a:t>MODEL REGISTRY — OPERATING GUIDE · SHEET 05/05 · NO CHART, NO EXTERNAL DATA</a:t>
+            </a:r>
+            <a:endParaRPr lang="en-US" sz="1333" dirty="0"/>
+          </a:p>
+        </p:txBody>
+      </p:sp>
     </p:spTree>
   </p:cSld>
   <p:clrMapOvr>

--- a/decks/model-registry/model-registry.pptx
+++ b/decks/model-registry/model-registry.pptx
@@ -1249,7 +1249,7 @@
           <a:ln/>
         </p:spPr>
         <p:txBody>
-          <a:bodyPr wrap="square" lIns="0" tIns="0" rIns="0" bIns="0" rtlCol="0" anchor="t"/>
+          <a:bodyPr wrap="none" lIns="0" tIns="0" rIns="0" bIns="0" rtlCol="0" anchor="t"/>
           <a:lstStyle/>
           <a:p>
             <a:pPr algn="l" indent="0" marL="0">
@@ -1291,7 +1291,7 @@
           <a:ln/>
         </p:spPr>
         <p:txBody>
-          <a:bodyPr wrap="square" lIns="0" tIns="0" rIns="0" bIns="0" rtlCol="0" anchor="t"/>
+          <a:bodyPr wrap="none" lIns="0" tIns="0" rIns="0" bIns="0" rtlCol="0" anchor="t"/>
           <a:lstStyle/>
           <a:p>
             <a:pPr algn="l" indent="0" marL="0">
@@ -1363,7 +1363,9 @@
           <a:ln/>
         </p:spPr>
         <p:txBody>
-          <a:bodyPr wrap="square" lIns="0" tIns="0" rIns="0" bIns="0" rtlCol="0" anchor="t"/>
+          <a:bodyPr wrap="square" lIns="0" tIns="0" rIns="0" bIns="0" rtlCol="0" anchor="t">
+            <a:normAutofit/>
+          </a:bodyPr>
           <a:lstStyle/>
           <a:p>
             <a:pPr algn="l" indent="0" marL="0">
@@ -1463,6 +1465,10 @@
             <a:prstDash val="solid"/>
           </a:ln>
         </p:spPr>
+        <p:txBody>
+          <a:bodyPr/>
+          <a:p/>
+        </p:txBody>
       </p:sp>
       <p:sp>
         <p:nvSpPr>
@@ -1482,7 +1488,7 @@
           <a:ln/>
         </p:spPr>
         <p:txBody>
-          <a:bodyPr wrap="square" lIns="0" tIns="0" rIns="0" bIns="0" rtlCol="0" anchor="t"/>
+          <a:bodyPr wrap="none" lIns="0" tIns="0" rIns="0" bIns="0" rtlCol="0" anchor="t"/>
           <a:lstStyle/>
           <a:p>
             <a:pPr algn="l" indent="0" marL="0">
@@ -1527,7 +1533,7 @@
           <a:ln/>
         </p:spPr>
         <p:txBody>
-          <a:bodyPr wrap="square" lIns="0" tIns="0" rIns="0" bIns="0" rtlCol="0" anchor="t"/>
+          <a:bodyPr wrap="none" lIns="0" tIns="0" rIns="0" bIns="0" rtlCol="0" anchor="t"/>
           <a:lstStyle/>
           <a:p>
             <a:pPr algn="l" indent="0" marL="0">
@@ -1573,6 +1579,10 @@
             <a:prstDash val="solid"/>
           </a:ln>
         </p:spPr>
+        <p:txBody>
+          <a:bodyPr/>
+          <a:p/>
+        </p:txBody>
       </p:sp>
       <p:sp>
         <p:nvSpPr>
@@ -1592,7 +1602,7 @@
           <a:ln/>
         </p:spPr>
         <p:txBody>
-          <a:bodyPr wrap="square" lIns="0" tIns="0" rIns="0" bIns="0" rtlCol="0" anchor="t"/>
+          <a:bodyPr wrap="none" lIns="0" tIns="0" rIns="0" bIns="0" rtlCol="0" anchor="t"/>
           <a:lstStyle/>
           <a:p>
             <a:pPr algn="l" indent="0" marL="0">
@@ -1637,7 +1647,7 @@
           <a:ln/>
         </p:spPr>
         <p:txBody>
-          <a:bodyPr wrap="square" lIns="0" tIns="0" rIns="0" bIns="0" rtlCol="0" anchor="t"/>
+          <a:bodyPr wrap="none" lIns="0" tIns="0" rIns="0" bIns="0" rtlCol="0" anchor="t"/>
           <a:lstStyle/>
           <a:p>
             <a:pPr algn="l" indent="0" marL="0">
@@ -1679,7 +1689,7 @@
           <a:ln/>
         </p:spPr>
         <p:txBody>
-          <a:bodyPr wrap="square" lIns="0" tIns="0" rIns="0" bIns="0" rtlCol="0" anchor="t"/>
+          <a:bodyPr wrap="none" lIns="0" tIns="0" rIns="0" bIns="0" rtlCol="0" anchor="t"/>
           <a:lstStyle/>
           <a:p>
             <a:pPr algn="l" indent="0" marL="0">
@@ -1724,7 +1734,7 @@
           <a:ln/>
         </p:spPr>
         <p:txBody>
-          <a:bodyPr wrap="square" lIns="0" tIns="0" rIns="0" bIns="0" rtlCol="0" anchor="t"/>
+          <a:bodyPr wrap="none" lIns="0" tIns="0" rIns="0" bIns="0" rtlCol="0" anchor="t"/>
           <a:lstStyle/>
           <a:p>
             <a:pPr algn="l" indent="0" marL="0">
@@ -1766,7 +1776,7 @@
           <a:ln/>
         </p:spPr>
         <p:txBody>
-          <a:bodyPr wrap="square" lIns="0" tIns="0" rIns="0" bIns="0" rtlCol="0" anchor="t"/>
+          <a:bodyPr wrap="none" lIns="0" tIns="0" rIns="0" bIns="0" rtlCol="0" anchor="t"/>
           <a:lstStyle/>
           <a:p>
             <a:pPr algn="l" indent="0" marL="0">
@@ -1840,7 +1850,7 @@
           <a:ln/>
         </p:spPr>
         <p:txBody>
-          <a:bodyPr wrap="square" lIns="0" tIns="0" rIns="0" bIns="0" rtlCol="0" anchor="t"/>
+          <a:bodyPr wrap="none" lIns="0" tIns="0" rIns="0" bIns="0" rtlCol="0" anchor="t"/>
           <a:lstStyle/>
           <a:p>
             <a:pPr algn="l" indent="0" marL="0">
@@ -1882,7 +1892,7 @@
           <a:ln/>
         </p:spPr>
         <p:txBody>
-          <a:bodyPr wrap="square" lIns="0" tIns="0" rIns="0" bIns="0" rtlCol="0" anchor="t"/>
+          <a:bodyPr wrap="none" lIns="0" tIns="0" rIns="0" bIns="0" rtlCol="0" anchor="t"/>
           <a:lstStyle/>
           <a:p>
             <a:pPr algn="l" indent="0" marL="0">
@@ -2018,7 +2028,7 @@
           <a:ln/>
         </p:spPr>
         <p:txBody>
-          <a:bodyPr wrap="square" lIns="0" tIns="0" rIns="0" bIns="0" rtlCol="0" anchor="t"/>
+          <a:bodyPr wrap="none" lIns="0" tIns="0" rIns="0" bIns="0" rtlCol="0" anchor="t"/>
           <a:lstStyle/>
           <a:p>
             <a:pPr algn="l" indent="0" marL="0">
@@ -2060,7 +2070,7 @@
           <a:ln/>
         </p:spPr>
         <p:txBody>
-          <a:bodyPr wrap="square" lIns="0" tIns="0" rIns="0" bIns="0" rtlCol="0" anchor="t"/>
+          <a:bodyPr wrap="none" lIns="0" tIns="0" rIns="0" bIns="0" rtlCol="0" anchor="t"/>
           <a:lstStyle/>
           <a:p>
             <a:pPr algn="l" indent="0" marL="0">
@@ -2102,7 +2112,7 @@
           <a:ln/>
         </p:spPr>
         <p:txBody>
-          <a:bodyPr wrap="square" lIns="0" tIns="0" rIns="0" bIns="0" rtlCol="0" anchor="t"/>
+          <a:bodyPr wrap="none" lIns="0" tIns="0" rIns="0" bIns="0" rtlCol="0" anchor="t"/>
           <a:lstStyle/>
           <a:p>
             <a:pPr algn="l" indent="0" marL="0">
@@ -2144,7 +2154,7 @@
           <a:ln/>
         </p:spPr>
         <p:txBody>
-          <a:bodyPr wrap="square" lIns="0" tIns="0" rIns="0" bIns="0" rtlCol="0" anchor="t"/>
+          <a:bodyPr wrap="none" lIns="0" tIns="0" rIns="0" bIns="0" rtlCol="0" anchor="t"/>
           <a:lstStyle/>
           <a:p>
             <a:pPr algn="l" indent="0" marL="0">
@@ -2186,7 +2196,7 @@
           <a:ln/>
         </p:spPr>
         <p:txBody>
-          <a:bodyPr wrap="square" lIns="0" tIns="0" rIns="0" bIns="0" rtlCol="0" anchor="t"/>
+          <a:bodyPr wrap="none" lIns="0" tIns="0" rIns="0" bIns="0" rtlCol="0" anchor="t"/>
           <a:lstStyle/>
           <a:p>
             <a:pPr algn="l" indent="0" marL="0">
@@ -2228,7 +2238,7 @@
           <a:ln/>
         </p:spPr>
         <p:txBody>
-          <a:bodyPr wrap="square" lIns="0" tIns="0" rIns="0" bIns="0" rtlCol="0" anchor="t"/>
+          <a:bodyPr wrap="none" lIns="0" tIns="0" rIns="0" bIns="0" rtlCol="0" anchor="t"/>
           <a:lstStyle/>
           <a:p>
             <a:pPr algn="l" indent="0" marL="0">
@@ -2270,7 +2280,7 @@
           <a:ln/>
         </p:spPr>
         <p:txBody>
-          <a:bodyPr wrap="square" lIns="0" tIns="0" rIns="0" bIns="0" rtlCol="0" anchor="t"/>
+          <a:bodyPr wrap="none" lIns="0" tIns="0" rIns="0" bIns="0" rtlCol="0" anchor="t"/>
           <a:lstStyle/>
           <a:p>
             <a:pPr algn="l" indent="0" marL="0">
@@ -2316,6 +2326,10 @@
             <a:prstDash val="solid"/>
           </a:ln>
         </p:spPr>
+        <p:txBody>
+          <a:bodyPr/>
+          <a:p/>
+        </p:txBody>
       </p:sp>
       <p:sp>
         <p:nvSpPr>
@@ -2335,7 +2349,7 @@
           <a:ln/>
         </p:spPr>
         <p:txBody>
-          <a:bodyPr wrap="square" lIns="0" tIns="0" rIns="0" bIns="0" rtlCol="0" anchor="t"/>
+          <a:bodyPr wrap="none" lIns="0" tIns="0" rIns="0" bIns="0" rtlCol="0" anchor="t"/>
           <a:lstStyle/>
           <a:p>
             <a:pPr algn="l" indent="0" marL="0">
@@ -2377,7 +2391,7 @@
           <a:ln/>
         </p:spPr>
         <p:txBody>
-          <a:bodyPr wrap="square" lIns="0" tIns="0" rIns="0" bIns="0" rtlCol="0" anchor="t"/>
+          <a:bodyPr wrap="none" lIns="0" tIns="0" rIns="0" bIns="0" rtlCol="0" anchor="t"/>
           <a:lstStyle/>
           <a:p>
             <a:pPr algn="l" indent="0" marL="0">
@@ -2419,7 +2433,7 @@
           <a:ln/>
         </p:spPr>
         <p:txBody>
-          <a:bodyPr wrap="square" lIns="0" tIns="0" rIns="0" bIns="0" rtlCol="0" anchor="t"/>
+          <a:bodyPr wrap="none" lIns="0" tIns="0" rIns="0" bIns="0" rtlCol="0" anchor="t"/>
           <a:lstStyle/>
           <a:p>
             <a:pPr algn="l" indent="0" marL="0">
@@ -2461,7 +2475,7 @@
           <a:ln/>
         </p:spPr>
         <p:txBody>
-          <a:bodyPr wrap="square" lIns="0" tIns="0" rIns="0" bIns="0" rtlCol="0" anchor="t"/>
+          <a:bodyPr wrap="none" lIns="0" tIns="0" rIns="0" bIns="0" rtlCol="0" anchor="t"/>
           <a:lstStyle/>
           <a:p>
             <a:pPr algn="l" indent="0" marL="0">
@@ -2507,6 +2521,10 @@
             <a:prstDash val="solid"/>
           </a:ln>
         </p:spPr>
+        <p:txBody>
+          <a:bodyPr/>
+          <a:p/>
+        </p:txBody>
       </p:sp>
       <p:sp>
         <p:nvSpPr>
@@ -2526,7 +2544,7 @@
           <a:ln/>
         </p:spPr>
         <p:txBody>
-          <a:bodyPr wrap="square" lIns="0" tIns="0" rIns="0" bIns="0" rtlCol="0" anchor="t"/>
+          <a:bodyPr wrap="none" lIns="0" tIns="0" rIns="0" bIns="0" rtlCol="0" anchor="t"/>
           <a:lstStyle/>
           <a:p>
             <a:pPr algn="l" indent="0" marL="0">
@@ -2568,7 +2586,7 @@
           <a:ln/>
         </p:spPr>
         <p:txBody>
-          <a:bodyPr wrap="square" lIns="0" tIns="0" rIns="0" bIns="0" rtlCol="0" anchor="t"/>
+          <a:bodyPr wrap="none" lIns="0" tIns="0" rIns="0" bIns="0" rtlCol="0" anchor="t"/>
           <a:lstStyle/>
           <a:p>
             <a:pPr algn="l" indent="0" marL="0">
@@ -2610,7 +2628,7 @@
           <a:ln/>
         </p:spPr>
         <p:txBody>
-          <a:bodyPr wrap="square" lIns="0" tIns="0" rIns="0" bIns="0" rtlCol="0" anchor="t"/>
+          <a:bodyPr wrap="none" lIns="0" tIns="0" rIns="0" bIns="0" rtlCol="0" anchor="t"/>
           <a:lstStyle/>
           <a:p>
             <a:pPr algn="l" indent="0" marL="0">
@@ -2652,7 +2670,7 @@
           <a:ln/>
         </p:spPr>
         <p:txBody>
-          <a:bodyPr wrap="square" lIns="0" tIns="0" rIns="0" bIns="0" rtlCol="0" anchor="t"/>
+          <a:bodyPr wrap="none" lIns="0" tIns="0" rIns="0" bIns="0" rtlCol="0" anchor="t"/>
           <a:lstStyle/>
           <a:p>
             <a:pPr algn="l" indent="0" marL="0">
@@ -2698,6 +2716,10 @@
             <a:prstDash val="solid"/>
           </a:ln>
         </p:spPr>
+        <p:txBody>
+          <a:bodyPr/>
+          <a:p/>
+        </p:txBody>
       </p:sp>
       <p:sp>
         <p:nvSpPr>
@@ -2717,7 +2739,7 @@
           <a:ln/>
         </p:spPr>
         <p:txBody>
-          <a:bodyPr wrap="square" lIns="0" tIns="0" rIns="0" bIns="0" rtlCol="0" anchor="t"/>
+          <a:bodyPr wrap="none" lIns="0" tIns="0" rIns="0" bIns="0" rtlCol="0" anchor="t"/>
           <a:lstStyle/>
           <a:p>
             <a:pPr algn="l" indent="0" marL="0">
@@ -2759,7 +2781,7 @@
           <a:ln/>
         </p:spPr>
         <p:txBody>
-          <a:bodyPr wrap="square" lIns="0" tIns="0" rIns="0" bIns="0" rtlCol="0" anchor="t"/>
+          <a:bodyPr wrap="none" lIns="0" tIns="0" rIns="0" bIns="0" rtlCol="0" anchor="t"/>
           <a:lstStyle/>
           <a:p>
             <a:pPr algn="l" indent="0" marL="0">
@@ -2801,7 +2823,7 @@
           <a:ln/>
         </p:spPr>
         <p:txBody>
-          <a:bodyPr wrap="square" lIns="0" tIns="0" rIns="0" bIns="0" rtlCol="0" anchor="t"/>
+          <a:bodyPr wrap="none" lIns="0" tIns="0" rIns="0" bIns="0" rtlCol="0" anchor="t"/>
           <a:lstStyle/>
           <a:p>
             <a:pPr algn="l" indent="0" marL="0">
@@ -2843,7 +2865,7 @@
           <a:ln/>
         </p:spPr>
         <p:txBody>
-          <a:bodyPr wrap="square" lIns="0" tIns="0" rIns="0" bIns="0" rtlCol="0" anchor="t"/>
+          <a:bodyPr wrap="none" lIns="0" tIns="0" rIns="0" bIns="0" rtlCol="0" anchor="t"/>
           <a:lstStyle/>
           <a:p>
             <a:pPr algn="l" indent="0" marL="0">
@@ -2885,7 +2907,7 @@
           <a:ln/>
         </p:spPr>
         <p:txBody>
-          <a:bodyPr wrap="square" lIns="0" tIns="0" rIns="0" bIns="0" rtlCol="0" anchor="t"/>
+          <a:bodyPr wrap="none" lIns="0" tIns="0" rIns="0" bIns="0" rtlCol="0" anchor="t"/>
           <a:lstStyle/>
           <a:p>
             <a:pPr algn="l" indent="0" marL="0">
@@ -2930,7 +2952,7 @@
           <a:ln/>
         </p:spPr>
         <p:txBody>
-          <a:bodyPr wrap="square" lIns="0" tIns="0" rIns="0" bIns="0" rtlCol="0" anchor="t"/>
+          <a:bodyPr wrap="none" lIns="0" tIns="0" rIns="0" bIns="0" rtlCol="0" anchor="t"/>
           <a:lstStyle/>
           <a:p>
             <a:pPr algn="l" indent="0" marL="0">
@@ -3004,7 +3026,7 @@
           <a:ln/>
         </p:spPr>
         <p:txBody>
-          <a:bodyPr wrap="square" lIns="0" tIns="0" rIns="0" bIns="0" rtlCol="0" anchor="t"/>
+          <a:bodyPr wrap="none" lIns="0" tIns="0" rIns="0" bIns="0" rtlCol="0" anchor="t"/>
           <a:lstStyle/>
           <a:p>
             <a:pPr algn="l" indent="0" marL="0">
@@ -3046,7 +3068,7 @@
           <a:ln/>
         </p:spPr>
         <p:txBody>
-          <a:bodyPr wrap="square" lIns="0" tIns="0" rIns="0" bIns="0" rtlCol="0" anchor="t"/>
+          <a:bodyPr wrap="none" lIns="0" tIns="0" rIns="0" bIns="0" rtlCol="0" anchor="t"/>
           <a:lstStyle/>
           <a:p>
             <a:pPr algn="l" indent="0" marL="0">
@@ -3118,7 +3140,7 @@
           <a:ln/>
         </p:spPr>
         <p:txBody>
-          <a:bodyPr wrap="square" lIns="0" tIns="0" rIns="0" bIns="0" rtlCol="0" anchor="t"/>
+          <a:bodyPr wrap="none" lIns="0" tIns="0" rIns="0" bIns="0" rtlCol="0" anchor="t"/>
           <a:lstStyle/>
           <a:p>
             <a:pPr algn="l" indent="0" marL="0">
@@ -3160,7 +3182,7 @@
           <a:ln/>
         </p:spPr>
         <p:txBody>
-          <a:bodyPr wrap="square" lIns="0" tIns="0" rIns="0" bIns="0" rtlCol="0" anchor="t"/>
+          <a:bodyPr wrap="none" lIns="0" tIns="0" rIns="0" bIns="0" rtlCol="0" anchor="t"/>
           <a:lstStyle/>
           <a:p>
             <a:pPr algn="l" indent="0" marL="0">
@@ -3240,6 +3262,10 @@
             <a:prstDash val="solid"/>
           </a:ln>
         </p:spPr>
+        <p:txBody>
+          <a:bodyPr/>
+          <a:p/>
+        </p:txBody>
       </p:sp>
       <p:sp>
         <p:nvSpPr>
@@ -3259,7 +3285,7 @@
           <a:ln/>
         </p:spPr>
         <p:txBody>
-          <a:bodyPr wrap="square" lIns="0" tIns="0" rIns="0" bIns="0" rtlCol="0" anchor="t"/>
+          <a:bodyPr wrap="none" lIns="0" tIns="0" rIns="0" bIns="0" rtlCol="0" anchor="t"/>
           <a:lstStyle/>
           <a:p>
             <a:pPr algn="l" indent="0" marL="0">
@@ -3301,7 +3327,7 @@
           <a:ln/>
         </p:spPr>
         <p:txBody>
-          <a:bodyPr wrap="square" lIns="0" tIns="0" rIns="0" bIns="0" rtlCol="0" anchor="t"/>
+          <a:bodyPr wrap="none" lIns="0" tIns="0" rIns="0" bIns="0" rtlCol="0" anchor="t"/>
           <a:lstStyle/>
           <a:p>
             <a:pPr algn="l" indent="0" marL="0">
@@ -3343,7 +3369,9 @@
           <a:ln/>
         </p:spPr>
         <p:txBody>
-          <a:bodyPr wrap="square" lIns="0" tIns="0" rIns="0" bIns="0" rtlCol="0" anchor="t"/>
+          <a:bodyPr wrap="square" lIns="0" tIns="0" rIns="0" bIns="0" rtlCol="0" anchor="t">
+            <a:normAutofit/>
+          </a:bodyPr>
           <a:lstStyle/>
           <a:p>
             <a:pPr algn="l" indent="0" marL="0">
@@ -3385,7 +3413,7 @@
           <a:ln/>
         </p:spPr>
         <p:txBody>
-          <a:bodyPr wrap="square" lIns="0" tIns="0" rIns="0" bIns="0" rtlCol="0" anchor="t"/>
+          <a:bodyPr wrap="none" lIns="0" tIns="0" rIns="0" bIns="0" rtlCol="0" anchor="t"/>
           <a:lstStyle/>
           <a:p>
             <a:pPr algn="l" indent="0" marL="0">
@@ -3431,6 +3459,10 @@
             <a:prstDash val="solid"/>
           </a:ln>
         </p:spPr>
+        <p:txBody>
+          <a:bodyPr/>
+          <a:p/>
+        </p:txBody>
       </p:sp>
       <p:sp>
         <p:nvSpPr>
@@ -3454,6 +3486,10 @@
             <a:prstDash val="solid"/>
           </a:ln>
         </p:spPr>
+        <p:txBody>
+          <a:bodyPr/>
+          <a:p/>
+        </p:txBody>
       </p:sp>
       <p:sp>
         <p:nvSpPr>
@@ -3473,7 +3509,7 @@
           <a:ln/>
         </p:spPr>
         <p:txBody>
-          <a:bodyPr wrap="square" lIns="0" tIns="0" rIns="0" bIns="0" rtlCol="0" anchor="t"/>
+          <a:bodyPr wrap="none" lIns="0" tIns="0" rIns="0" bIns="0" rtlCol="0" anchor="t"/>
           <a:lstStyle/>
           <a:p>
             <a:pPr algn="l" indent="0" marL="0">
@@ -3515,7 +3551,7 @@
           <a:ln/>
         </p:spPr>
         <p:txBody>
-          <a:bodyPr wrap="square" lIns="0" tIns="0" rIns="0" bIns="0" rtlCol="0" anchor="t"/>
+          <a:bodyPr wrap="none" lIns="0" tIns="0" rIns="0" bIns="0" rtlCol="0" anchor="t"/>
           <a:lstStyle/>
           <a:p>
             <a:pPr algn="l" indent="0" marL="0">
@@ -3557,7 +3593,9 @@
           <a:ln/>
         </p:spPr>
         <p:txBody>
-          <a:bodyPr wrap="square" lIns="0" tIns="0" rIns="0" bIns="0" rtlCol="0" anchor="t"/>
+          <a:bodyPr wrap="square" lIns="0" tIns="0" rIns="0" bIns="0" rtlCol="0" anchor="t">
+            <a:normAutofit/>
+          </a:bodyPr>
           <a:lstStyle/>
           <a:p>
             <a:pPr algn="l" indent="0" marL="0">
@@ -3599,7 +3637,7 @@
           <a:ln/>
         </p:spPr>
         <p:txBody>
-          <a:bodyPr wrap="square" lIns="0" tIns="0" rIns="0" bIns="0" rtlCol="0" anchor="t"/>
+          <a:bodyPr wrap="none" lIns="0" tIns="0" rIns="0" bIns="0" rtlCol="0" anchor="t"/>
           <a:lstStyle/>
           <a:p>
             <a:pPr algn="l" indent="0" marL="0">
@@ -3645,6 +3683,10 @@
             <a:prstDash val="solid"/>
           </a:ln>
         </p:spPr>
+        <p:txBody>
+          <a:bodyPr/>
+          <a:p/>
+        </p:txBody>
       </p:sp>
       <p:sp>
         <p:nvSpPr>
@@ -3668,6 +3710,10 @@
             <a:prstDash val="solid"/>
           </a:ln>
         </p:spPr>
+        <p:txBody>
+          <a:bodyPr/>
+          <a:p/>
+        </p:txBody>
       </p:sp>
       <p:sp>
         <p:nvSpPr>
@@ -3687,7 +3733,7 @@
           <a:ln/>
         </p:spPr>
         <p:txBody>
-          <a:bodyPr wrap="square" lIns="0" tIns="0" rIns="0" bIns="0" rtlCol="0" anchor="t"/>
+          <a:bodyPr wrap="none" lIns="0" tIns="0" rIns="0" bIns="0" rtlCol="0" anchor="t"/>
           <a:lstStyle/>
           <a:p>
             <a:pPr algn="l" indent="0" marL="0">
@@ -3729,7 +3775,7 @@
           <a:ln/>
         </p:spPr>
         <p:txBody>
-          <a:bodyPr wrap="square" lIns="0" tIns="0" rIns="0" bIns="0" rtlCol="0" anchor="t"/>
+          <a:bodyPr wrap="none" lIns="0" tIns="0" rIns="0" bIns="0" rtlCol="0" anchor="t"/>
           <a:lstStyle/>
           <a:p>
             <a:pPr algn="l" indent="0" marL="0">
@@ -3771,7 +3817,9 @@
           <a:ln/>
         </p:spPr>
         <p:txBody>
-          <a:bodyPr wrap="square" lIns="0" tIns="0" rIns="0" bIns="0" rtlCol="0" anchor="t"/>
+          <a:bodyPr wrap="square" lIns="0" tIns="0" rIns="0" bIns="0" rtlCol="0" anchor="t">
+            <a:normAutofit/>
+          </a:bodyPr>
           <a:lstStyle/>
           <a:p>
             <a:pPr algn="l" indent="0" marL="0">
@@ -3813,7 +3861,7 @@
           <a:ln/>
         </p:spPr>
         <p:txBody>
-          <a:bodyPr wrap="square" lIns="0" tIns="0" rIns="0" bIns="0" rtlCol="0" anchor="t"/>
+          <a:bodyPr wrap="none" lIns="0" tIns="0" rIns="0" bIns="0" rtlCol="0" anchor="t"/>
           <a:lstStyle/>
           <a:p>
             <a:pPr algn="l" indent="0" marL="0">
@@ -3859,6 +3907,10 @@
             <a:prstDash val="solid"/>
           </a:ln>
         </p:spPr>
+        <p:txBody>
+          <a:bodyPr/>
+          <a:p/>
+        </p:txBody>
       </p:sp>
       <p:sp>
         <p:nvSpPr>
@@ -3882,6 +3934,10 @@
             <a:prstDash val="solid"/>
           </a:ln>
         </p:spPr>
+        <p:txBody>
+          <a:bodyPr/>
+          <a:p/>
+        </p:txBody>
       </p:sp>
       <p:sp>
         <p:nvSpPr>
@@ -3901,7 +3957,7 @@
           <a:ln/>
         </p:spPr>
         <p:txBody>
-          <a:bodyPr wrap="square" lIns="0" tIns="0" rIns="0" bIns="0" rtlCol="0" anchor="t"/>
+          <a:bodyPr wrap="none" lIns="0" tIns="0" rIns="0" bIns="0" rtlCol="0" anchor="t"/>
           <a:lstStyle/>
           <a:p>
             <a:pPr algn="l" indent="0" marL="0">
@@ -3943,7 +3999,7 @@
           <a:ln/>
         </p:spPr>
         <p:txBody>
-          <a:bodyPr wrap="square" lIns="0" tIns="0" rIns="0" bIns="0" rtlCol="0" anchor="t"/>
+          <a:bodyPr wrap="none" lIns="0" tIns="0" rIns="0" bIns="0" rtlCol="0" anchor="t"/>
           <a:lstStyle/>
           <a:p>
             <a:pPr algn="l" indent="0" marL="0">
@@ -3985,7 +4041,9 @@
           <a:ln/>
         </p:spPr>
         <p:txBody>
-          <a:bodyPr wrap="square" lIns="0" tIns="0" rIns="0" bIns="0" rtlCol="0" anchor="t"/>
+          <a:bodyPr wrap="square" lIns="0" tIns="0" rIns="0" bIns="0" rtlCol="0" anchor="t">
+            <a:normAutofit/>
+          </a:bodyPr>
           <a:lstStyle/>
           <a:p>
             <a:pPr algn="l" indent="0" marL="0">
@@ -4027,7 +4085,7 @@
           <a:ln/>
         </p:spPr>
         <p:txBody>
-          <a:bodyPr wrap="square" lIns="0" tIns="0" rIns="0" bIns="0" rtlCol="0" anchor="t"/>
+          <a:bodyPr wrap="none" lIns="0" tIns="0" rIns="0" bIns="0" rtlCol="0" anchor="t"/>
           <a:lstStyle/>
           <a:p>
             <a:pPr algn="l" indent="0" marL="0">
@@ -4069,7 +4127,7 @@
           <a:ln/>
         </p:spPr>
         <p:txBody>
-          <a:bodyPr wrap="square" lIns="0" tIns="0" rIns="0" bIns="0" rtlCol="0" anchor="t"/>
+          <a:bodyPr wrap="none" lIns="0" tIns="0" rIns="0" bIns="0" rtlCol="0" anchor="t"/>
           <a:lstStyle/>
           <a:p>
             <a:pPr algn="l" indent="0" marL="0">
@@ -4114,7 +4172,7 @@
           <a:ln/>
         </p:spPr>
         <p:txBody>
-          <a:bodyPr wrap="square" lIns="0" tIns="0" rIns="0" bIns="0" rtlCol="0" anchor="t"/>
+          <a:bodyPr wrap="none" lIns="0" tIns="0" rIns="0" bIns="0" rtlCol="0" anchor="t"/>
           <a:lstStyle/>
           <a:p>
             <a:pPr algn="l" indent="0" marL="0">
@@ -4188,7 +4246,7 @@
           <a:ln/>
         </p:spPr>
         <p:txBody>
-          <a:bodyPr wrap="square" lIns="0" tIns="0" rIns="0" bIns="0" rtlCol="0" anchor="t"/>
+          <a:bodyPr wrap="none" lIns="0" tIns="0" rIns="0" bIns="0" rtlCol="0" anchor="t"/>
           <a:lstStyle/>
           <a:p>
             <a:pPr algn="l" indent="0" marL="0">
@@ -4230,7 +4288,7 @@
           <a:ln/>
         </p:spPr>
         <p:txBody>
-          <a:bodyPr wrap="square" lIns="0" tIns="0" rIns="0" bIns="0" rtlCol="0" anchor="t"/>
+          <a:bodyPr wrap="none" lIns="0" tIns="0" rIns="0" bIns="0" rtlCol="0" anchor="t"/>
           <a:lstStyle/>
           <a:p>
             <a:pPr algn="l" indent="0" marL="0">
@@ -4366,7 +4424,7 @@
           <a:ln/>
         </p:spPr>
         <p:txBody>
-          <a:bodyPr wrap="square" lIns="0" tIns="0" rIns="0" bIns="0" rtlCol="0" anchor="t"/>
+          <a:bodyPr wrap="none" lIns="0" tIns="0" rIns="0" bIns="0" rtlCol="0" anchor="t"/>
           <a:lstStyle/>
           <a:p>
             <a:pPr algn="l" indent="0" marL="0">
@@ -4408,7 +4466,7 @@
           <a:ln/>
         </p:spPr>
         <p:txBody>
-          <a:bodyPr wrap="square" lIns="0" tIns="0" rIns="0" bIns="0" rtlCol="0" anchor="t"/>
+          <a:bodyPr wrap="none" lIns="0" tIns="0" rIns="0" bIns="0" rtlCol="0" anchor="t"/>
           <a:lstStyle/>
           <a:p>
             <a:pPr algn="l" indent="0" marL="0">
@@ -4450,7 +4508,7 @@
           <a:ln/>
         </p:spPr>
         <p:txBody>
-          <a:bodyPr wrap="square" lIns="0" tIns="0" rIns="0" bIns="0" rtlCol="0" anchor="t"/>
+          <a:bodyPr wrap="none" lIns="0" tIns="0" rIns="0" bIns="0" rtlCol="0" anchor="t"/>
           <a:lstStyle/>
           <a:p>
             <a:pPr algn="l" indent="0" marL="0">
@@ -4492,7 +4550,7 @@
           <a:ln/>
         </p:spPr>
         <p:txBody>
-          <a:bodyPr wrap="square" lIns="0" tIns="0" rIns="0" bIns="0" rtlCol="0" anchor="t"/>
+          <a:bodyPr wrap="none" lIns="0" tIns="0" rIns="0" bIns="0" rtlCol="0" anchor="t"/>
           <a:lstStyle/>
           <a:p>
             <a:pPr algn="l" indent="0" marL="0">
@@ -4534,7 +4592,9 @@
           <a:ln/>
         </p:spPr>
         <p:txBody>
-          <a:bodyPr wrap="square" lIns="0" tIns="0" rIns="0" bIns="0" rtlCol="0" anchor="t"/>
+          <a:bodyPr wrap="square" lIns="0" tIns="0" rIns="0" bIns="0" rtlCol="0" anchor="t">
+            <a:normAutofit/>
+          </a:bodyPr>
           <a:lstStyle/>
           <a:p>
             <a:pPr algn="l" indent="0" marL="0">
@@ -4576,7 +4636,9 @@
           <a:ln/>
         </p:spPr>
         <p:txBody>
-          <a:bodyPr wrap="square" lIns="0" tIns="0" rIns="0" bIns="0" rtlCol="0" anchor="t"/>
+          <a:bodyPr wrap="square" lIns="0" tIns="0" rIns="0" bIns="0" rtlCol="0" anchor="t">
+            <a:normAutofit/>
+          </a:bodyPr>
           <a:lstStyle/>
           <a:p>
             <a:pPr algn="l" indent="0" marL="0">
@@ -4618,7 +4680,9 @@
           <a:ln/>
         </p:spPr>
         <p:txBody>
-          <a:bodyPr wrap="square" lIns="0" tIns="0" rIns="0" bIns="0" rtlCol="0" anchor="t"/>
+          <a:bodyPr wrap="square" lIns="0" tIns="0" rIns="0" bIns="0" rtlCol="0" anchor="t">
+            <a:normAutofit/>
+          </a:bodyPr>
           <a:lstStyle/>
           <a:p>
             <a:pPr algn="l" indent="0" marL="0">
@@ -4664,6 +4728,10 @@
             <a:prstDash val="solid"/>
           </a:ln>
         </p:spPr>
+        <p:txBody>
+          <a:bodyPr/>
+          <a:p/>
+        </p:txBody>
       </p:sp>
       <p:sp>
         <p:nvSpPr>
@@ -4683,7 +4751,7 @@
           <a:ln/>
         </p:spPr>
         <p:txBody>
-          <a:bodyPr wrap="square" lIns="0" tIns="0" rIns="0" bIns="0" rtlCol="0" anchor="t"/>
+          <a:bodyPr wrap="none" lIns="0" tIns="0" rIns="0" bIns="0" rtlCol="0" anchor="t"/>
           <a:lstStyle/>
           <a:p>
             <a:pPr algn="l" indent="0" marL="0">
@@ -4725,7 +4793,9 @@
           <a:ln/>
         </p:spPr>
         <p:txBody>
-          <a:bodyPr wrap="square" lIns="0" tIns="0" rIns="0" bIns="0" rtlCol="0" anchor="t"/>
+          <a:bodyPr wrap="square" lIns="0" tIns="0" rIns="0" bIns="0" rtlCol="0" anchor="t">
+            <a:normAutofit/>
+          </a:bodyPr>
           <a:lstStyle/>
           <a:p>
             <a:pPr algn="l" indent="0" marL="0">
@@ -4767,7 +4837,9 @@
           <a:ln/>
         </p:spPr>
         <p:txBody>
-          <a:bodyPr wrap="square" lIns="0" tIns="0" rIns="0" bIns="0" rtlCol="0" anchor="t"/>
+          <a:bodyPr wrap="square" lIns="0" tIns="0" rIns="0" bIns="0" rtlCol="0" anchor="t">
+            <a:normAutofit/>
+          </a:bodyPr>
           <a:lstStyle/>
           <a:p>
             <a:pPr algn="l" indent="0" marL="0">
@@ -4809,7 +4881,9 @@
           <a:ln/>
         </p:spPr>
         <p:txBody>
-          <a:bodyPr wrap="square" lIns="0" tIns="0" rIns="0" bIns="0" rtlCol="0" anchor="t"/>
+          <a:bodyPr wrap="square" lIns="0" tIns="0" rIns="0" bIns="0" rtlCol="0" anchor="t">
+            <a:normAutofit/>
+          </a:bodyPr>
           <a:lstStyle/>
           <a:p>
             <a:pPr algn="l" indent="0" marL="0">
@@ -4855,6 +4929,10 @@
             <a:prstDash val="solid"/>
           </a:ln>
         </p:spPr>
+        <p:txBody>
+          <a:bodyPr/>
+          <a:p/>
+        </p:txBody>
       </p:sp>
       <p:sp>
         <p:nvSpPr>
@@ -4874,7 +4952,7 @@
           <a:ln/>
         </p:spPr>
         <p:txBody>
-          <a:bodyPr wrap="square" lIns="0" tIns="0" rIns="0" bIns="0" rtlCol="0" anchor="t"/>
+          <a:bodyPr wrap="none" lIns="0" tIns="0" rIns="0" bIns="0" rtlCol="0" anchor="t"/>
           <a:lstStyle/>
           <a:p>
             <a:pPr algn="l" indent="0" marL="0">
@@ -4916,7 +4994,9 @@
           <a:ln/>
         </p:spPr>
         <p:txBody>
-          <a:bodyPr wrap="square" lIns="0" tIns="0" rIns="0" bIns="0" rtlCol="0" anchor="t"/>
+          <a:bodyPr wrap="square" lIns="0" tIns="0" rIns="0" bIns="0" rtlCol="0" anchor="t">
+            <a:normAutofit/>
+          </a:bodyPr>
           <a:lstStyle/>
           <a:p>
             <a:pPr algn="l" indent="0" marL="0">
@@ -4958,7 +5038,9 @@
           <a:ln/>
         </p:spPr>
         <p:txBody>
-          <a:bodyPr wrap="square" lIns="0" tIns="0" rIns="0" bIns="0" rtlCol="0" anchor="t"/>
+          <a:bodyPr wrap="square" lIns="0" tIns="0" rIns="0" bIns="0" rtlCol="0" anchor="t">
+            <a:normAutofit/>
+          </a:bodyPr>
           <a:lstStyle/>
           <a:p>
             <a:pPr algn="l" indent="0" marL="0">
@@ -5000,7 +5082,7 @@
           <a:ln/>
         </p:spPr>
         <p:txBody>
-          <a:bodyPr wrap="square" lIns="0" tIns="0" rIns="0" bIns="0" rtlCol="0" anchor="t"/>
+          <a:bodyPr wrap="none" lIns="0" tIns="0" rIns="0" bIns="0" rtlCol="0" anchor="t"/>
           <a:lstStyle/>
           <a:p>
             <a:pPr algn="l" indent="0" marL="0">
@@ -5046,6 +5128,10 @@
             <a:prstDash val="solid"/>
           </a:ln>
         </p:spPr>
+        <p:txBody>
+          <a:bodyPr/>
+          <a:p/>
+        </p:txBody>
       </p:sp>
       <p:sp>
         <p:nvSpPr>
@@ -5065,7 +5151,7 @@
           <a:ln/>
         </p:spPr>
         <p:txBody>
-          <a:bodyPr wrap="square" lIns="0" tIns="0" rIns="0" bIns="0" rtlCol="0" anchor="t"/>
+          <a:bodyPr wrap="none" lIns="0" tIns="0" rIns="0" bIns="0" rtlCol="0" anchor="t"/>
           <a:lstStyle/>
           <a:p>
             <a:pPr algn="l" indent="0" marL="0">
@@ -5107,7 +5193,9 @@
           <a:ln/>
         </p:spPr>
         <p:txBody>
-          <a:bodyPr wrap="square" lIns="0" tIns="0" rIns="0" bIns="0" rtlCol="0" anchor="t"/>
+          <a:bodyPr wrap="square" lIns="0" tIns="0" rIns="0" bIns="0" rtlCol="0" anchor="t">
+            <a:normAutofit/>
+          </a:bodyPr>
           <a:lstStyle/>
           <a:p>
             <a:pPr algn="l" indent="0" marL="0">
@@ -5149,7 +5237,9 @@
           <a:ln/>
         </p:spPr>
         <p:txBody>
-          <a:bodyPr wrap="square" lIns="0" tIns="0" rIns="0" bIns="0" rtlCol="0" anchor="t"/>
+          <a:bodyPr wrap="square" lIns="0" tIns="0" rIns="0" bIns="0" rtlCol="0" anchor="t">
+            <a:normAutofit/>
+          </a:bodyPr>
           <a:lstStyle/>
           <a:p>
             <a:pPr algn="l" indent="0" marL="0">
@@ -5191,7 +5281,9 @@
           <a:ln/>
         </p:spPr>
         <p:txBody>
-          <a:bodyPr wrap="square" lIns="0" tIns="0" rIns="0" bIns="0" rtlCol="0" anchor="t"/>
+          <a:bodyPr wrap="square" lIns="0" tIns="0" rIns="0" bIns="0" rtlCol="0" anchor="t">
+            <a:normAutofit/>
+          </a:bodyPr>
           <a:lstStyle/>
           <a:p>
             <a:pPr algn="l" indent="0" marL="0">
@@ -5233,7 +5325,7 @@
           <a:ln/>
         </p:spPr>
         <p:txBody>
-          <a:bodyPr wrap="square" lIns="0" tIns="0" rIns="0" bIns="0" rtlCol="0" anchor="t"/>
+          <a:bodyPr wrap="none" lIns="0" tIns="0" rIns="0" bIns="0" rtlCol="0" anchor="t"/>
           <a:lstStyle/>
           <a:p>
             <a:pPr algn="l" indent="0" marL="0">
@@ -5307,7 +5399,7 @@
           <a:ln/>
         </p:spPr>
         <p:txBody>
-          <a:bodyPr wrap="square" lIns="0" tIns="0" rIns="0" bIns="0" rtlCol="0" anchor="t"/>
+          <a:bodyPr wrap="none" lIns="0" tIns="0" rIns="0" bIns="0" rtlCol="0" anchor="t"/>
           <a:lstStyle/>
           <a:p>
             <a:pPr algn="l" indent="0" marL="0">
@@ -5349,7 +5441,7 @@
           <a:ln/>
         </p:spPr>
         <p:txBody>
-          <a:bodyPr wrap="square" lIns="0" tIns="0" rIns="0" bIns="0" rtlCol="0" anchor="t"/>
+          <a:bodyPr wrap="none" lIns="0" tIns="0" rIns="0" bIns="0" rtlCol="0" anchor="t"/>
           <a:lstStyle/>
           <a:p>
             <a:pPr algn="l" indent="0" marL="0">
@@ -5455,7 +5547,7 @@
           <a:ln/>
         </p:spPr>
         <p:txBody>
-          <a:bodyPr wrap="square" lIns="0" tIns="0" rIns="0" bIns="0" rtlCol="0" anchor="t"/>
+          <a:bodyPr wrap="none" lIns="0" tIns="0" rIns="0" bIns="0" rtlCol="0" anchor="t"/>
           <a:lstStyle/>
           <a:p>
             <a:pPr algn="l" indent="0" marL="0">
@@ -5497,7 +5589,7 @@
           <a:ln/>
         </p:spPr>
         <p:txBody>
-          <a:bodyPr wrap="square" lIns="0" tIns="0" rIns="0" bIns="0" rtlCol="0" anchor="t"/>
+          <a:bodyPr wrap="none" lIns="0" tIns="0" rIns="0" bIns="0" rtlCol="0" anchor="t"/>
           <a:lstStyle/>
           <a:p>
             <a:pPr algn="l" indent="0" marL="0">
@@ -5543,6 +5635,10 @@
             <a:prstDash val="solid"/>
           </a:ln>
         </p:spPr>
+        <p:txBody>
+          <a:bodyPr/>
+          <a:p/>
+        </p:txBody>
       </p:sp>
       <p:sp>
         <p:nvSpPr>
@@ -5562,7 +5658,7 @@
           <a:ln/>
         </p:spPr>
         <p:txBody>
-          <a:bodyPr wrap="square" lIns="0" tIns="0" rIns="0" bIns="0" rtlCol="0" anchor="t"/>
+          <a:bodyPr wrap="none" lIns="0" tIns="0" rIns="0" bIns="0" rtlCol="0" anchor="t"/>
           <a:lstStyle/>
           <a:p>
             <a:pPr algn="l" indent="0" marL="0">
@@ -5604,7 +5700,7 @@
           <a:ln/>
         </p:spPr>
         <p:txBody>
-          <a:bodyPr wrap="square" lIns="0" tIns="0" rIns="0" bIns="0" rtlCol="0" anchor="t"/>
+          <a:bodyPr wrap="none" lIns="0" tIns="0" rIns="0" bIns="0" rtlCol="0" anchor="t"/>
           <a:lstStyle/>
           <a:p>
             <a:pPr algn="l" indent="0" marL="0">
@@ -5650,6 +5746,10 @@
             <a:prstDash val="solid"/>
           </a:ln>
         </p:spPr>
+        <p:txBody>
+          <a:bodyPr/>
+          <a:p/>
+        </p:txBody>
       </p:sp>
       <p:sp>
         <p:nvSpPr>
@@ -5669,7 +5769,7 @@
           <a:ln/>
         </p:spPr>
         <p:txBody>
-          <a:bodyPr wrap="square" lIns="0" tIns="0" rIns="0" bIns="0" rtlCol="0" anchor="t"/>
+          <a:bodyPr wrap="none" lIns="0" tIns="0" rIns="0" bIns="0" rtlCol="0" anchor="t"/>
           <a:lstStyle/>
           <a:p>
             <a:pPr algn="l" indent="0" marL="0">
@@ -5711,7 +5811,7 @@
           <a:ln/>
         </p:spPr>
         <p:txBody>
-          <a:bodyPr wrap="square" lIns="0" tIns="0" rIns="0" bIns="0" rtlCol="0" anchor="t"/>
+          <a:bodyPr wrap="none" lIns="0" tIns="0" rIns="0" bIns="0" rtlCol="0" anchor="t"/>
           <a:lstStyle/>
           <a:p>
             <a:pPr algn="l" indent="0" marL="0">
@@ -5753,7 +5853,7 @@
           <a:ln/>
         </p:spPr>
         <p:txBody>
-          <a:bodyPr wrap="square" lIns="0" tIns="0" rIns="0" bIns="0" rtlCol="0" anchor="t"/>
+          <a:bodyPr wrap="none" lIns="0" tIns="0" rIns="0" bIns="0" rtlCol="0" anchor="t"/>
           <a:lstStyle/>
           <a:p>
             <a:pPr algn="l" indent="0" marL="0">
@@ -5795,7 +5895,7 @@
           <a:ln/>
         </p:spPr>
         <p:txBody>
-          <a:bodyPr wrap="square" lIns="0" tIns="0" rIns="0" bIns="0" rtlCol="0" anchor="t"/>
+          <a:bodyPr wrap="none" lIns="0" tIns="0" rIns="0" bIns="0" rtlCol="0" anchor="t"/>
           <a:lstStyle/>
           <a:p>
             <a:pPr algn="l" indent="0" marL="0">
@@ -5837,7 +5937,7 @@
           <a:ln/>
         </p:spPr>
         <p:txBody>
-          <a:bodyPr wrap="square" lIns="0" tIns="0" rIns="0" bIns="0" rtlCol="0" anchor="t"/>
+          <a:bodyPr wrap="none" lIns="0" tIns="0" rIns="0" bIns="0" rtlCol="0" anchor="t"/>
           <a:lstStyle/>
           <a:p>
             <a:pPr algn="l" indent="0" marL="0">

--- a/decks/model-registry/model-registry.pptx
+++ b/decks/model-registry/model-registry.pptx
@@ -1363,9 +1363,7 @@
           <a:ln/>
         </p:spPr>
         <p:txBody>
-          <a:bodyPr wrap="square" lIns="0" tIns="0" rIns="0" bIns="0" rtlCol="0" anchor="t">
-            <a:normAutofit/>
-          </a:bodyPr>
+          <a:bodyPr wrap="none" lIns="0" tIns="0" rIns="0" bIns="0" rtlCol="0" anchor="t"/>
           <a:lstStyle/>
           <a:p>
             <a:pPr algn="l" indent="0" marL="0">
